--- a/media/exports/reports/2025-10/funding.pptx
+++ b/media/exports/reports/2025-10/funding.pptx
@@ -258,7 +258,9 @@
     <a:lstStyle/>
     <a:p>
       <a:pPr>
-        <a:defRPr sz="1800"/>
+        <a:defRPr sz="1800">
+          <a:latin typeface="Roboto"/>
+        </a:defRPr>
       </a:pPr>
       <a:endParaRPr lang="en-US"/>
     </a:p>
@@ -488,7 +490,9 @@
     <a:lstStyle/>
     <a:p>
       <a:pPr>
-        <a:defRPr sz="1800"/>
+        <a:defRPr sz="1800">
+          <a:latin typeface="Roboto"/>
+        </a:defRPr>
       </a:pPr>
       <a:endParaRPr/>
     </a:p>
@@ -718,7 +722,9 @@
     <a:lstStyle/>
     <a:p>
       <a:pPr>
-        <a:defRPr sz="1800"/>
+        <a:defRPr sz="1800">
+          <a:latin typeface="Roboto"/>
+        </a:defRPr>
       </a:pPr>
       <a:endParaRPr/>
     </a:p>
@@ -3749,11 +3755,17 @@
           <a:bodyPr rtlCol="0" anchor="ctr"/>
           <a:lstStyle/>
           <a:p>
+            <a:pPr>
+              <a:defRPr>
+                <a:latin typeface="Roboto"/>
+              </a:defRPr>
+            </a:pPr>
             <a:r>
               <a:rPr sz="1600" b="1">
                 <a:solidFill>
                   <a:srgbClr val="FFFFFF"/>
                 </a:solidFill>
+                <a:latin typeface="Roboto"/>
               </a:rPr>
               <a:t>4th</a:t>
             </a:r>
@@ -3782,14 +3794,19 @@
           </a:bodyPr>
           <a:lstStyle/>
           <a:p>
+            <a:pPr>
+              <a:defRPr>
+                <a:latin typeface="Roboto"/>
+              </a:defRPr>
+            </a:pPr>
             <a:r>
               <a:rPr sz="1800" b="1">
                 <a:solidFill>
                   <a:srgbClr val="25342A"/>
                 </a:solidFill>
-                <a:latin typeface="Arial"/>
+                <a:latin typeface="Roboto"/>
               </a:rPr>
-              <a:t>The 4th Sheet</a:t>
+              <a:t>The Fourth Sheet</a:t>
             </a:r>
           </a:p>
         </p:txBody>
@@ -3816,12 +3833,17 @@
           </a:bodyPr>
           <a:lstStyle/>
           <a:p>
+            <a:pPr>
+              <a:defRPr>
+                <a:latin typeface="Roboto"/>
+              </a:defRPr>
+            </a:pPr>
             <a:r>
               <a:rPr sz="1100" b="1">
                 <a:solidFill>
                   <a:srgbClr val="8A7A52"/>
                 </a:solidFill>
-                <a:latin typeface="Arial"/>
+                <a:latin typeface="Roboto"/>
               </a:rPr>
               <a:t>SAMPLE DATA · invented figures for demonstration</a:t>
             </a:r>
@@ -3850,12 +3872,17 @@
           </a:bodyPr>
           <a:lstStyle/>
           <a:p>
+            <a:pPr>
+              <a:defRPr>
+                <a:latin typeface="Roboto"/>
+              </a:defRPr>
+            </a:pPr>
             <a:r>
               <a:rPr sz="3400" b="1">
                 <a:solidFill>
                   <a:srgbClr val="25342A"/>
                 </a:solidFill>
-                <a:latin typeface="Arial"/>
+                <a:latin typeface="Roboto"/>
               </a:rPr>
               <a:t>Which funding is worth chasing?</a:t>
             </a:r>
@@ -3884,12 +3911,17 @@
           </a:bodyPr>
           <a:lstStyle/>
           <a:p>
+            <a:pPr>
+              <a:defRPr>
+                <a:latin typeface="Roboto"/>
+              </a:defRPr>
+            </a:pPr>
             <a:r>
               <a:rPr sz="1600" b="0">
                 <a:solidFill>
                   <a:srgbClr val="5F6F63"/>
                 </a:solidFill>
-                <a:latin typeface="Arial"/>
+                <a:latin typeface="Roboto"/>
               </a:rPr>
               <a:t>Sample Community Services Ltd</a:t>
             </a:r>
@@ -3918,12 +3950,17 @@
           </a:bodyPr>
           <a:lstStyle/>
           <a:p>
+            <a:pPr>
+              <a:defRPr>
+                <a:latin typeface="Roboto"/>
+              </a:defRPr>
+            </a:pPr>
             <a:r>
               <a:rPr sz="1400" b="0">
                 <a:solidFill>
                   <a:srgbClr val="25342A"/>
                 </a:solidFill>
-                <a:latin typeface="Arial"/>
+                <a:latin typeface="Roboto"/>
               </a:rPr>
               <a:t>Period: October 2025. Each source of money compared on what it raises and what it costs to raise. Pick a source and every chart, table row and note follows it.</a:t>
             </a:r>
@@ -3952,45 +3989,65 @@
           </a:bodyPr>
           <a:lstStyle/>
           <a:p>
+            <a:pPr>
+              <a:defRPr>
+                <a:latin typeface="Roboto"/>
+              </a:defRPr>
+            </a:pPr>
             <a:r>
               <a:rPr sz="1100" b="0">
                 <a:solidFill>
                   <a:srgbClr val="5F6F63"/>
                 </a:solidFill>
-                <a:latin typeface="Arial"/>
+                <a:latin typeface="Roboto"/>
               </a:rPr>
               <a:t>How final is this data?</a:t>
             </a:r>
           </a:p>
           <a:p>
+            <a:pPr>
+              <a:defRPr>
+                <a:latin typeface="Roboto"/>
+              </a:defRPr>
+            </a:pPr>
             <a:r>
               <a:rPr sz="1100" b="0">
                 <a:solidFill>
                   <a:srgbClr val="5F6F63"/>
                 </a:solidFill>
-                <a:latin typeface="Arial"/>
+                <a:latin typeface="Roboto"/>
               </a:rPr>
               <a:t>September 2025: Locked. September 2025 is locked (closed 2 Oct 2025). These numbers won't change.</a:t>
             </a:r>
           </a:p>
           <a:p>
+            <a:pPr>
+              <a:defRPr>
+                <a:latin typeface="Roboto"/>
+              </a:defRPr>
+            </a:pPr>
             <a:r>
               <a:rPr sz="1100" b="0">
                 <a:solidFill>
                   <a:srgbClr val="5F6F63"/>
                 </a:solidFill>
-                <a:latin typeface="Arial"/>
+                <a:latin typeface="Roboto"/>
               </a:rPr>
               <a:t>October 2025: Locked. October 2025 is locked (closed 4 Nov 2025). These numbers won't change.</a:t>
             </a:r>
           </a:p>
           <a:p>
+            <a:pPr>
+              <a:defRPr>
+                <a:latin typeface="Roboto"/>
+              </a:defRPr>
+            </a:pPr>
             <a:r>
               <a:rPr sz="1100" b="0">
                 <a:solidFill>
                   <a:srgbClr val="5F6F63"/>
                 </a:solidFill>
-                <a:latin typeface="Arial"/>
+                <a:latin typeface="Roboto"/>
               </a:rPr>
               <a:t>October 2026: Incomplete. October 2026 is still in progress: figures to 6 Oct only.</a:t>
             </a:r>
@@ -4019,12 +4076,17 @@
           </a:bodyPr>
           <a:lstStyle/>
           <a:p>
+            <a:pPr>
+              <a:defRPr>
+                <a:latin typeface="Roboto"/>
+              </a:defRPr>
+            </a:pPr>
             <a:r>
               <a:rPr sz="900" b="0">
                 <a:solidFill>
                   <a:srgbClr val="5F6F63"/>
                 </a:solidFill>
-                <a:latin typeface="Arial"/>
+                <a:latin typeface="Roboto"/>
               </a:rPr>
               <a:t>funding.pptx</a:t>
             </a:r>
@@ -4053,13 +4115,17 @@
           </a:bodyPr>
           <a:lstStyle/>
           <a:p>
-            <a:pPr algn="ctr"/>
+            <a:pPr algn="ctr">
+              <a:defRPr>
+                <a:latin typeface="Roboto"/>
+              </a:defRPr>
+            </a:pPr>
             <a:r>
               <a:rPr sz="900" b="0">
                 <a:solidFill>
                   <a:srgbClr val="5F6F63"/>
                 </a:solidFill>
-                <a:latin typeface="Arial"/>
+                <a:latin typeface="Roboto"/>
               </a:rPr>
               <a:t>Data retrieved 2pm, Tue 6 Oct 2026 · Sample data</a:t>
             </a:r>
@@ -4088,13 +4154,17 @@
           </a:bodyPr>
           <a:lstStyle/>
           <a:p>
-            <a:pPr algn="r"/>
+            <a:pPr algn="r">
+              <a:defRPr>
+                <a:latin typeface="Roboto"/>
+              </a:defRPr>
+            </a:pPr>
             <a:r>
               <a:rPr sz="900" b="0">
                 <a:solidFill>
                   <a:srgbClr val="5F6F63"/>
                 </a:solidFill>
-                <a:latin typeface="Arial"/>
+                <a:latin typeface="Roboto"/>
               </a:rPr>
               <a:t>Slide 1 of 9</a:t>
             </a:r>
@@ -4158,7 +4228,11 @@
           <a:bodyPr rtlCol="0" anchor="ctr"/>
           <a:lstStyle/>
           <a:p>
-            <a:pPr algn="ctr"/>
+            <a:pPr algn="ctr">
+              <a:defRPr>
+                <a:latin typeface="Roboto"/>
+              </a:defRPr>
+            </a:pPr>
           </a:p>
         </p:txBody>
       </p:sp>
@@ -4184,12 +4258,17 @@
           </a:bodyPr>
           <a:lstStyle/>
           <a:p>
+            <a:pPr>
+              <a:defRPr>
+                <a:latin typeface="Roboto"/>
+              </a:defRPr>
+            </a:pPr>
             <a:r>
               <a:rPr sz="1000" b="0">
                 <a:solidFill>
                   <a:srgbClr val="5F6F63"/>
                 </a:solidFill>
-                <a:latin typeface="Arial"/>
+                <a:latin typeface="Roboto"/>
               </a:rPr>
               <a:t>Sample Community Services Ltd · Which funding is worth chasing?</a:t>
             </a:r>
@@ -4218,12 +4297,17 @@
           </a:bodyPr>
           <a:lstStyle/>
           <a:p>
+            <a:pPr>
+              <a:defRPr>
+                <a:latin typeface="Roboto"/>
+              </a:defRPr>
+            </a:pPr>
             <a:r>
               <a:rPr sz="2400" b="1">
                 <a:solidFill>
                   <a:srgbClr val="25342A"/>
                 </a:solidFill>
-                <a:latin typeface="Arial"/>
+                <a:latin typeface="Roboto"/>
               </a:rPr>
               <a:t>Cost to raise a dollar, by source, October 2025 (cents) · Source: All sources</a:t>
             </a:r>
@@ -4270,12 +4354,17 @@
           </a:bodyPr>
           <a:lstStyle/>
           <a:p>
+            <a:pPr>
+              <a:defRPr>
+                <a:latin typeface="Roboto"/>
+              </a:defRPr>
+            </a:pPr>
             <a:r>
               <a:rPr sz="900" b="0">
                 <a:solidFill>
                   <a:srgbClr val="5F6F63"/>
                 </a:solidFill>
-                <a:latin typeface="Arial"/>
+                <a:latin typeface="Roboto"/>
               </a:rPr>
               <a:t>funding.pptx</a:t>
             </a:r>
@@ -4304,13 +4393,17 @@
           </a:bodyPr>
           <a:lstStyle/>
           <a:p>
-            <a:pPr algn="ctr"/>
+            <a:pPr algn="ctr">
+              <a:defRPr>
+                <a:latin typeface="Roboto"/>
+              </a:defRPr>
+            </a:pPr>
             <a:r>
               <a:rPr sz="900" b="0">
                 <a:solidFill>
                   <a:srgbClr val="5F6F63"/>
                 </a:solidFill>
-                <a:latin typeface="Arial"/>
+                <a:latin typeface="Roboto"/>
               </a:rPr>
               <a:t>Data retrieved 2pm, Tue 6 Oct 2026 · Sample data</a:t>
             </a:r>
@@ -4339,13 +4432,17 @@
           </a:bodyPr>
           <a:lstStyle/>
           <a:p>
-            <a:pPr algn="r"/>
+            <a:pPr algn="r">
+              <a:defRPr>
+                <a:latin typeface="Roboto"/>
+              </a:defRPr>
+            </a:pPr>
             <a:r>
               <a:rPr sz="900" b="0">
                 <a:solidFill>
                   <a:srgbClr val="5F6F63"/>
                 </a:solidFill>
-                <a:latin typeface="Arial"/>
+                <a:latin typeface="Roboto"/>
               </a:rPr>
               <a:t>Slide 2 of 9</a:t>
             </a:r>
@@ -4409,7 +4506,11 @@
           <a:bodyPr rtlCol="0" anchor="ctr"/>
           <a:lstStyle/>
           <a:p>
-            <a:pPr algn="ctr"/>
+            <a:pPr algn="ctr">
+              <a:defRPr>
+                <a:latin typeface="Roboto"/>
+              </a:defRPr>
+            </a:pPr>
           </a:p>
         </p:txBody>
       </p:sp>
@@ -4435,12 +4536,17 @@
           </a:bodyPr>
           <a:lstStyle/>
           <a:p>
+            <a:pPr>
+              <a:defRPr>
+                <a:latin typeface="Roboto"/>
+              </a:defRPr>
+            </a:pPr>
             <a:r>
               <a:rPr sz="1000" b="0">
                 <a:solidFill>
                   <a:srgbClr val="5F6F63"/>
                 </a:solidFill>
-                <a:latin typeface="Arial"/>
+                <a:latin typeface="Roboto"/>
               </a:rPr>
               <a:t>Sample Community Services Ltd · Which funding is worth chasing?</a:t>
             </a:r>
@@ -4469,12 +4575,17 @@
           </a:bodyPr>
           <a:lstStyle/>
           <a:p>
+            <a:pPr>
+              <a:defRPr>
+                <a:latin typeface="Roboto"/>
+              </a:defRPr>
+            </a:pPr>
             <a:r>
               <a:rPr sz="2400" b="1">
                 <a:solidFill>
                   <a:srgbClr val="25342A"/>
                 </a:solidFill>
-                <a:latin typeface="Arial"/>
+                <a:latin typeface="Roboto"/>
               </a:rPr>
               <a:t>What it shows · Source: All sources</a:t>
             </a:r>
@@ -4522,7 +4633,11 @@
           <a:bodyPr rtlCol="0" anchor="ctr"/>
           <a:lstStyle/>
           <a:p>
-            <a:pPr algn="ctr"/>
+            <a:pPr algn="ctr">
+              <a:defRPr>
+                <a:latin typeface="Roboto"/>
+              </a:defRPr>
+            </a:pPr>
           </a:p>
         </p:txBody>
       </p:sp>
@@ -4548,12 +4663,17 @@
           </a:bodyPr>
           <a:lstStyle/>
           <a:p>
+            <a:pPr>
+              <a:defRPr>
+                <a:latin typeface="Roboto"/>
+              </a:defRPr>
+            </a:pPr>
             <a:r>
               <a:rPr sz="1100" b="1">
                 <a:solidFill>
                   <a:srgbClr val="5F6F63"/>
                 </a:solidFill>
-                <a:latin typeface="Arial"/>
+                <a:latin typeface="Roboto"/>
               </a:rPr>
               <a:t>WHAT IT SHOWS</a:t>
             </a:r>
@@ -4582,12 +4702,17 @@
           </a:bodyPr>
           <a:lstStyle/>
           <a:p>
+            <a:pPr>
+              <a:defRPr>
+                <a:latin typeface="Roboto"/>
+              </a:defRPr>
+            </a:pPr>
             <a:r>
               <a:rPr sz="1600" b="0">
                 <a:solidFill>
                   <a:srgbClr val="25342A"/>
                 </a:solidFill>
-                <a:latin typeface="Arial"/>
+                <a:latin typeface="Roboto"/>
               </a:rPr>
               <a:t>In October it cost: Grants 10¢, donations 14¢ to raise each dollar.</a:t>
             </a:r>
@@ -4635,7 +4760,11 @@
           <a:bodyPr rtlCol="0" anchor="ctr"/>
           <a:lstStyle/>
           <a:p>
-            <a:pPr algn="ctr"/>
+            <a:pPr algn="ctr">
+              <a:defRPr>
+                <a:latin typeface="Roboto"/>
+              </a:defRPr>
+            </a:pPr>
           </a:p>
         </p:txBody>
       </p:sp>
@@ -4661,12 +4790,17 @@
           </a:bodyPr>
           <a:lstStyle/>
           <a:p>
+            <a:pPr>
+              <a:defRPr>
+                <a:latin typeface="Roboto"/>
+              </a:defRPr>
+            </a:pPr>
             <a:r>
               <a:rPr sz="1100" b="1">
                 <a:solidFill>
                   <a:srgbClr val="5F6F63"/>
                 </a:solidFill>
-                <a:latin typeface="Arial"/>
+                <a:latin typeface="Roboto"/>
               </a:rPr>
               <a:t>WHAT YOU'D DO ABOUT IT</a:t>
             </a:r>
@@ -4695,12 +4829,17 @@
           </a:bodyPr>
           <a:lstStyle/>
           <a:p>
+            <a:pPr>
+              <a:defRPr>
+                <a:latin typeface="Roboto"/>
+              </a:defRPr>
+            </a:pPr>
             <a:r>
               <a:rPr sz="1600" b="0">
                 <a:solidFill>
                   <a:srgbClr val="25342A"/>
                 </a:solidFill>
-                <a:latin typeface="Arial"/>
+                <a:latin typeface="Roboto"/>
               </a:rPr>
               <a:t>Cheapest to raise in October: grants (10¢ a dollar). Dearest: donations (14¢). Events are worth counting for what else they bring too (new donors, profile).</a:t>
             </a:r>
@@ -4729,12 +4868,17 @@
           </a:bodyPr>
           <a:lstStyle/>
           <a:p>
+            <a:pPr>
+              <a:defRPr>
+                <a:latin typeface="Roboto"/>
+              </a:defRPr>
+            </a:pPr>
             <a:r>
               <a:rPr sz="900" b="0">
                 <a:solidFill>
                   <a:srgbClr val="5F6F63"/>
                 </a:solidFill>
-                <a:latin typeface="Arial"/>
+                <a:latin typeface="Roboto"/>
               </a:rPr>
               <a:t>funding.pptx</a:t>
             </a:r>
@@ -4763,13 +4907,17 @@
           </a:bodyPr>
           <a:lstStyle/>
           <a:p>
-            <a:pPr algn="ctr"/>
+            <a:pPr algn="ctr">
+              <a:defRPr>
+                <a:latin typeface="Roboto"/>
+              </a:defRPr>
+            </a:pPr>
             <a:r>
               <a:rPr sz="900" b="0">
                 <a:solidFill>
                   <a:srgbClr val="5F6F63"/>
                 </a:solidFill>
-                <a:latin typeface="Arial"/>
+                <a:latin typeface="Roboto"/>
               </a:rPr>
               <a:t>Data retrieved 2pm, Tue 6 Oct 2026 · Sample data</a:t>
             </a:r>
@@ -4798,13 +4946,17 @@
           </a:bodyPr>
           <a:lstStyle/>
           <a:p>
-            <a:pPr algn="r"/>
+            <a:pPr algn="r">
+              <a:defRPr>
+                <a:latin typeface="Roboto"/>
+              </a:defRPr>
+            </a:pPr>
             <a:r>
               <a:rPr sz="900" b="0">
                 <a:solidFill>
                   <a:srgbClr val="5F6F63"/>
                 </a:solidFill>
-                <a:latin typeface="Arial"/>
+                <a:latin typeface="Roboto"/>
               </a:rPr>
               <a:t>Slide 3 of 9</a:t>
             </a:r>
@@ -4868,7 +5020,11 @@
           <a:bodyPr rtlCol="0" anchor="ctr"/>
           <a:lstStyle/>
           <a:p>
-            <a:pPr algn="ctr"/>
+            <a:pPr algn="ctr">
+              <a:defRPr>
+                <a:latin typeface="Roboto"/>
+              </a:defRPr>
+            </a:pPr>
           </a:p>
         </p:txBody>
       </p:sp>
@@ -4894,12 +5050,17 @@
           </a:bodyPr>
           <a:lstStyle/>
           <a:p>
+            <a:pPr>
+              <a:defRPr>
+                <a:latin typeface="Roboto"/>
+              </a:defRPr>
+            </a:pPr>
             <a:r>
               <a:rPr sz="1000" b="0">
                 <a:solidFill>
                   <a:srgbClr val="5F6F63"/>
                 </a:solidFill>
-                <a:latin typeface="Arial"/>
+                <a:latin typeface="Roboto"/>
               </a:rPr>
               <a:t>Sample Community Services Ltd · Which funding is worth chasing?</a:t>
             </a:r>
@@ -4928,12 +5089,17 @@
           </a:bodyPr>
           <a:lstStyle/>
           <a:p>
+            <a:pPr>
+              <a:defRPr>
+                <a:latin typeface="Roboto"/>
+              </a:defRPr>
+            </a:pPr>
             <a:r>
               <a:rPr sz="2400" b="1">
                 <a:solidFill>
                   <a:srgbClr val="25342A"/>
                 </a:solidFill>
-                <a:latin typeface="Arial"/>
+                <a:latin typeface="Roboto"/>
               </a:rPr>
               <a:t>What it shows · Source: Grants</a:t>
             </a:r>
@@ -4981,7 +5147,11 @@
           <a:bodyPr rtlCol="0" anchor="ctr"/>
           <a:lstStyle/>
           <a:p>
-            <a:pPr algn="ctr"/>
+            <a:pPr algn="ctr">
+              <a:defRPr>
+                <a:latin typeface="Roboto"/>
+              </a:defRPr>
+            </a:pPr>
           </a:p>
         </p:txBody>
       </p:sp>
@@ -5007,12 +5177,17 @@
           </a:bodyPr>
           <a:lstStyle/>
           <a:p>
+            <a:pPr>
+              <a:defRPr>
+                <a:latin typeface="Roboto"/>
+              </a:defRPr>
+            </a:pPr>
             <a:r>
               <a:rPr sz="1100" b="1">
                 <a:solidFill>
                   <a:srgbClr val="5F6F63"/>
                 </a:solidFill>
-                <a:latin typeface="Arial"/>
+                <a:latin typeface="Roboto"/>
               </a:rPr>
               <a:t>WHAT IT SHOWS</a:t>
             </a:r>
@@ -5041,12 +5216,17 @@
           </a:bodyPr>
           <a:lstStyle/>
           <a:p>
+            <a:pPr>
+              <a:defRPr>
+                <a:latin typeface="Roboto"/>
+              </a:defRPr>
+            </a:pPr>
             <a:r>
               <a:rPr sz="1600" b="0">
                 <a:solidFill>
                   <a:srgbClr val="25342A"/>
                 </a:solidFill>
-                <a:latin typeface="Arial"/>
+                <a:latin typeface="Roboto"/>
               </a:rPr>
               <a:t>Grants: $251,929 raised this financial year to date (71.9% of everything raised), $28,400 to raise it, so $223,529 left for programs: 11¢ per dollar.</a:t>
             </a:r>
@@ -5094,7 +5274,11 @@
           <a:bodyPr rtlCol="0" anchor="ctr"/>
           <a:lstStyle/>
           <a:p>
-            <a:pPr algn="ctr"/>
+            <a:pPr algn="ctr">
+              <a:defRPr>
+                <a:latin typeface="Roboto"/>
+              </a:defRPr>
+            </a:pPr>
           </a:p>
         </p:txBody>
       </p:sp>
@@ -5120,12 +5304,17 @@
           </a:bodyPr>
           <a:lstStyle/>
           <a:p>
+            <a:pPr>
+              <a:defRPr>
+                <a:latin typeface="Roboto"/>
+              </a:defRPr>
+            </a:pPr>
             <a:r>
               <a:rPr sz="1100" b="1">
                 <a:solidFill>
                   <a:srgbClr val="5F6F63"/>
                 </a:solidFill>
-                <a:latin typeface="Arial"/>
+                <a:latin typeface="Roboto"/>
               </a:rPr>
               <a:t>WHAT YOU'D DO ABOUT IT</a:t>
             </a:r>
@@ -5154,12 +5343,17 @@
           </a:bodyPr>
           <a:lstStyle/>
           <a:p>
+            <a:pPr>
+              <a:defRPr>
+                <a:latin typeface="Roboto"/>
+              </a:defRPr>
+            </a:pPr>
             <a:r>
               <a:rPr sz="1600" b="0">
                 <a:solidFill>
                   <a:srgbClr val="25342A"/>
                 </a:solidFill>
-                <a:latin typeface="Arial"/>
+                <a:latin typeface="Roboto"/>
               </a:rPr>
               <a:t>Most of the money, and usually the cheapest to raise, starting with grants that renew.</a:t>
             </a:r>
@@ -5188,12 +5382,17 @@
           </a:bodyPr>
           <a:lstStyle/>
           <a:p>
+            <a:pPr>
+              <a:defRPr>
+                <a:latin typeface="Roboto"/>
+              </a:defRPr>
+            </a:pPr>
             <a:r>
               <a:rPr sz="900" b="0">
                 <a:solidFill>
                   <a:srgbClr val="5F6F63"/>
                 </a:solidFill>
-                <a:latin typeface="Arial"/>
+                <a:latin typeface="Roboto"/>
               </a:rPr>
               <a:t>funding.pptx</a:t>
             </a:r>
@@ -5222,13 +5421,17 @@
           </a:bodyPr>
           <a:lstStyle/>
           <a:p>
-            <a:pPr algn="ctr"/>
+            <a:pPr algn="ctr">
+              <a:defRPr>
+                <a:latin typeface="Roboto"/>
+              </a:defRPr>
+            </a:pPr>
             <a:r>
               <a:rPr sz="900" b="0">
                 <a:solidFill>
                   <a:srgbClr val="5F6F63"/>
                 </a:solidFill>
-                <a:latin typeface="Arial"/>
+                <a:latin typeface="Roboto"/>
               </a:rPr>
               <a:t>Data retrieved 2pm, Tue 6 Oct 2026 · Sample data</a:t>
             </a:r>
@@ -5257,13 +5460,17 @@
           </a:bodyPr>
           <a:lstStyle/>
           <a:p>
-            <a:pPr algn="r"/>
+            <a:pPr algn="r">
+              <a:defRPr>
+                <a:latin typeface="Roboto"/>
+              </a:defRPr>
+            </a:pPr>
             <a:r>
               <a:rPr sz="900" b="0">
                 <a:solidFill>
                   <a:srgbClr val="5F6F63"/>
                 </a:solidFill>
-                <a:latin typeface="Arial"/>
+                <a:latin typeface="Roboto"/>
               </a:rPr>
               <a:t>Slide 4 of 9</a:t>
             </a:r>
@@ -5327,7 +5534,11 @@
           <a:bodyPr rtlCol="0" anchor="ctr"/>
           <a:lstStyle/>
           <a:p>
-            <a:pPr algn="ctr"/>
+            <a:pPr algn="ctr">
+              <a:defRPr>
+                <a:latin typeface="Roboto"/>
+              </a:defRPr>
+            </a:pPr>
           </a:p>
         </p:txBody>
       </p:sp>
@@ -5353,12 +5564,17 @@
           </a:bodyPr>
           <a:lstStyle/>
           <a:p>
+            <a:pPr>
+              <a:defRPr>
+                <a:latin typeface="Roboto"/>
+              </a:defRPr>
+            </a:pPr>
             <a:r>
               <a:rPr sz="1000" b="0">
                 <a:solidFill>
                   <a:srgbClr val="5F6F63"/>
                 </a:solidFill>
-                <a:latin typeface="Arial"/>
+                <a:latin typeface="Roboto"/>
               </a:rPr>
               <a:t>Sample Community Services Ltd · Which funding is worth chasing?</a:t>
             </a:r>
@@ -5387,12 +5603,17 @@
           </a:bodyPr>
           <a:lstStyle/>
           <a:p>
+            <a:pPr>
+              <a:defRPr>
+                <a:latin typeface="Roboto"/>
+              </a:defRPr>
+            </a:pPr>
             <a:r>
               <a:rPr sz="2400" b="1">
                 <a:solidFill>
                   <a:srgbClr val="25342A"/>
                 </a:solidFill>
-                <a:latin typeface="Arial"/>
+                <a:latin typeface="Roboto"/>
               </a:rPr>
               <a:t>What it shows · Source: Donations</a:t>
             </a:r>
@@ -5440,7 +5661,11 @@
           <a:bodyPr rtlCol="0" anchor="ctr"/>
           <a:lstStyle/>
           <a:p>
-            <a:pPr algn="ctr"/>
+            <a:pPr algn="ctr">
+              <a:defRPr>
+                <a:latin typeface="Roboto"/>
+              </a:defRPr>
+            </a:pPr>
           </a:p>
         </p:txBody>
       </p:sp>
@@ -5466,12 +5691,17 @@
           </a:bodyPr>
           <a:lstStyle/>
           <a:p>
+            <a:pPr>
+              <a:defRPr>
+                <a:latin typeface="Roboto"/>
+              </a:defRPr>
+            </a:pPr>
             <a:r>
               <a:rPr sz="1100" b="1">
                 <a:solidFill>
                   <a:srgbClr val="5F6F63"/>
                 </a:solidFill>
-                <a:latin typeface="Arial"/>
+                <a:latin typeface="Roboto"/>
               </a:rPr>
               <a:t>WHAT IT SHOWS</a:t>
             </a:r>
@@ -5500,12 +5730,17 @@
           </a:bodyPr>
           <a:lstStyle/>
           <a:p>
+            <a:pPr>
+              <a:defRPr>
+                <a:latin typeface="Roboto"/>
+              </a:defRPr>
+            </a:pPr>
             <a:r>
               <a:rPr sz="1600" b="0">
                 <a:solidFill>
                   <a:srgbClr val="25342A"/>
                 </a:solidFill>
-                <a:latin typeface="Arial"/>
+                <a:latin typeface="Roboto"/>
               </a:rPr>
               <a:t>Donations: $61,800 raised this financial year to date (17.6% of everything raised), $8,800 to raise it, so $53,000 left for programs: 14¢ per dollar.</a:t>
             </a:r>
@@ -5553,7 +5788,11 @@
           <a:bodyPr rtlCol="0" anchor="ctr"/>
           <a:lstStyle/>
           <a:p>
-            <a:pPr algn="ctr"/>
+            <a:pPr algn="ctr">
+              <a:defRPr>
+                <a:latin typeface="Roboto"/>
+              </a:defRPr>
+            </a:pPr>
           </a:p>
         </p:txBody>
       </p:sp>
@@ -5579,12 +5818,17 @@
           </a:bodyPr>
           <a:lstStyle/>
           <a:p>
+            <a:pPr>
+              <a:defRPr>
+                <a:latin typeface="Roboto"/>
+              </a:defRPr>
+            </a:pPr>
             <a:r>
               <a:rPr sz="1100" b="1">
                 <a:solidFill>
                   <a:srgbClr val="5F6F63"/>
                 </a:solidFill>
-                <a:latin typeface="Arial"/>
+                <a:latin typeface="Roboto"/>
               </a:rPr>
               <a:t>WHAT YOU'D DO ABOUT IT</a:t>
             </a:r>
@@ -5613,12 +5857,17 @@
           </a:bodyPr>
           <a:lstStyle/>
           <a:p>
+            <a:pPr>
+              <a:defRPr>
+                <a:latin typeface="Roboto"/>
+              </a:defRPr>
+            </a:pPr>
             <a:r>
               <a:rPr sz="1600" b="0">
                 <a:solidFill>
                   <a:srgbClr val="25342A"/>
                 </a:solidFill>
-                <a:latin typeface="Arial"/>
+                <a:latin typeface="Roboto"/>
               </a:rPr>
               <a:t>Cheap and flexible (untied): the money that builds reserves.</a:t>
             </a:r>
@@ -5647,12 +5896,17 @@
           </a:bodyPr>
           <a:lstStyle/>
           <a:p>
+            <a:pPr>
+              <a:defRPr>
+                <a:latin typeface="Roboto"/>
+              </a:defRPr>
+            </a:pPr>
             <a:r>
               <a:rPr sz="900" b="0">
                 <a:solidFill>
                   <a:srgbClr val="5F6F63"/>
                 </a:solidFill>
-                <a:latin typeface="Arial"/>
+                <a:latin typeface="Roboto"/>
               </a:rPr>
               <a:t>funding.pptx</a:t>
             </a:r>
@@ -5681,13 +5935,17 @@
           </a:bodyPr>
           <a:lstStyle/>
           <a:p>
-            <a:pPr algn="ctr"/>
+            <a:pPr algn="ctr">
+              <a:defRPr>
+                <a:latin typeface="Roboto"/>
+              </a:defRPr>
+            </a:pPr>
             <a:r>
               <a:rPr sz="900" b="0">
                 <a:solidFill>
                   <a:srgbClr val="5F6F63"/>
                 </a:solidFill>
-                <a:latin typeface="Arial"/>
+                <a:latin typeface="Roboto"/>
               </a:rPr>
               <a:t>Data retrieved 2pm, Tue 6 Oct 2026 · Sample data</a:t>
             </a:r>
@@ -5716,13 +5974,17 @@
           </a:bodyPr>
           <a:lstStyle/>
           <a:p>
-            <a:pPr algn="r"/>
+            <a:pPr algn="r">
+              <a:defRPr>
+                <a:latin typeface="Roboto"/>
+              </a:defRPr>
+            </a:pPr>
             <a:r>
               <a:rPr sz="900" b="0">
                 <a:solidFill>
                   <a:srgbClr val="5F6F63"/>
                 </a:solidFill>
-                <a:latin typeface="Arial"/>
+                <a:latin typeface="Roboto"/>
               </a:rPr>
               <a:t>Slide 5 of 9</a:t>
             </a:r>
@@ -5786,7 +6048,11 @@
           <a:bodyPr rtlCol="0" anchor="ctr"/>
           <a:lstStyle/>
           <a:p>
-            <a:pPr algn="ctr"/>
+            <a:pPr algn="ctr">
+              <a:defRPr>
+                <a:latin typeface="Roboto"/>
+              </a:defRPr>
+            </a:pPr>
           </a:p>
         </p:txBody>
       </p:sp>
@@ -5812,12 +6078,17 @@
           </a:bodyPr>
           <a:lstStyle/>
           <a:p>
+            <a:pPr>
+              <a:defRPr>
+                <a:latin typeface="Roboto"/>
+              </a:defRPr>
+            </a:pPr>
             <a:r>
               <a:rPr sz="1000" b="0">
                 <a:solidFill>
                   <a:srgbClr val="5F6F63"/>
                 </a:solidFill>
-                <a:latin typeface="Arial"/>
+                <a:latin typeface="Roboto"/>
               </a:rPr>
               <a:t>Sample Community Services Ltd · Which funding is worth chasing?</a:t>
             </a:r>
@@ -5846,12 +6117,17 @@
           </a:bodyPr>
           <a:lstStyle/>
           <a:p>
+            <a:pPr>
+              <a:defRPr>
+                <a:latin typeface="Roboto"/>
+              </a:defRPr>
+            </a:pPr>
             <a:r>
               <a:rPr sz="2400" b="1">
                 <a:solidFill>
                   <a:srgbClr val="25342A"/>
                 </a:solidFill>
-                <a:latin typeface="Arial"/>
+                <a:latin typeface="Roboto"/>
               </a:rPr>
               <a:t>What it shows · Source: Fundraising events</a:t>
             </a:r>
@@ -5899,7 +6175,11 @@
           <a:bodyPr rtlCol="0" anchor="ctr"/>
           <a:lstStyle/>
           <a:p>
-            <a:pPr algn="ctr"/>
+            <a:pPr algn="ctr">
+              <a:defRPr>
+                <a:latin typeface="Roboto"/>
+              </a:defRPr>
+            </a:pPr>
           </a:p>
         </p:txBody>
       </p:sp>
@@ -5925,12 +6205,17 @@
           </a:bodyPr>
           <a:lstStyle/>
           <a:p>
+            <a:pPr>
+              <a:defRPr>
+                <a:latin typeface="Roboto"/>
+              </a:defRPr>
+            </a:pPr>
             <a:r>
               <a:rPr sz="1100" b="1">
                 <a:solidFill>
                   <a:srgbClr val="5F6F63"/>
                 </a:solidFill>
-                <a:latin typeface="Arial"/>
+                <a:latin typeface="Roboto"/>
               </a:rPr>
               <a:t>WHAT IT SHOWS</a:t>
             </a:r>
@@ -5959,12 +6244,17 @@
           </a:bodyPr>
           <a:lstStyle/>
           <a:p>
+            <a:pPr>
+              <a:defRPr>
+                <a:latin typeface="Roboto"/>
+              </a:defRPr>
+            </a:pPr>
             <a:r>
               <a:rPr sz="1600" b="0">
                 <a:solidFill>
                   <a:srgbClr val="25342A"/>
                 </a:solidFill>
-                <a:latin typeface="Arial"/>
+                <a:latin typeface="Roboto"/>
               </a:rPr>
               <a:t>Fundraising events: $36,800 raised this financial year to date (10.5% of everything raised), $15,200 to raise it, so $21,600 left for programs: 41¢ per dollar.</a:t>
             </a:r>
@@ -6012,7 +6302,11 @@
           <a:bodyPr rtlCol="0" anchor="ctr"/>
           <a:lstStyle/>
           <a:p>
-            <a:pPr algn="ctr"/>
+            <a:pPr algn="ctr">
+              <a:defRPr>
+                <a:latin typeface="Roboto"/>
+              </a:defRPr>
+            </a:pPr>
           </a:p>
         </p:txBody>
       </p:sp>
@@ -6038,12 +6332,17 @@
           </a:bodyPr>
           <a:lstStyle/>
           <a:p>
+            <a:pPr>
+              <a:defRPr>
+                <a:latin typeface="Roboto"/>
+              </a:defRPr>
+            </a:pPr>
             <a:r>
               <a:rPr sz="1100" b="1">
                 <a:solidFill>
                   <a:srgbClr val="5F6F63"/>
                 </a:solidFill>
-                <a:latin typeface="Arial"/>
+                <a:latin typeface="Roboto"/>
               </a:rPr>
               <a:t>WHAT YOU'D DO ABOUT IT</a:t>
             </a:r>
@@ -6072,12 +6371,17 @@
           </a:bodyPr>
           <a:lstStyle/>
           <a:p>
+            <a:pPr>
+              <a:defRPr>
+                <a:latin typeface="Roboto"/>
+              </a:defRPr>
+            </a:pPr>
             <a:r>
               <a:rPr sz="1600" b="0">
                 <a:solidFill>
                   <a:srgbClr val="25342A"/>
                 </a:solidFill>
-                <a:latin typeface="Arial"/>
+                <a:latin typeface="Roboto"/>
               </a:rPr>
               <a:t>The dearest per dollar: worth measuring the new donors each event brings in too.</a:t>
             </a:r>
@@ -6106,12 +6410,17 @@
           </a:bodyPr>
           <a:lstStyle/>
           <a:p>
+            <a:pPr>
+              <a:defRPr>
+                <a:latin typeface="Roboto"/>
+              </a:defRPr>
+            </a:pPr>
             <a:r>
               <a:rPr sz="900" b="0">
                 <a:solidFill>
                   <a:srgbClr val="5F6F63"/>
                 </a:solidFill>
-                <a:latin typeface="Arial"/>
+                <a:latin typeface="Roboto"/>
               </a:rPr>
               <a:t>funding.pptx</a:t>
             </a:r>
@@ -6140,13 +6449,17 @@
           </a:bodyPr>
           <a:lstStyle/>
           <a:p>
-            <a:pPr algn="ctr"/>
+            <a:pPr algn="ctr">
+              <a:defRPr>
+                <a:latin typeface="Roboto"/>
+              </a:defRPr>
+            </a:pPr>
             <a:r>
               <a:rPr sz="900" b="0">
                 <a:solidFill>
                   <a:srgbClr val="5F6F63"/>
                 </a:solidFill>
-                <a:latin typeface="Arial"/>
+                <a:latin typeface="Roboto"/>
               </a:rPr>
               <a:t>Data retrieved 2pm, Tue 6 Oct 2026 · Sample data</a:t>
             </a:r>
@@ -6175,13 +6488,17 @@
           </a:bodyPr>
           <a:lstStyle/>
           <a:p>
-            <a:pPr algn="r"/>
+            <a:pPr algn="r">
+              <a:defRPr>
+                <a:latin typeface="Roboto"/>
+              </a:defRPr>
+            </a:pPr>
             <a:r>
               <a:rPr sz="900" b="0">
                 <a:solidFill>
                   <a:srgbClr val="5F6F63"/>
                 </a:solidFill>
-                <a:latin typeface="Arial"/>
+                <a:latin typeface="Roboto"/>
               </a:rPr>
               <a:t>Slide 6 of 9</a:t>
             </a:r>
@@ -6245,7 +6562,11 @@
           <a:bodyPr rtlCol="0" anchor="ctr"/>
           <a:lstStyle/>
           <a:p>
-            <a:pPr algn="ctr"/>
+            <a:pPr algn="ctr">
+              <a:defRPr>
+                <a:latin typeface="Roboto"/>
+              </a:defRPr>
+            </a:pPr>
           </a:p>
         </p:txBody>
       </p:sp>
@@ -6271,12 +6592,17 @@
           </a:bodyPr>
           <a:lstStyle/>
           <a:p>
+            <a:pPr>
+              <a:defRPr>
+                <a:latin typeface="Roboto"/>
+              </a:defRPr>
+            </a:pPr>
             <a:r>
               <a:rPr sz="1000" b="0">
                 <a:solidFill>
                   <a:srgbClr val="5F6F63"/>
                 </a:solidFill>
-                <a:latin typeface="Arial"/>
+                <a:latin typeface="Roboto"/>
               </a:rPr>
               <a:t>Sample Community Services Ltd · Which funding is worth chasing?</a:t>
             </a:r>
@@ -6305,12 +6631,17 @@
           </a:bodyPr>
           <a:lstStyle/>
           <a:p>
+            <a:pPr>
+              <a:defRPr>
+                <a:latin typeface="Roboto"/>
+              </a:defRPr>
+            </a:pPr>
             <a:r>
               <a:rPr sz="2400" b="1">
                 <a:solidFill>
                   <a:srgbClr val="25342A"/>
                 </a:solidFill>
-                <a:latin typeface="Arial"/>
+                <a:latin typeface="Roboto"/>
               </a:rPr>
               <a:t>Financial year to date (Jul to Oct 2025), by source · Every source at once</a:t>
             </a:r>
@@ -6347,7 +6678,13 @@
                   <a:txBody>
                     <a:bodyPr/>
                     <a:lstStyle/>
-                    <a:p/>
+                    <a:p>
+                      <a:pPr>
+                        <a:defRPr>
+                          <a:latin typeface="Roboto"/>
+                        </a:defRPr>
+                      </a:pPr>
+                    </a:p>
                   </a:txBody>
                   <a:tcPr>
                     <a:solidFill>
@@ -6360,12 +6697,17 @@
                     <a:bodyPr/>
                     <a:lstStyle/>
                     <a:p>
-                      <a:pPr algn="r"/>
+                      <a:pPr algn="r">
+                        <a:defRPr>
+                          <a:latin typeface="Roboto"/>
+                        </a:defRPr>
+                      </a:pPr>
                       <a:r>
                         <a:rPr sz="1100" b="1">
                           <a:solidFill>
                             <a:srgbClr val="FFFFFF"/>
                           </a:solidFill>
+                          <a:latin typeface="Roboto"/>
                         </a:rPr>
                         <a:t>Raised</a:t>
                       </a:r>
@@ -6382,12 +6724,17 @@
                     <a:bodyPr/>
                     <a:lstStyle/>
                     <a:p>
-                      <a:pPr algn="r"/>
+                      <a:pPr algn="r">
+                        <a:defRPr>
+                          <a:latin typeface="Roboto"/>
+                        </a:defRPr>
+                      </a:pPr>
                       <a:r>
                         <a:rPr sz="1100" b="1">
                           <a:solidFill>
                             <a:srgbClr val="FFFFFF"/>
                           </a:solidFill>
+                          <a:latin typeface="Roboto"/>
                         </a:rPr>
                         <a:t>Cost of raising it</a:t>
                       </a:r>
@@ -6404,12 +6751,17 @@
                     <a:bodyPr/>
                     <a:lstStyle/>
                     <a:p>
-                      <a:pPr algn="r"/>
+                      <a:pPr algn="r">
+                        <a:defRPr>
+                          <a:latin typeface="Roboto"/>
+                        </a:defRPr>
+                      </a:pPr>
                       <a:r>
                         <a:rPr sz="1100" b="1">
                           <a:solidFill>
                             <a:srgbClr val="FFFFFF"/>
                           </a:solidFill>
+                          <a:latin typeface="Roboto"/>
                         </a:rPr>
                         <a:t>Left after costs</a:t>
                       </a:r>
@@ -6426,12 +6778,17 @@
                     <a:bodyPr/>
                     <a:lstStyle/>
                     <a:p>
-                      <a:pPr algn="r"/>
+                      <a:pPr algn="r">
+                        <a:defRPr>
+                          <a:latin typeface="Roboto"/>
+                        </a:defRPr>
+                      </a:pPr>
                       <a:r>
                         <a:rPr sz="1100" b="1">
                           <a:solidFill>
                             <a:srgbClr val="FFFFFF"/>
                           </a:solidFill>
+                          <a:latin typeface="Roboto"/>
                         </a:rPr>
                         <a:t>Cost per $1</a:t>
                       </a:r>
@@ -6450,11 +6807,17 @@
                     <a:bodyPr/>
                     <a:lstStyle/>
                     <a:p>
+                      <a:pPr>
+                        <a:defRPr>
+                          <a:latin typeface="Roboto"/>
+                        </a:defRPr>
+                      </a:pPr>
                       <a:r>
                         <a:rPr sz="1050">
                           <a:solidFill>
                             <a:srgbClr val="25342A"/>
                           </a:solidFill>
+                          <a:latin typeface="Roboto"/>
                         </a:rPr>
                         <a:t>Grants</a:t>
                       </a:r>
@@ -6471,12 +6834,17 @@
                     <a:bodyPr/>
                     <a:lstStyle/>
                     <a:p>
-                      <a:pPr algn="r"/>
+                      <a:pPr algn="r">
+                        <a:defRPr>
+                          <a:latin typeface="Roboto"/>
+                        </a:defRPr>
+                      </a:pPr>
                       <a:r>
                         <a:rPr sz="1050">
                           <a:solidFill>
                             <a:srgbClr val="25342A"/>
                           </a:solidFill>
+                          <a:latin typeface="Roboto"/>
                         </a:rPr>
                         <a:t>$251,929</a:t>
                       </a:r>
@@ -6493,12 +6861,17 @@
                     <a:bodyPr/>
                     <a:lstStyle/>
                     <a:p>
-                      <a:pPr algn="r"/>
+                      <a:pPr algn="r">
+                        <a:defRPr>
+                          <a:latin typeface="Roboto"/>
+                        </a:defRPr>
+                      </a:pPr>
                       <a:r>
                         <a:rPr sz="1050">
                           <a:solidFill>
                             <a:srgbClr val="25342A"/>
                           </a:solidFill>
+                          <a:latin typeface="Roboto"/>
                         </a:rPr>
                         <a:t>$28,400</a:t>
                       </a:r>
@@ -6515,12 +6888,17 @@
                     <a:bodyPr/>
                     <a:lstStyle/>
                     <a:p>
-                      <a:pPr algn="r"/>
+                      <a:pPr algn="r">
+                        <a:defRPr>
+                          <a:latin typeface="Roboto"/>
+                        </a:defRPr>
+                      </a:pPr>
                       <a:r>
                         <a:rPr sz="1050">
                           <a:solidFill>
                             <a:srgbClr val="25342A"/>
                           </a:solidFill>
+                          <a:latin typeface="Roboto"/>
                         </a:rPr>
                         <a:t>$223,529</a:t>
                       </a:r>
@@ -6537,12 +6915,17 @@
                     <a:bodyPr/>
                     <a:lstStyle/>
                     <a:p>
-                      <a:pPr algn="r"/>
+                      <a:pPr algn="r">
+                        <a:defRPr>
+                          <a:latin typeface="Roboto"/>
+                        </a:defRPr>
+                      </a:pPr>
                       <a:r>
                         <a:rPr sz="1050">
                           <a:solidFill>
                             <a:srgbClr val="25342A"/>
                           </a:solidFill>
+                          <a:latin typeface="Roboto"/>
                         </a:rPr>
                         <a:t>11¢</a:t>
                       </a:r>
@@ -6561,11 +6944,17 @@
                     <a:bodyPr/>
                     <a:lstStyle/>
                     <a:p>
+                      <a:pPr>
+                        <a:defRPr>
+                          <a:latin typeface="Roboto"/>
+                        </a:defRPr>
+                      </a:pPr>
                       <a:r>
                         <a:rPr sz="1050">
                           <a:solidFill>
                             <a:srgbClr val="25342A"/>
                           </a:solidFill>
+                          <a:latin typeface="Roboto"/>
                         </a:rPr>
                         <a:t>Donations</a:t>
                       </a:r>
@@ -6582,12 +6971,17 @@
                     <a:bodyPr/>
                     <a:lstStyle/>
                     <a:p>
-                      <a:pPr algn="r"/>
+                      <a:pPr algn="r">
+                        <a:defRPr>
+                          <a:latin typeface="Roboto"/>
+                        </a:defRPr>
+                      </a:pPr>
                       <a:r>
                         <a:rPr sz="1050">
                           <a:solidFill>
                             <a:srgbClr val="25342A"/>
                           </a:solidFill>
+                          <a:latin typeface="Roboto"/>
                         </a:rPr>
                         <a:t>$61,800</a:t>
                       </a:r>
@@ -6604,12 +6998,17 @@
                     <a:bodyPr/>
                     <a:lstStyle/>
                     <a:p>
-                      <a:pPr algn="r"/>
+                      <a:pPr algn="r">
+                        <a:defRPr>
+                          <a:latin typeface="Roboto"/>
+                        </a:defRPr>
+                      </a:pPr>
                       <a:r>
                         <a:rPr sz="1050">
                           <a:solidFill>
                             <a:srgbClr val="25342A"/>
                           </a:solidFill>
+                          <a:latin typeface="Roboto"/>
                         </a:rPr>
                         <a:t>$8,800</a:t>
                       </a:r>
@@ -6626,12 +7025,17 @@
                     <a:bodyPr/>
                     <a:lstStyle/>
                     <a:p>
-                      <a:pPr algn="r"/>
+                      <a:pPr algn="r">
+                        <a:defRPr>
+                          <a:latin typeface="Roboto"/>
+                        </a:defRPr>
+                      </a:pPr>
                       <a:r>
                         <a:rPr sz="1050">
                           <a:solidFill>
                             <a:srgbClr val="25342A"/>
                           </a:solidFill>
+                          <a:latin typeface="Roboto"/>
                         </a:rPr>
                         <a:t>$53,000</a:t>
                       </a:r>
@@ -6648,12 +7052,17 @@
                     <a:bodyPr/>
                     <a:lstStyle/>
                     <a:p>
-                      <a:pPr algn="r"/>
+                      <a:pPr algn="r">
+                        <a:defRPr>
+                          <a:latin typeface="Roboto"/>
+                        </a:defRPr>
+                      </a:pPr>
                       <a:r>
                         <a:rPr sz="1050">
                           <a:solidFill>
                             <a:srgbClr val="25342A"/>
                           </a:solidFill>
+                          <a:latin typeface="Roboto"/>
                         </a:rPr>
                         <a:t>14¢</a:t>
                       </a:r>
@@ -6672,11 +7081,17 @@
                     <a:bodyPr/>
                     <a:lstStyle/>
                     <a:p>
+                      <a:pPr>
+                        <a:defRPr>
+                          <a:latin typeface="Roboto"/>
+                        </a:defRPr>
+                      </a:pPr>
                       <a:r>
                         <a:rPr sz="1050">
                           <a:solidFill>
                             <a:srgbClr val="25342A"/>
                           </a:solidFill>
+                          <a:latin typeface="Roboto"/>
                         </a:rPr>
                         <a:t>Fundraising events</a:t>
                       </a:r>
@@ -6693,12 +7108,17 @@
                     <a:bodyPr/>
                     <a:lstStyle/>
                     <a:p>
-                      <a:pPr algn="r"/>
+                      <a:pPr algn="r">
+                        <a:defRPr>
+                          <a:latin typeface="Roboto"/>
+                        </a:defRPr>
+                      </a:pPr>
                       <a:r>
                         <a:rPr sz="1050">
                           <a:solidFill>
                             <a:srgbClr val="25342A"/>
                           </a:solidFill>
+                          <a:latin typeface="Roboto"/>
                         </a:rPr>
                         <a:t>$36,800</a:t>
                       </a:r>
@@ -6715,12 +7135,17 @@
                     <a:bodyPr/>
                     <a:lstStyle/>
                     <a:p>
-                      <a:pPr algn="r"/>
+                      <a:pPr algn="r">
+                        <a:defRPr>
+                          <a:latin typeface="Roboto"/>
+                        </a:defRPr>
+                      </a:pPr>
                       <a:r>
                         <a:rPr sz="1050">
                           <a:solidFill>
                             <a:srgbClr val="25342A"/>
                           </a:solidFill>
+                          <a:latin typeface="Roboto"/>
                         </a:rPr>
                         <a:t>$15,200</a:t>
                       </a:r>
@@ -6737,12 +7162,17 @@
                     <a:bodyPr/>
                     <a:lstStyle/>
                     <a:p>
-                      <a:pPr algn="r"/>
+                      <a:pPr algn="r">
+                        <a:defRPr>
+                          <a:latin typeface="Roboto"/>
+                        </a:defRPr>
+                      </a:pPr>
                       <a:r>
                         <a:rPr sz="1050">
                           <a:solidFill>
                             <a:srgbClr val="25342A"/>
                           </a:solidFill>
+                          <a:latin typeface="Roboto"/>
                         </a:rPr>
                         <a:t>$21,600</a:t>
                       </a:r>
@@ -6759,12 +7189,17 @@
                     <a:bodyPr/>
                     <a:lstStyle/>
                     <a:p>
-                      <a:pPr algn="r"/>
+                      <a:pPr algn="r">
+                        <a:defRPr>
+                          <a:latin typeface="Roboto"/>
+                        </a:defRPr>
+                      </a:pPr>
                       <a:r>
                         <a:rPr sz="1050">
                           <a:solidFill>
                             <a:srgbClr val="25342A"/>
                           </a:solidFill>
+                          <a:latin typeface="Roboto"/>
                         </a:rPr>
                         <a:t>41¢</a:t>
                       </a:r>
@@ -6803,12 +7238,17 @@
           </a:bodyPr>
           <a:lstStyle/>
           <a:p>
+            <a:pPr>
+              <a:defRPr>
+                <a:latin typeface="Roboto"/>
+              </a:defRPr>
+            </a:pPr>
             <a:r>
               <a:rPr sz="900" b="0">
                 <a:solidFill>
                   <a:srgbClr val="5F6F63"/>
                 </a:solidFill>
-                <a:latin typeface="Arial"/>
+                <a:latin typeface="Roboto"/>
               </a:rPr>
               <a:t>funding.pptx</a:t>
             </a:r>
@@ -6837,13 +7277,17 @@
           </a:bodyPr>
           <a:lstStyle/>
           <a:p>
-            <a:pPr algn="ctr"/>
+            <a:pPr algn="ctr">
+              <a:defRPr>
+                <a:latin typeface="Roboto"/>
+              </a:defRPr>
+            </a:pPr>
             <a:r>
               <a:rPr sz="900" b="0">
                 <a:solidFill>
                   <a:srgbClr val="5F6F63"/>
                 </a:solidFill>
-                <a:latin typeface="Arial"/>
+                <a:latin typeface="Roboto"/>
               </a:rPr>
               <a:t>Data retrieved 2pm, Tue 6 Oct 2026 · Sample data</a:t>
             </a:r>
@@ -6872,13 +7316,17 @@
           </a:bodyPr>
           <a:lstStyle/>
           <a:p>
-            <a:pPr algn="r"/>
+            <a:pPr algn="r">
+              <a:defRPr>
+                <a:latin typeface="Roboto"/>
+              </a:defRPr>
+            </a:pPr>
             <a:r>
               <a:rPr sz="900" b="0">
                 <a:solidFill>
                   <a:srgbClr val="5F6F63"/>
                 </a:solidFill>
-                <a:latin typeface="Arial"/>
+                <a:latin typeface="Roboto"/>
               </a:rPr>
               <a:t>Slide 7 of 9</a:t>
             </a:r>
@@ -6942,7 +7390,11 @@
           <a:bodyPr rtlCol="0" anchor="ctr"/>
           <a:lstStyle/>
           <a:p>
-            <a:pPr algn="ctr"/>
+            <a:pPr algn="ctr">
+              <a:defRPr>
+                <a:latin typeface="Roboto"/>
+              </a:defRPr>
+            </a:pPr>
           </a:p>
         </p:txBody>
       </p:sp>
@@ -6968,12 +7420,17 @@
           </a:bodyPr>
           <a:lstStyle/>
           <a:p>
+            <a:pPr>
+              <a:defRPr>
+                <a:latin typeface="Roboto"/>
+              </a:defRPr>
+            </a:pPr>
             <a:r>
               <a:rPr sz="1000" b="0">
                 <a:solidFill>
                   <a:srgbClr val="5F6F63"/>
                 </a:solidFill>
-                <a:latin typeface="Arial"/>
+                <a:latin typeface="Roboto"/>
               </a:rPr>
               <a:t>Sample Community Services Ltd · Which funding is worth chasing?</a:t>
             </a:r>
@@ -7002,12 +7459,17 @@
           </a:bodyPr>
           <a:lstStyle/>
           <a:p>
+            <a:pPr>
+              <a:defRPr>
+                <a:latin typeface="Roboto"/>
+              </a:defRPr>
+            </a:pPr>
             <a:r>
               <a:rPr sz="2400" b="1">
                 <a:solidFill>
                   <a:srgbClr val="25342A"/>
                 </a:solidFill>
-                <a:latin typeface="Arial"/>
+                <a:latin typeface="Roboto"/>
               </a:rPr>
               <a:t>Raised and left after costs, by month · Raised $ · Every source at once</a:t>
             </a:r>
@@ -7036,12 +7498,17 @@
           </a:bodyPr>
           <a:lstStyle/>
           <a:p>
+            <a:pPr>
+              <a:defRPr>
+                <a:latin typeface="Roboto"/>
+              </a:defRPr>
+            </a:pPr>
             <a:r>
               <a:rPr sz="1200" b="0">
                 <a:solidFill>
                   <a:srgbClr val="5F6F63"/>
                 </a:solidFill>
-                <a:latin typeface="Arial"/>
+                <a:latin typeface="Roboto"/>
               </a:rPr>
               <a:t>Tap a month for its workings.</a:t>
             </a:r>
@@ -7088,12 +7555,17 @@
           </a:bodyPr>
           <a:lstStyle/>
           <a:p>
+            <a:pPr>
+              <a:defRPr>
+                <a:latin typeface="Roboto"/>
+              </a:defRPr>
+            </a:pPr>
             <a:r>
               <a:rPr sz="900" b="0">
                 <a:solidFill>
                   <a:srgbClr val="5F6F63"/>
                 </a:solidFill>
-                <a:latin typeface="Arial"/>
+                <a:latin typeface="Roboto"/>
               </a:rPr>
               <a:t>funding.pptx</a:t>
             </a:r>
@@ -7122,13 +7594,17 @@
           </a:bodyPr>
           <a:lstStyle/>
           <a:p>
-            <a:pPr algn="ctr"/>
+            <a:pPr algn="ctr">
+              <a:defRPr>
+                <a:latin typeface="Roboto"/>
+              </a:defRPr>
+            </a:pPr>
             <a:r>
               <a:rPr sz="900" b="0">
                 <a:solidFill>
                   <a:srgbClr val="5F6F63"/>
                 </a:solidFill>
-                <a:latin typeface="Arial"/>
+                <a:latin typeface="Roboto"/>
               </a:rPr>
               <a:t>Data retrieved 2pm, Tue 6 Oct 2026 · Sample data</a:t>
             </a:r>
@@ -7157,13 +7633,17 @@
           </a:bodyPr>
           <a:lstStyle/>
           <a:p>
-            <a:pPr algn="r"/>
+            <a:pPr algn="r">
+              <a:defRPr>
+                <a:latin typeface="Roboto"/>
+              </a:defRPr>
+            </a:pPr>
             <a:r>
               <a:rPr sz="900" b="0">
                 <a:solidFill>
                   <a:srgbClr val="5F6F63"/>
                 </a:solidFill>
-                <a:latin typeface="Arial"/>
+                <a:latin typeface="Roboto"/>
               </a:rPr>
               <a:t>Slide 8 of 9</a:t>
             </a:r>
@@ -7227,7 +7707,11 @@
           <a:bodyPr rtlCol="0" anchor="ctr"/>
           <a:lstStyle/>
           <a:p>
-            <a:pPr algn="ctr"/>
+            <a:pPr algn="ctr">
+              <a:defRPr>
+                <a:latin typeface="Roboto"/>
+              </a:defRPr>
+            </a:pPr>
           </a:p>
         </p:txBody>
       </p:sp>
@@ -7253,12 +7737,17 @@
           </a:bodyPr>
           <a:lstStyle/>
           <a:p>
+            <a:pPr>
+              <a:defRPr>
+                <a:latin typeface="Roboto"/>
+              </a:defRPr>
+            </a:pPr>
             <a:r>
               <a:rPr sz="1000" b="0">
                 <a:solidFill>
                   <a:srgbClr val="5F6F63"/>
                 </a:solidFill>
-                <a:latin typeface="Arial"/>
+                <a:latin typeface="Roboto"/>
               </a:rPr>
               <a:t>Sample Community Services Ltd · Which funding is worth chasing?</a:t>
             </a:r>
@@ -7287,12 +7776,17 @@
           </a:bodyPr>
           <a:lstStyle/>
           <a:p>
+            <a:pPr>
+              <a:defRPr>
+                <a:latin typeface="Roboto"/>
+              </a:defRPr>
+            </a:pPr>
             <a:r>
               <a:rPr sz="2400" b="1">
                 <a:solidFill>
                   <a:srgbClr val="25342A"/>
                 </a:solidFill>
-                <a:latin typeface="Arial"/>
+                <a:latin typeface="Roboto"/>
               </a:rPr>
               <a:t>Raised and left after costs, by month · Left after costs $ · Every source at once</a:t>
             </a:r>
@@ -7321,12 +7815,17 @@
           </a:bodyPr>
           <a:lstStyle/>
           <a:p>
+            <a:pPr>
+              <a:defRPr>
+                <a:latin typeface="Roboto"/>
+              </a:defRPr>
+            </a:pPr>
             <a:r>
               <a:rPr sz="1200" b="0">
                 <a:solidFill>
                   <a:srgbClr val="5F6F63"/>
                 </a:solidFill>
-                <a:latin typeface="Arial"/>
+                <a:latin typeface="Roboto"/>
               </a:rPr>
               <a:t>Tap a month for its workings.</a:t>
             </a:r>
@@ -7373,12 +7872,17 @@
           </a:bodyPr>
           <a:lstStyle/>
           <a:p>
+            <a:pPr>
+              <a:defRPr>
+                <a:latin typeface="Roboto"/>
+              </a:defRPr>
+            </a:pPr>
             <a:r>
               <a:rPr sz="900" b="0">
                 <a:solidFill>
                   <a:srgbClr val="5F6F63"/>
                 </a:solidFill>
-                <a:latin typeface="Arial"/>
+                <a:latin typeface="Roboto"/>
               </a:rPr>
               <a:t>funding.pptx</a:t>
             </a:r>
@@ -7407,13 +7911,17 @@
           </a:bodyPr>
           <a:lstStyle/>
           <a:p>
-            <a:pPr algn="ctr"/>
+            <a:pPr algn="ctr">
+              <a:defRPr>
+                <a:latin typeface="Roboto"/>
+              </a:defRPr>
+            </a:pPr>
             <a:r>
               <a:rPr sz="900" b="0">
                 <a:solidFill>
                   <a:srgbClr val="5F6F63"/>
                 </a:solidFill>
-                <a:latin typeface="Arial"/>
+                <a:latin typeface="Roboto"/>
               </a:rPr>
               <a:t>Data retrieved 2pm, Tue 6 Oct 2026 · Sample data</a:t>
             </a:r>
@@ -7442,13 +7950,17 @@
           </a:bodyPr>
           <a:lstStyle/>
           <a:p>
-            <a:pPr algn="r"/>
+            <a:pPr algn="r">
+              <a:defRPr>
+                <a:latin typeface="Roboto"/>
+              </a:defRPr>
+            </a:pPr>
             <a:r>
               <a:rPr sz="900" b="0">
                 <a:solidFill>
                   <a:srgbClr val="5F6F63"/>
                 </a:solidFill>
-                <a:latin typeface="Arial"/>
+                <a:latin typeface="Roboto"/>
               </a:rPr>
               <a:t>Slide 9 of 9</a:t>
             </a:r>

--- a/media/exports/reports/2025-10/funding.pptx
+++ b/media/exports/reports/2025-10/funding.pptx
@@ -14,6 +14,7 @@
     <p:sldId id="262" r:id="rId13"/>
     <p:sldId id="263" r:id="rId14"/>
     <p:sldId id="264" r:id="rId15"/>
+    <p:sldId id="265" r:id="rId16"/>
   </p:sldIdLst>
   <p:sldSz cx="12191695" cy="6858000" type="screen4x3"/>
   <p:notesSz cx="6858000" cy="9144000"/>
@@ -4166,7 +4167,324 @@
                 </a:solidFill>
                 <a:latin typeface="Roboto"/>
               </a:rPr>
-              <a:t>Slide 1 of 9</a:t>
+              <a:t>Slide 1 of 10</a:t>
+            </a:r>
+          </a:p>
+        </p:txBody>
+      </p:sp>
+    </p:spTree>
+  </p:cSld>
+  <p:clrMapOvr>
+    <a:masterClrMapping/>
+  </p:clrMapOvr>
+</p:sld>
+</file>
+
+<file path=ppt/slides/slide10.xml><?xml version="1.0" encoding="utf-8"?>
+<p:sld xmlns:a="http://schemas.openxmlformats.org/drawingml/2006/main" xmlns:p="http://schemas.openxmlformats.org/presentationml/2006/main" xmlns:r="http://schemas.openxmlformats.org/officeDocument/2006/relationships">
+  <p:cSld>
+    <p:spTree>
+      <p:nvGrpSpPr>
+        <p:cNvPr id="1" name=""/>
+        <p:cNvGrpSpPr/>
+        <p:nvPr/>
+      </p:nvGrpSpPr>
+      <p:grpSpPr/>
+      <p:sp>
+        <p:nvSpPr>
+          <p:cNvPr id="2" name="Rectangle 1"/>
+          <p:cNvSpPr/>
+          <p:nvPr/>
+        </p:nvSpPr>
+        <p:spPr>
+          <a:xfrm>
+            <a:off x="0" y="0"/>
+            <a:ext cx="12191695" cy="73152"/>
+          </a:xfrm>
+          <a:prstGeom prst="rect">
+            <a:avLst/>
+          </a:prstGeom>
+          <a:solidFill>
+            <a:srgbClr val="2F7A5D"/>
+          </a:solidFill>
+          <a:ln>
+            <a:noFill/>
+          </a:ln>
+        </p:spPr>
+        <p:style>
+          <a:lnRef idx="1">
+            <a:schemeClr val="accent1"/>
+          </a:lnRef>
+          <a:fillRef idx="3">
+            <a:schemeClr val="accent1"/>
+          </a:fillRef>
+          <a:effectRef idx="2">
+            <a:schemeClr val="accent1"/>
+          </a:effectRef>
+          <a:fontRef idx="minor">
+            <a:schemeClr val="lt1"/>
+          </a:fontRef>
+        </p:style>
+        <p:txBody>
+          <a:bodyPr rtlCol="0" anchor="ctr"/>
+          <a:lstStyle/>
+          <a:p>
+            <a:pPr algn="ctr">
+              <a:defRPr>
+                <a:latin typeface="Roboto"/>
+              </a:defRPr>
+            </a:pPr>
+          </a:p>
+        </p:txBody>
+      </p:sp>
+      <p:sp>
+        <p:nvSpPr>
+          <p:cNvPr id="3" name="TextBox 2"/>
+          <p:cNvSpPr txBox="1"/>
+          <p:nvPr/>
+        </p:nvSpPr>
+        <p:spPr>
+          <a:xfrm>
+            <a:off x="457200" y="164592"/>
+            <a:ext cx="7315200" cy="274320"/>
+          </a:xfrm>
+          <a:prstGeom prst="rect">
+            <a:avLst/>
+          </a:prstGeom>
+          <a:noFill/>
+        </p:spPr>
+        <p:txBody>
+          <a:bodyPr wrap="square">
+            <a:spAutoFit/>
+          </a:bodyPr>
+          <a:lstStyle/>
+          <a:p>
+            <a:pPr>
+              <a:defRPr>
+                <a:latin typeface="Roboto"/>
+              </a:defRPr>
+            </a:pPr>
+            <a:r>
+              <a:rPr sz="1000" b="0">
+                <a:solidFill>
+                  <a:srgbClr val="5F6F63"/>
+                </a:solidFill>
+                <a:latin typeface="Roboto"/>
+              </a:rPr>
+              <a:t>Sample Community Services Ltd · Which funding is worth chasing?</a:t>
+            </a:r>
+          </a:p>
+        </p:txBody>
+      </p:sp>
+      <p:sp>
+        <p:nvSpPr>
+          <p:cNvPr id="4" name="TextBox 3"/>
+          <p:cNvSpPr txBox="1"/>
+          <p:nvPr/>
+        </p:nvSpPr>
+        <p:spPr>
+          <a:xfrm>
+            <a:off x="457200" y="411480"/>
+            <a:ext cx="11247120" cy="548640"/>
+          </a:xfrm>
+          <a:prstGeom prst="rect">
+            <a:avLst/>
+          </a:prstGeom>
+          <a:noFill/>
+        </p:spPr>
+        <p:txBody>
+          <a:bodyPr wrap="square">
+            <a:spAutoFit/>
+          </a:bodyPr>
+          <a:lstStyle/>
+          <a:p>
+            <a:pPr>
+              <a:defRPr>
+                <a:latin typeface="Roboto"/>
+              </a:defRPr>
+            </a:pPr>
+            <a:r>
+              <a:rPr sz="2400" b="1">
+                <a:solidFill>
+                  <a:srgbClr val="25342A"/>
+                </a:solidFill>
+                <a:latin typeface="Roboto"/>
+              </a:rPr>
+              <a:t>Raised and left after costs, by month · Left after costs $ · Every source at once</a:t>
+            </a:r>
+          </a:p>
+        </p:txBody>
+      </p:sp>
+      <p:sp>
+        <p:nvSpPr>
+          <p:cNvPr id="5" name="TextBox 4"/>
+          <p:cNvSpPr txBox="1"/>
+          <p:nvPr/>
+        </p:nvSpPr>
+        <p:spPr>
+          <a:xfrm>
+            <a:off x="457200" y="960120"/>
+            <a:ext cx="11247120" cy="457200"/>
+          </a:xfrm>
+          <a:prstGeom prst="rect">
+            <a:avLst/>
+          </a:prstGeom>
+          <a:noFill/>
+        </p:spPr>
+        <p:txBody>
+          <a:bodyPr wrap="square">
+            <a:spAutoFit/>
+          </a:bodyPr>
+          <a:lstStyle/>
+          <a:p>
+            <a:pPr>
+              <a:defRPr>
+                <a:latin typeface="Roboto"/>
+              </a:defRPr>
+            </a:pPr>
+            <a:r>
+              <a:rPr sz="1200" b="0">
+                <a:solidFill>
+                  <a:srgbClr val="5F6F63"/>
+                </a:solidFill>
+                <a:latin typeface="Roboto"/>
+              </a:rPr>
+              <a:t>Tap a month for its workings.</a:t>
+            </a:r>
+          </a:p>
+        </p:txBody>
+      </p:sp>
+      <p:graphicFrame>
+        <p:nvGraphicFramePr>
+          <p:cNvPr id="6" name="Chart 5"/>
+          <p:cNvGraphicFramePr>
+            <a:graphicFrameLocks noGrp="1"/>
+          </p:cNvGraphicFramePr>
+          <p:nvPr/>
+        </p:nvGraphicFramePr>
+        <p:xfrm>
+          <a:off x="457200" y="1463040"/>
+          <a:ext cx="11247120" cy="4754880"/>
+        </p:xfrm>
+        <a:graphic>
+          <a:graphicData uri="http://schemas.openxmlformats.org/drawingml/2006/chart">
+            <c:chart xmlns:c="http://schemas.openxmlformats.org/drawingml/2006/chart" r:id="rId2"/>
+          </a:graphicData>
+        </a:graphic>
+      </p:graphicFrame>
+      <p:sp>
+        <p:nvSpPr>
+          <p:cNvPr id="7" name="TextBox 6"/>
+          <p:cNvSpPr txBox="1"/>
+          <p:nvPr/>
+        </p:nvSpPr>
+        <p:spPr>
+          <a:xfrm>
+            <a:off x="457200" y="6492240"/>
+            <a:ext cx="3657600" cy="274320"/>
+          </a:xfrm>
+          <a:prstGeom prst="rect">
+            <a:avLst/>
+          </a:prstGeom>
+          <a:noFill/>
+        </p:spPr>
+        <p:txBody>
+          <a:bodyPr wrap="square">
+            <a:spAutoFit/>
+          </a:bodyPr>
+          <a:lstStyle/>
+          <a:p>
+            <a:pPr>
+              <a:defRPr>
+                <a:latin typeface="Roboto"/>
+              </a:defRPr>
+            </a:pPr>
+            <a:r>
+              <a:rPr sz="900" b="0">
+                <a:solidFill>
+                  <a:srgbClr val="5F6F63"/>
+                </a:solidFill>
+                <a:latin typeface="Roboto"/>
+              </a:rPr>
+              <a:t>funding.pptx</a:t>
+            </a:r>
+          </a:p>
+        </p:txBody>
+      </p:sp>
+      <p:sp>
+        <p:nvSpPr>
+          <p:cNvPr id="8" name="TextBox 7"/>
+          <p:cNvSpPr txBox="1"/>
+          <p:nvPr/>
+        </p:nvSpPr>
+        <p:spPr>
+          <a:xfrm>
+            <a:off x="4297680" y="6492240"/>
+            <a:ext cx="3657600" cy="274320"/>
+          </a:xfrm>
+          <a:prstGeom prst="rect">
+            <a:avLst/>
+          </a:prstGeom>
+          <a:noFill/>
+        </p:spPr>
+        <p:txBody>
+          <a:bodyPr wrap="square">
+            <a:spAutoFit/>
+          </a:bodyPr>
+          <a:lstStyle/>
+          <a:p>
+            <a:pPr algn="ctr">
+              <a:defRPr>
+                <a:latin typeface="Roboto"/>
+              </a:defRPr>
+            </a:pPr>
+            <a:r>
+              <a:rPr sz="900" b="0">
+                <a:solidFill>
+                  <a:srgbClr val="5F6F63"/>
+                </a:solidFill>
+                <a:latin typeface="Roboto"/>
+              </a:rPr>
+              <a:t>Data retrieved 2pm, Tue 6 Oct 2026 · Sample data</a:t>
+            </a:r>
+          </a:p>
+        </p:txBody>
+      </p:sp>
+      <p:sp>
+        <p:nvSpPr>
+          <p:cNvPr id="9" name="TextBox 8"/>
+          <p:cNvSpPr txBox="1"/>
+          <p:nvPr/>
+        </p:nvSpPr>
+        <p:spPr>
+          <a:xfrm>
+            <a:off x="8503920" y="6492240"/>
+            <a:ext cx="3200400" cy="274320"/>
+          </a:xfrm>
+          <a:prstGeom prst="rect">
+            <a:avLst/>
+          </a:prstGeom>
+          <a:noFill/>
+        </p:spPr>
+        <p:txBody>
+          <a:bodyPr wrap="square">
+            <a:spAutoFit/>
+          </a:bodyPr>
+          <a:lstStyle/>
+          <a:p>
+            <a:pPr algn="r">
+              <a:defRPr>
+                <a:latin typeface="Roboto"/>
+              </a:defRPr>
+            </a:pPr>
+            <a:r>
+              <a:rPr sz="900" b="0">
+                <a:solidFill>
+                  <a:srgbClr val="5F6F63"/>
+                </a:solidFill>
+                <a:latin typeface="Roboto"/>
+              </a:rPr>
+              <a:t>Slide 10 of 10</a:t>
             </a:r>
           </a:p>
         </p:txBody>
@@ -4444,7 +4762,7 @@
                 </a:solidFill>
                 <a:latin typeface="Roboto"/>
               </a:rPr>
-              <a:t>Slide 2 of 9</a:t>
+              <a:t>Slide 2 of 10</a:t>
             </a:r>
           </a:p>
         </p:txBody>
@@ -4958,7 +5276,7 @@
                 </a:solidFill>
                 <a:latin typeface="Roboto"/>
               </a:rPr>
-              <a:t>Slide 3 of 9</a:t>
+              <a:t>Slide 3 of 10</a:t>
             </a:r>
           </a:p>
         </p:txBody>
@@ -5472,7 +5790,7 @@
                 </a:solidFill>
                 <a:latin typeface="Roboto"/>
               </a:rPr>
-              <a:t>Slide 4 of 9</a:t>
+              <a:t>Slide 4 of 10</a:t>
             </a:r>
           </a:p>
         </p:txBody>
@@ -5986,7 +6304,7 @@
                 </a:solidFill>
                 <a:latin typeface="Roboto"/>
               </a:rPr>
-              <a:t>Slide 5 of 9</a:t>
+              <a:t>Slide 5 of 10</a:t>
             </a:r>
           </a:p>
         </p:txBody>
@@ -6500,7 +6818,7 @@
                 </a:solidFill>
                 <a:latin typeface="Roboto"/>
               </a:rPr>
-              <a:t>Slide 6 of 9</a:t>
+              <a:t>Slide 6 of 10</a:t>
             </a:r>
           </a:p>
         </p:txBody>
@@ -6514,6 +6832,764 @@
 </file>
 
 <file path=ppt/slides/slide7.xml><?xml version="1.0" encoding="utf-8"?>
+<p:sld xmlns:a="http://schemas.openxmlformats.org/drawingml/2006/main" xmlns:p="http://schemas.openxmlformats.org/presentationml/2006/main" xmlns:r="http://schemas.openxmlformats.org/officeDocument/2006/relationships">
+  <p:cSld>
+    <p:spTree>
+      <p:nvGrpSpPr>
+        <p:cNvPr id="1" name=""/>
+        <p:cNvGrpSpPr/>
+        <p:nvPr/>
+      </p:nvGrpSpPr>
+      <p:grpSpPr/>
+      <p:sp>
+        <p:nvSpPr>
+          <p:cNvPr id="2" name="Rectangle 1"/>
+          <p:cNvSpPr/>
+          <p:nvPr/>
+        </p:nvSpPr>
+        <p:spPr>
+          <a:xfrm>
+            <a:off x="0" y="0"/>
+            <a:ext cx="12191695" cy="73152"/>
+          </a:xfrm>
+          <a:prstGeom prst="rect">
+            <a:avLst/>
+          </a:prstGeom>
+          <a:solidFill>
+            <a:srgbClr val="2F7A5D"/>
+          </a:solidFill>
+          <a:ln>
+            <a:noFill/>
+          </a:ln>
+        </p:spPr>
+        <p:style>
+          <a:lnRef idx="1">
+            <a:schemeClr val="accent1"/>
+          </a:lnRef>
+          <a:fillRef idx="3">
+            <a:schemeClr val="accent1"/>
+          </a:fillRef>
+          <a:effectRef idx="2">
+            <a:schemeClr val="accent1"/>
+          </a:effectRef>
+          <a:fontRef idx="minor">
+            <a:schemeClr val="lt1"/>
+          </a:fontRef>
+        </p:style>
+        <p:txBody>
+          <a:bodyPr rtlCol="0" anchor="ctr"/>
+          <a:lstStyle/>
+          <a:p>
+            <a:pPr algn="ctr">
+              <a:defRPr>
+                <a:latin typeface="Roboto"/>
+              </a:defRPr>
+            </a:pPr>
+          </a:p>
+        </p:txBody>
+      </p:sp>
+      <p:sp>
+        <p:nvSpPr>
+          <p:cNvPr id="3" name="TextBox 2"/>
+          <p:cNvSpPr txBox="1"/>
+          <p:nvPr/>
+        </p:nvSpPr>
+        <p:spPr>
+          <a:xfrm>
+            <a:off x="457200" y="164592"/>
+            <a:ext cx="7315200" cy="274320"/>
+          </a:xfrm>
+          <a:prstGeom prst="rect">
+            <a:avLst/>
+          </a:prstGeom>
+          <a:noFill/>
+        </p:spPr>
+        <p:txBody>
+          <a:bodyPr wrap="square">
+            <a:spAutoFit/>
+          </a:bodyPr>
+          <a:lstStyle/>
+          <a:p>
+            <a:pPr>
+              <a:defRPr>
+                <a:latin typeface="Roboto"/>
+              </a:defRPr>
+            </a:pPr>
+            <a:r>
+              <a:rPr sz="1000" b="0">
+                <a:solidFill>
+                  <a:srgbClr val="5F6F63"/>
+                </a:solidFill>
+                <a:latin typeface="Roboto"/>
+              </a:rPr>
+              <a:t>Sample Community Services Ltd · Which funding is worth chasing?</a:t>
+            </a:r>
+          </a:p>
+        </p:txBody>
+      </p:sp>
+      <p:sp>
+        <p:nvSpPr>
+          <p:cNvPr id="4" name="TextBox 3"/>
+          <p:cNvSpPr txBox="1"/>
+          <p:nvPr/>
+        </p:nvSpPr>
+        <p:spPr>
+          <a:xfrm>
+            <a:off x="457200" y="411480"/>
+            <a:ext cx="11247120" cy="548640"/>
+          </a:xfrm>
+          <a:prstGeom prst="rect">
+            <a:avLst/>
+          </a:prstGeom>
+          <a:noFill/>
+        </p:spPr>
+        <p:txBody>
+          <a:bodyPr wrap="square">
+            <a:spAutoFit/>
+          </a:bodyPr>
+          <a:lstStyle/>
+          <a:p>
+            <a:pPr>
+              <a:defRPr>
+                <a:latin typeface="Roboto"/>
+              </a:defRPr>
+            </a:pPr>
+            <a:r>
+              <a:rPr sz="2400" b="1">
+                <a:solidFill>
+                  <a:srgbClr val="25342A"/>
+                </a:solidFill>
+                <a:latin typeface="Roboto"/>
+              </a:rPr>
+              <a:t>Headline numbers · Every source at once</a:t>
+            </a:r>
+          </a:p>
+        </p:txBody>
+      </p:sp>
+      <p:sp>
+        <p:nvSpPr>
+          <p:cNvPr id="5" name="Rectangle 4"/>
+          <p:cNvSpPr/>
+          <p:nvPr/>
+        </p:nvSpPr>
+        <p:spPr>
+          <a:xfrm>
+            <a:off x="457200" y="1645920"/>
+            <a:ext cx="3576218" cy="2011680"/>
+          </a:xfrm>
+          <a:prstGeom prst="rect">
+            <a:avLst/>
+          </a:prstGeom>
+          <a:solidFill>
+            <a:srgbClr val="F7FAF7"/>
+          </a:solidFill>
+          <a:ln>
+            <a:solidFill>
+              <a:srgbClr val="DCE8DC"/>
+            </a:solidFill>
+          </a:ln>
+        </p:spPr>
+        <p:style>
+          <a:lnRef idx="1">
+            <a:schemeClr val="accent1"/>
+          </a:lnRef>
+          <a:fillRef idx="3">
+            <a:schemeClr val="accent1"/>
+          </a:fillRef>
+          <a:effectRef idx="2">
+            <a:schemeClr val="accent1"/>
+          </a:effectRef>
+          <a:fontRef idx="minor">
+            <a:schemeClr val="lt1"/>
+          </a:fontRef>
+        </p:style>
+        <p:txBody>
+          <a:bodyPr rtlCol="0" anchor="ctr"/>
+          <a:lstStyle/>
+          <a:p>
+            <a:pPr algn="ctr">
+              <a:defRPr>
+                <a:latin typeface="Roboto"/>
+              </a:defRPr>
+            </a:pPr>
+          </a:p>
+        </p:txBody>
+      </p:sp>
+      <p:sp>
+        <p:nvSpPr>
+          <p:cNvPr id="6" name="TextBox 5"/>
+          <p:cNvSpPr txBox="1"/>
+          <p:nvPr/>
+        </p:nvSpPr>
+        <p:spPr>
+          <a:xfrm>
+            <a:off x="640080" y="1783080"/>
+            <a:ext cx="3210458" cy="457200"/>
+          </a:xfrm>
+          <a:prstGeom prst="rect">
+            <a:avLst/>
+          </a:prstGeom>
+          <a:noFill/>
+        </p:spPr>
+        <p:txBody>
+          <a:bodyPr wrap="square">
+            <a:spAutoFit/>
+          </a:bodyPr>
+          <a:lstStyle/>
+          <a:p>
+            <a:pPr>
+              <a:defRPr>
+                <a:latin typeface="Roboto"/>
+              </a:defRPr>
+            </a:pPr>
+            <a:r>
+              <a:rPr sz="1200" b="0">
+                <a:solidFill>
+                  <a:srgbClr val="5F6F63"/>
+                </a:solidFill>
+                <a:latin typeface="Roboto"/>
+              </a:rPr>
+              <a:t>Cheapest to raise: Grants</a:t>
+            </a:r>
+          </a:p>
+        </p:txBody>
+      </p:sp>
+      <p:sp>
+        <p:nvSpPr>
+          <p:cNvPr id="7" name="TextBox 6"/>
+          <p:cNvSpPr txBox="1"/>
+          <p:nvPr/>
+        </p:nvSpPr>
+        <p:spPr>
+          <a:xfrm>
+            <a:off x="640080" y="2240280"/>
+            <a:ext cx="3210458" cy="731520"/>
+          </a:xfrm>
+          <a:prstGeom prst="rect">
+            <a:avLst/>
+          </a:prstGeom>
+          <a:noFill/>
+        </p:spPr>
+        <p:txBody>
+          <a:bodyPr wrap="square">
+            <a:spAutoFit/>
+          </a:bodyPr>
+          <a:lstStyle/>
+          <a:p>
+            <a:pPr>
+              <a:defRPr>
+                <a:latin typeface="Roboto"/>
+              </a:defRPr>
+            </a:pPr>
+            <a:r>
+              <a:rPr sz="3000" b="1">
+                <a:solidFill>
+                  <a:srgbClr val="2F7A5D"/>
+                </a:solidFill>
+                <a:latin typeface="Roboto"/>
+              </a:rPr>
+              <a:t>10¢</a:t>
+            </a:r>
+          </a:p>
+        </p:txBody>
+      </p:sp>
+      <p:sp>
+        <p:nvSpPr>
+          <p:cNvPr id="8" name="TextBox 7"/>
+          <p:cNvSpPr txBox="1"/>
+          <p:nvPr/>
+        </p:nvSpPr>
+        <p:spPr>
+          <a:xfrm>
+            <a:off x="640080" y="3017520"/>
+            <a:ext cx="3210458" cy="548640"/>
+          </a:xfrm>
+          <a:prstGeom prst="rect">
+            <a:avLst/>
+          </a:prstGeom>
+          <a:noFill/>
+        </p:spPr>
+        <p:txBody>
+          <a:bodyPr wrap="square">
+            <a:spAutoFit/>
+          </a:bodyPr>
+          <a:lstStyle/>
+          <a:p>
+            <a:pPr>
+              <a:defRPr>
+                <a:latin typeface="Roboto"/>
+              </a:defRPr>
+            </a:pPr>
+            <a:r>
+              <a:rPr sz="1100" b="0">
+                <a:solidFill>
+                  <a:srgbClr val="5F6F63"/>
+                </a:solidFill>
+                <a:latin typeface="Roboto"/>
+              </a:rPr>
+              <a:t>per $1 raised in October</a:t>
+            </a:r>
+          </a:p>
+        </p:txBody>
+      </p:sp>
+      <p:sp>
+        <p:nvSpPr>
+          <p:cNvPr id="9" name="Rectangle 8"/>
+          <p:cNvSpPr/>
+          <p:nvPr/>
+        </p:nvSpPr>
+        <p:spPr>
+          <a:xfrm>
+            <a:off x="4307738" y="1645920"/>
+            <a:ext cx="3576218" cy="2011680"/>
+          </a:xfrm>
+          <a:prstGeom prst="rect">
+            <a:avLst/>
+          </a:prstGeom>
+          <a:solidFill>
+            <a:srgbClr val="F7FAF7"/>
+          </a:solidFill>
+          <a:ln>
+            <a:solidFill>
+              <a:srgbClr val="DCE8DC"/>
+            </a:solidFill>
+          </a:ln>
+        </p:spPr>
+        <p:style>
+          <a:lnRef idx="1">
+            <a:schemeClr val="accent1"/>
+          </a:lnRef>
+          <a:fillRef idx="3">
+            <a:schemeClr val="accent1"/>
+          </a:fillRef>
+          <a:effectRef idx="2">
+            <a:schemeClr val="accent1"/>
+          </a:effectRef>
+          <a:fontRef idx="minor">
+            <a:schemeClr val="lt1"/>
+          </a:fontRef>
+        </p:style>
+        <p:txBody>
+          <a:bodyPr rtlCol="0" anchor="ctr"/>
+          <a:lstStyle/>
+          <a:p>
+            <a:pPr algn="ctr">
+              <a:defRPr>
+                <a:latin typeface="Roboto"/>
+              </a:defRPr>
+            </a:pPr>
+          </a:p>
+        </p:txBody>
+      </p:sp>
+      <p:sp>
+        <p:nvSpPr>
+          <p:cNvPr id="10" name="TextBox 9"/>
+          <p:cNvSpPr txBox="1"/>
+          <p:nvPr/>
+        </p:nvSpPr>
+        <p:spPr>
+          <a:xfrm>
+            <a:off x="4490618" y="1783080"/>
+            <a:ext cx="3210458" cy="457200"/>
+          </a:xfrm>
+          <a:prstGeom prst="rect">
+            <a:avLst/>
+          </a:prstGeom>
+          <a:noFill/>
+        </p:spPr>
+        <p:txBody>
+          <a:bodyPr wrap="square">
+            <a:spAutoFit/>
+          </a:bodyPr>
+          <a:lstStyle/>
+          <a:p>
+            <a:pPr>
+              <a:defRPr>
+                <a:latin typeface="Roboto"/>
+              </a:defRPr>
+            </a:pPr>
+            <a:r>
+              <a:rPr sz="1200" b="0">
+                <a:solidFill>
+                  <a:srgbClr val="5F6F63"/>
+                </a:solidFill>
+                <a:latin typeface="Roboto"/>
+              </a:rPr>
+              <a:t>Dearest to raise: Donations</a:t>
+            </a:r>
+          </a:p>
+        </p:txBody>
+      </p:sp>
+      <p:sp>
+        <p:nvSpPr>
+          <p:cNvPr id="11" name="TextBox 10"/>
+          <p:cNvSpPr txBox="1"/>
+          <p:nvPr/>
+        </p:nvSpPr>
+        <p:spPr>
+          <a:xfrm>
+            <a:off x="4490618" y="2240280"/>
+            <a:ext cx="3210458" cy="731520"/>
+          </a:xfrm>
+          <a:prstGeom prst="rect">
+            <a:avLst/>
+          </a:prstGeom>
+          <a:noFill/>
+        </p:spPr>
+        <p:txBody>
+          <a:bodyPr wrap="square">
+            <a:spAutoFit/>
+          </a:bodyPr>
+          <a:lstStyle/>
+          <a:p>
+            <a:pPr>
+              <a:defRPr>
+                <a:latin typeface="Roboto"/>
+              </a:defRPr>
+            </a:pPr>
+            <a:r>
+              <a:rPr sz="3000" b="1">
+                <a:solidFill>
+                  <a:srgbClr val="2F7A5D"/>
+                </a:solidFill>
+                <a:latin typeface="Roboto"/>
+              </a:rPr>
+              <a:t>14¢</a:t>
+            </a:r>
+          </a:p>
+        </p:txBody>
+      </p:sp>
+      <p:sp>
+        <p:nvSpPr>
+          <p:cNvPr id="12" name="TextBox 11"/>
+          <p:cNvSpPr txBox="1"/>
+          <p:nvPr/>
+        </p:nvSpPr>
+        <p:spPr>
+          <a:xfrm>
+            <a:off x="4490618" y="3017520"/>
+            <a:ext cx="3210458" cy="548640"/>
+          </a:xfrm>
+          <a:prstGeom prst="rect">
+            <a:avLst/>
+          </a:prstGeom>
+          <a:noFill/>
+        </p:spPr>
+        <p:txBody>
+          <a:bodyPr wrap="square">
+            <a:spAutoFit/>
+          </a:bodyPr>
+          <a:lstStyle/>
+          <a:p>
+            <a:pPr>
+              <a:defRPr>
+                <a:latin typeface="Roboto"/>
+              </a:defRPr>
+            </a:pPr>
+            <a:r>
+              <a:rPr sz="1100" b="0">
+                <a:solidFill>
+                  <a:srgbClr val="5F6F63"/>
+                </a:solidFill>
+                <a:latin typeface="Roboto"/>
+              </a:rPr>
+              <a:t>per $1 raised in October</a:t>
+            </a:r>
+          </a:p>
+        </p:txBody>
+      </p:sp>
+      <p:sp>
+        <p:nvSpPr>
+          <p:cNvPr id="13" name="Rectangle 12"/>
+          <p:cNvSpPr/>
+          <p:nvPr/>
+        </p:nvSpPr>
+        <p:spPr>
+          <a:xfrm>
+            <a:off x="8158276" y="1645920"/>
+            <a:ext cx="3576218" cy="2011680"/>
+          </a:xfrm>
+          <a:prstGeom prst="rect">
+            <a:avLst/>
+          </a:prstGeom>
+          <a:solidFill>
+            <a:srgbClr val="F7FAF7"/>
+          </a:solidFill>
+          <a:ln>
+            <a:solidFill>
+              <a:srgbClr val="DCE8DC"/>
+            </a:solidFill>
+          </a:ln>
+        </p:spPr>
+        <p:style>
+          <a:lnRef idx="1">
+            <a:schemeClr val="accent1"/>
+          </a:lnRef>
+          <a:fillRef idx="3">
+            <a:schemeClr val="accent1"/>
+          </a:fillRef>
+          <a:effectRef idx="2">
+            <a:schemeClr val="accent1"/>
+          </a:effectRef>
+          <a:fontRef idx="minor">
+            <a:schemeClr val="lt1"/>
+          </a:fontRef>
+        </p:style>
+        <p:txBody>
+          <a:bodyPr rtlCol="0" anchor="ctr"/>
+          <a:lstStyle/>
+          <a:p>
+            <a:pPr algn="ctr">
+              <a:defRPr>
+                <a:latin typeface="Roboto"/>
+              </a:defRPr>
+            </a:pPr>
+          </a:p>
+        </p:txBody>
+      </p:sp>
+      <p:sp>
+        <p:nvSpPr>
+          <p:cNvPr id="14" name="TextBox 13"/>
+          <p:cNvSpPr txBox="1"/>
+          <p:nvPr/>
+        </p:nvSpPr>
+        <p:spPr>
+          <a:xfrm>
+            <a:off x="8341156" y="1783080"/>
+            <a:ext cx="3210458" cy="457200"/>
+          </a:xfrm>
+          <a:prstGeom prst="rect">
+            <a:avLst/>
+          </a:prstGeom>
+          <a:noFill/>
+        </p:spPr>
+        <p:txBody>
+          <a:bodyPr wrap="square">
+            <a:spAutoFit/>
+          </a:bodyPr>
+          <a:lstStyle/>
+          <a:p>
+            <a:pPr>
+              <a:defRPr>
+                <a:latin typeface="Roboto"/>
+              </a:defRPr>
+            </a:pPr>
+            <a:r>
+              <a:rPr sz="1200" b="0">
+                <a:solidFill>
+                  <a:srgbClr val="5F6F63"/>
+                </a:solidFill>
+                <a:latin typeface="Roboto"/>
+              </a:rPr>
+              <a:t>Raised, year to date</a:t>
+            </a:r>
+          </a:p>
+        </p:txBody>
+      </p:sp>
+      <p:sp>
+        <p:nvSpPr>
+          <p:cNvPr id="15" name="TextBox 14"/>
+          <p:cNvSpPr txBox="1"/>
+          <p:nvPr/>
+        </p:nvSpPr>
+        <p:spPr>
+          <a:xfrm>
+            <a:off x="8341156" y="2240280"/>
+            <a:ext cx="3210458" cy="731520"/>
+          </a:xfrm>
+          <a:prstGeom prst="rect">
+            <a:avLst/>
+          </a:prstGeom>
+          <a:noFill/>
+        </p:spPr>
+        <p:txBody>
+          <a:bodyPr wrap="square">
+            <a:spAutoFit/>
+          </a:bodyPr>
+          <a:lstStyle/>
+          <a:p>
+            <a:pPr>
+              <a:defRPr>
+                <a:latin typeface="Roboto"/>
+              </a:defRPr>
+            </a:pPr>
+            <a:r>
+              <a:rPr sz="3000" b="1">
+                <a:solidFill>
+                  <a:srgbClr val="2F7A5D"/>
+                </a:solidFill>
+                <a:latin typeface="Roboto"/>
+              </a:rPr>
+              <a:t>$350,529</a:t>
+            </a:r>
+          </a:p>
+        </p:txBody>
+      </p:sp>
+      <p:sp>
+        <p:nvSpPr>
+          <p:cNvPr id="16" name="TextBox 15"/>
+          <p:cNvSpPr txBox="1"/>
+          <p:nvPr/>
+        </p:nvSpPr>
+        <p:spPr>
+          <a:xfrm>
+            <a:off x="8341156" y="3017520"/>
+            <a:ext cx="3210458" cy="548640"/>
+          </a:xfrm>
+          <a:prstGeom prst="rect">
+            <a:avLst/>
+          </a:prstGeom>
+          <a:noFill/>
+        </p:spPr>
+        <p:txBody>
+          <a:bodyPr wrap="square">
+            <a:spAutoFit/>
+          </a:bodyPr>
+          <a:lstStyle/>
+          <a:p>
+            <a:pPr>
+              <a:defRPr>
+                <a:latin typeface="Roboto"/>
+              </a:defRPr>
+            </a:pPr>
+            <a:r>
+              <a:rPr sz="1100" b="0">
+                <a:solidFill>
+                  <a:srgbClr val="5F6F63"/>
+                </a:solidFill>
+                <a:latin typeface="Roboto"/>
+              </a:rPr>
+              <a:t>Jul to Oct 2025</a:t>
+            </a:r>
+          </a:p>
+        </p:txBody>
+      </p:sp>
+      <p:sp>
+        <p:nvSpPr>
+          <p:cNvPr id="17" name="TextBox 16"/>
+          <p:cNvSpPr txBox="1"/>
+          <p:nvPr/>
+        </p:nvSpPr>
+        <p:spPr>
+          <a:xfrm>
+            <a:off x="457200" y="6492240"/>
+            <a:ext cx="3657600" cy="274320"/>
+          </a:xfrm>
+          <a:prstGeom prst="rect">
+            <a:avLst/>
+          </a:prstGeom>
+          <a:noFill/>
+        </p:spPr>
+        <p:txBody>
+          <a:bodyPr wrap="square">
+            <a:spAutoFit/>
+          </a:bodyPr>
+          <a:lstStyle/>
+          <a:p>
+            <a:pPr>
+              <a:defRPr>
+                <a:latin typeface="Roboto"/>
+              </a:defRPr>
+            </a:pPr>
+            <a:r>
+              <a:rPr sz="900" b="0">
+                <a:solidFill>
+                  <a:srgbClr val="5F6F63"/>
+                </a:solidFill>
+                <a:latin typeface="Roboto"/>
+              </a:rPr>
+              <a:t>funding.pptx</a:t>
+            </a:r>
+          </a:p>
+        </p:txBody>
+      </p:sp>
+      <p:sp>
+        <p:nvSpPr>
+          <p:cNvPr id="18" name="TextBox 17"/>
+          <p:cNvSpPr txBox="1"/>
+          <p:nvPr/>
+        </p:nvSpPr>
+        <p:spPr>
+          <a:xfrm>
+            <a:off x="4297680" y="6492240"/>
+            <a:ext cx="3657600" cy="274320"/>
+          </a:xfrm>
+          <a:prstGeom prst="rect">
+            <a:avLst/>
+          </a:prstGeom>
+          <a:noFill/>
+        </p:spPr>
+        <p:txBody>
+          <a:bodyPr wrap="square">
+            <a:spAutoFit/>
+          </a:bodyPr>
+          <a:lstStyle/>
+          <a:p>
+            <a:pPr algn="ctr">
+              <a:defRPr>
+                <a:latin typeface="Roboto"/>
+              </a:defRPr>
+            </a:pPr>
+            <a:r>
+              <a:rPr sz="900" b="0">
+                <a:solidFill>
+                  <a:srgbClr val="5F6F63"/>
+                </a:solidFill>
+                <a:latin typeface="Roboto"/>
+              </a:rPr>
+              <a:t>Data retrieved 2pm, Tue 6 Oct 2026 · Sample data</a:t>
+            </a:r>
+          </a:p>
+        </p:txBody>
+      </p:sp>
+      <p:sp>
+        <p:nvSpPr>
+          <p:cNvPr id="19" name="TextBox 18"/>
+          <p:cNvSpPr txBox="1"/>
+          <p:nvPr/>
+        </p:nvSpPr>
+        <p:spPr>
+          <a:xfrm>
+            <a:off x="8503920" y="6492240"/>
+            <a:ext cx="3200400" cy="274320"/>
+          </a:xfrm>
+          <a:prstGeom prst="rect">
+            <a:avLst/>
+          </a:prstGeom>
+          <a:noFill/>
+        </p:spPr>
+        <p:txBody>
+          <a:bodyPr wrap="square">
+            <a:spAutoFit/>
+          </a:bodyPr>
+          <a:lstStyle/>
+          <a:p>
+            <a:pPr algn="r">
+              <a:defRPr>
+                <a:latin typeface="Roboto"/>
+              </a:defRPr>
+            </a:pPr>
+            <a:r>
+              <a:rPr sz="900" b="0">
+                <a:solidFill>
+                  <a:srgbClr val="5F6F63"/>
+                </a:solidFill>
+                <a:latin typeface="Roboto"/>
+              </a:rPr>
+              <a:t>Slide 7 of 10</a:t>
+            </a:r>
+          </a:p>
+        </p:txBody>
+      </p:sp>
+    </p:spTree>
+  </p:cSld>
+  <p:clrMapOvr>
+    <a:masterClrMapping/>
+  </p:clrMapOvr>
+</p:sld>
+</file>
+
+<file path=ppt/slides/slide8.xml><?xml version="1.0" encoding="utf-8"?>
 <p:sld xmlns:a="http://schemas.openxmlformats.org/drawingml/2006/main" xmlns:p="http://schemas.openxmlformats.org/presentationml/2006/main" xmlns:r="http://schemas.openxmlformats.org/officeDocument/2006/relationships">
   <p:cSld>
     <p:spTree>
@@ -7328,324 +8404,7 @@
                 </a:solidFill>
                 <a:latin typeface="Roboto"/>
               </a:rPr>
-              <a:t>Slide 7 of 9</a:t>
-            </a:r>
-          </a:p>
-        </p:txBody>
-      </p:sp>
-    </p:spTree>
-  </p:cSld>
-  <p:clrMapOvr>
-    <a:masterClrMapping/>
-  </p:clrMapOvr>
-</p:sld>
-</file>
-
-<file path=ppt/slides/slide8.xml><?xml version="1.0" encoding="utf-8"?>
-<p:sld xmlns:a="http://schemas.openxmlformats.org/drawingml/2006/main" xmlns:p="http://schemas.openxmlformats.org/presentationml/2006/main" xmlns:r="http://schemas.openxmlformats.org/officeDocument/2006/relationships">
-  <p:cSld>
-    <p:spTree>
-      <p:nvGrpSpPr>
-        <p:cNvPr id="1" name=""/>
-        <p:cNvGrpSpPr/>
-        <p:nvPr/>
-      </p:nvGrpSpPr>
-      <p:grpSpPr/>
-      <p:sp>
-        <p:nvSpPr>
-          <p:cNvPr id="2" name="Rectangle 1"/>
-          <p:cNvSpPr/>
-          <p:nvPr/>
-        </p:nvSpPr>
-        <p:spPr>
-          <a:xfrm>
-            <a:off x="0" y="0"/>
-            <a:ext cx="12191695" cy="73152"/>
-          </a:xfrm>
-          <a:prstGeom prst="rect">
-            <a:avLst/>
-          </a:prstGeom>
-          <a:solidFill>
-            <a:srgbClr val="2F7A5D"/>
-          </a:solidFill>
-          <a:ln>
-            <a:noFill/>
-          </a:ln>
-        </p:spPr>
-        <p:style>
-          <a:lnRef idx="1">
-            <a:schemeClr val="accent1"/>
-          </a:lnRef>
-          <a:fillRef idx="3">
-            <a:schemeClr val="accent1"/>
-          </a:fillRef>
-          <a:effectRef idx="2">
-            <a:schemeClr val="accent1"/>
-          </a:effectRef>
-          <a:fontRef idx="minor">
-            <a:schemeClr val="lt1"/>
-          </a:fontRef>
-        </p:style>
-        <p:txBody>
-          <a:bodyPr rtlCol="0" anchor="ctr"/>
-          <a:lstStyle/>
-          <a:p>
-            <a:pPr algn="ctr">
-              <a:defRPr>
-                <a:latin typeface="Roboto"/>
-              </a:defRPr>
-            </a:pPr>
-          </a:p>
-        </p:txBody>
-      </p:sp>
-      <p:sp>
-        <p:nvSpPr>
-          <p:cNvPr id="3" name="TextBox 2"/>
-          <p:cNvSpPr txBox="1"/>
-          <p:nvPr/>
-        </p:nvSpPr>
-        <p:spPr>
-          <a:xfrm>
-            <a:off x="457200" y="164592"/>
-            <a:ext cx="7315200" cy="274320"/>
-          </a:xfrm>
-          <a:prstGeom prst="rect">
-            <a:avLst/>
-          </a:prstGeom>
-          <a:noFill/>
-        </p:spPr>
-        <p:txBody>
-          <a:bodyPr wrap="square">
-            <a:spAutoFit/>
-          </a:bodyPr>
-          <a:lstStyle/>
-          <a:p>
-            <a:pPr>
-              <a:defRPr>
-                <a:latin typeface="Roboto"/>
-              </a:defRPr>
-            </a:pPr>
-            <a:r>
-              <a:rPr sz="1000" b="0">
-                <a:solidFill>
-                  <a:srgbClr val="5F6F63"/>
-                </a:solidFill>
-                <a:latin typeface="Roboto"/>
-              </a:rPr>
-              <a:t>Sample Community Services Ltd · Which funding is worth chasing?</a:t>
-            </a:r>
-          </a:p>
-        </p:txBody>
-      </p:sp>
-      <p:sp>
-        <p:nvSpPr>
-          <p:cNvPr id="4" name="TextBox 3"/>
-          <p:cNvSpPr txBox="1"/>
-          <p:nvPr/>
-        </p:nvSpPr>
-        <p:spPr>
-          <a:xfrm>
-            <a:off x="457200" y="411480"/>
-            <a:ext cx="11247120" cy="548640"/>
-          </a:xfrm>
-          <a:prstGeom prst="rect">
-            <a:avLst/>
-          </a:prstGeom>
-          <a:noFill/>
-        </p:spPr>
-        <p:txBody>
-          <a:bodyPr wrap="square">
-            <a:spAutoFit/>
-          </a:bodyPr>
-          <a:lstStyle/>
-          <a:p>
-            <a:pPr>
-              <a:defRPr>
-                <a:latin typeface="Roboto"/>
-              </a:defRPr>
-            </a:pPr>
-            <a:r>
-              <a:rPr sz="2400" b="1">
-                <a:solidFill>
-                  <a:srgbClr val="25342A"/>
-                </a:solidFill>
-                <a:latin typeface="Roboto"/>
-              </a:rPr>
-              <a:t>Raised and left after costs, by month · Raised $ · Every source at once</a:t>
-            </a:r>
-          </a:p>
-        </p:txBody>
-      </p:sp>
-      <p:sp>
-        <p:nvSpPr>
-          <p:cNvPr id="5" name="TextBox 4"/>
-          <p:cNvSpPr txBox="1"/>
-          <p:nvPr/>
-        </p:nvSpPr>
-        <p:spPr>
-          <a:xfrm>
-            <a:off x="457200" y="960120"/>
-            <a:ext cx="11247120" cy="457200"/>
-          </a:xfrm>
-          <a:prstGeom prst="rect">
-            <a:avLst/>
-          </a:prstGeom>
-          <a:noFill/>
-        </p:spPr>
-        <p:txBody>
-          <a:bodyPr wrap="square">
-            <a:spAutoFit/>
-          </a:bodyPr>
-          <a:lstStyle/>
-          <a:p>
-            <a:pPr>
-              <a:defRPr>
-                <a:latin typeface="Roboto"/>
-              </a:defRPr>
-            </a:pPr>
-            <a:r>
-              <a:rPr sz="1200" b="0">
-                <a:solidFill>
-                  <a:srgbClr val="5F6F63"/>
-                </a:solidFill>
-                <a:latin typeface="Roboto"/>
-              </a:rPr>
-              <a:t>Tap a month for its workings.</a:t>
-            </a:r>
-          </a:p>
-        </p:txBody>
-      </p:sp>
-      <p:graphicFrame>
-        <p:nvGraphicFramePr>
-          <p:cNvPr id="6" name="Chart 5"/>
-          <p:cNvGraphicFramePr>
-            <a:graphicFrameLocks noGrp="1"/>
-          </p:cNvGraphicFramePr>
-          <p:nvPr/>
-        </p:nvGraphicFramePr>
-        <p:xfrm>
-          <a:off x="457200" y="1463040"/>
-          <a:ext cx="11247120" cy="4754880"/>
-        </p:xfrm>
-        <a:graphic>
-          <a:graphicData uri="http://schemas.openxmlformats.org/drawingml/2006/chart">
-            <c:chart xmlns:c="http://schemas.openxmlformats.org/drawingml/2006/chart" r:id="rId2"/>
-          </a:graphicData>
-        </a:graphic>
-      </p:graphicFrame>
-      <p:sp>
-        <p:nvSpPr>
-          <p:cNvPr id="7" name="TextBox 6"/>
-          <p:cNvSpPr txBox="1"/>
-          <p:nvPr/>
-        </p:nvSpPr>
-        <p:spPr>
-          <a:xfrm>
-            <a:off x="457200" y="6492240"/>
-            <a:ext cx="3657600" cy="274320"/>
-          </a:xfrm>
-          <a:prstGeom prst="rect">
-            <a:avLst/>
-          </a:prstGeom>
-          <a:noFill/>
-        </p:spPr>
-        <p:txBody>
-          <a:bodyPr wrap="square">
-            <a:spAutoFit/>
-          </a:bodyPr>
-          <a:lstStyle/>
-          <a:p>
-            <a:pPr>
-              <a:defRPr>
-                <a:latin typeface="Roboto"/>
-              </a:defRPr>
-            </a:pPr>
-            <a:r>
-              <a:rPr sz="900" b="0">
-                <a:solidFill>
-                  <a:srgbClr val="5F6F63"/>
-                </a:solidFill>
-                <a:latin typeface="Roboto"/>
-              </a:rPr>
-              <a:t>funding.pptx</a:t>
-            </a:r>
-          </a:p>
-        </p:txBody>
-      </p:sp>
-      <p:sp>
-        <p:nvSpPr>
-          <p:cNvPr id="8" name="TextBox 7"/>
-          <p:cNvSpPr txBox="1"/>
-          <p:nvPr/>
-        </p:nvSpPr>
-        <p:spPr>
-          <a:xfrm>
-            <a:off x="4297680" y="6492240"/>
-            <a:ext cx="3657600" cy="274320"/>
-          </a:xfrm>
-          <a:prstGeom prst="rect">
-            <a:avLst/>
-          </a:prstGeom>
-          <a:noFill/>
-        </p:spPr>
-        <p:txBody>
-          <a:bodyPr wrap="square">
-            <a:spAutoFit/>
-          </a:bodyPr>
-          <a:lstStyle/>
-          <a:p>
-            <a:pPr algn="ctr">
-              <a:defRPr>
-                <a:latin typeface="Roboto"/>
-              </a:defRPr>
-            </a:pPr>
-            <a:r>
-              <a:rPr sz="900" b="0">
-                <a:solidFill>
-                  <a:srgbClr val="5F6F63"/>
-                </a:solidFill>
-                <a:latin typeface="Roboto"/>
-              </a:rPr>
-              <a:t>Data retrieved 2pm, Tue 6 Oct 2026 · Sample data</a:t>
-            </a:r>
-          </a:p>
-        </p:txBody>
-      </p:sp>
-      <p:sp>
-        <p:nvSpPr>
-          <p:cNvPr id="9" name="TextBox 8"/>
-          <p:cNvSpPr txBox="1"/>
-          <p:nvPr/>
-        </p:nvSpPr>
-        <p:spPr>
-          <a:xfrm>
-            <a:off x="8503920" y="6492240"/>
-            <a:ext cx="3200400" cy="274320"/>
-          </a:xfrm>
-          <a:prstGeom prst="rect">
-            <a:avLst/>
-          </a:prstGeom>
-          <a:noFill/>
-        </p:spPr>
-        <p:txBody>
-          <a:bodyPr wrap="square">
-            <a:spAutoFit/>
-          </a:bodyPr>
-          <a:lstStyle/>
-          <a:p>
-            <a:pPr algn="r">
-              <a:defRPr>
-                <a:latin typeface="Roboto"/>
-              </a:defRPr>
-            </a:pPr>
-            <a:r>
-              <a:rPr sz="900" b="0">
-                <a:solidFill>
-                  <a:srgbClr val="5F6F63"/>
-                </a:solidFill>
-                <a:latin typeface="Roboto"/>
-              </a:rPr>
-              <a:t>Slide 8 of 9</a:t>
+              <a:t>Slide 8 of 10</a:t>
             </a:r>
           </a:p>
         </p:txBody>
@@ -7788,7 +8547,7 @@
                 </a:solidFill>
                 <a:latin typeface="Roboto"/>
               </a:rPr>
-              <a:t>Raised and left after costs, by month · Left after costs $ · Every source at once</a:t>
+              <a:t>Raised and left after costs, by month · Raised $ · Every source at once</a:t>
             </a:r>
           </a:p>
         </p:txBody>
@@ -7962,7 +8721,7 @@
                 </a:solidFill>
                 <a:latin typeface="Roboto"/>
               </a:rPr>
-              <a:t>Slide 9 of 9</a:t>
+              <a:t>Slide 9 of 10</a:t>
             </a:r>
           </a:p>
         </p:txBody>

--- a/media/exports/reports/2025-10/funding.pptx
+++ b/media/exports/reports/2025-10/funding.pptx
@@ -6,15 +6,11 @@
   </p:sldMasterIdLst>
   <p:sldIdLst>
     <p:sldId id="256" r:id="rId7"/>
-    <p:sldId id="257" r:id="rId8"/>
-    <p:sldId id="258" r:id="rId9"/>
-    <p:sldId id="259" r:id="rId10"/>
-    <p:sldId id="260" r:id="rId11"/>
-    <p:sldId id="261" r:id="rId12"/>
-    <p:sldId id="262" r:id="rId13"/>
-    <p:sldId id="263" r:id="rId14"/>
-    <p:sldId id="264" r:id="rId15"/>
-    <p:sldId id="265" r:id="rId16"/>
+    <p:sldId id="257" r:id="rId9"/>
+    <p:sldId id="258" r:id="rId10"/>
+    <p:sldId id="259" r:id="rId11"/>
+    <p:sldId id="260" r:id="rId12"/>
+    <p:sldId id="261" r:id="rId13"/>
   </p:sldIdLst>
   <p:sldSz cx="12191695" cy="6858000" type="screen4x3"/>
   <p:notesSz cx="6858000" cy="9144000"/>
@@ -120,8 +116,19 @@
 <c:chartSpace xmlns:c="http://schemas.openxmlformats.org/drawingml/2006/chart" xmlns:a="http://schemas.openxmlformats.org/drawingml/2006/main" xmlns:r="http://schemas.openxmlformats.org/officeDocument/2006/relationships">
   <c:date1904 val="0"/>
   <c:chart>
-    <c:autoTitleDeleted val="0"/>
+    <c:autoTitleDeleted val="1"/>
     <c:plotArea>
+      <c:layout>
+        <c:manualLayout>
+          <c:layoutTarget val="inner"/>
+          <c:xMode val="edge"/>
+          <c:yMode val="edge"/>
+          <c:x val="0.3"/>
+          <c:y val="0.03"/>
+          <c:w val="0.58"/>
+          <c:h val="0.88"/>
+        </c:manualLayout>
+      </c:layout>
       <c:barChart>
         <c:barDir val="bar"/>
         <c:grouping val="clustered"/>
@@ -134,7 +141,7 @@
               <c:strCache>
                 <c:ptCount val="1"/>
                 <c:pt idx="0">
-                  <c:v>Value</c:v>
+                  <c:v>Cost to raise a dollar</c:v>
                 </c:pt>
               </c:strCache>
             </c:strRef>
@@ -192,7 +199,7 @@
             <a:lstStyle/>
             <a:p>
               <a:pPr>
-                <a:defRPr sz="1100"/>
+                <a:defRPr sz="1000"/>
               </a:pPr>
             </a:p>
           </c:txPr>
@@ -229,7 +236,7 @@
           <a:lstStyle/>
           <a:p>
             <a:pPr>
-              <a:defRPr sz="1200"/>
+              <a:defRPr sz="1100"/>
             </a:pPr>
           </a:p>
         </c:txPr>
@@ -242,7 +249,10 @@
       </c:catAx>
       <c:valAx>
         <c:axId val="-2113994440"/>
-        <c:scaling/>
+        <c:scaling>
+          <c:max val="16.099999999999998"/>
+          <c:min val="0.0"/>
+        </c:scaling>
         <c:delete/>
         <c:axPos val="b"/>
         <c:majorTickMark val="out"/>
@@ -277,9 +287,19 @@
   <c:date1904 val="0"/>
   <c:roundedCorners val="0"/>
   <c:chart>
-    <c:autoTitleDeleted val="0"/>
+    <c:autoTitleDeleted val="1"/>
     <c:plotArea>
-      <c:layout/>
+      <c:layout>
+        <c:manualLayout>
+          <c:layoutTarget val="inner"/>
+          <c:xMode val="edge"/>
+          <c:yMode val="edge"/>
+          <c:x val="0.11"/>
+          <c:y val="0.05"/>
+          <c:w val="0.86"/>
+          <c:h val="0.8"/>
+        </c:manualLayout>
+      </c:layout>
       <c:areaChart>
         <c:grouping val="standard"/>
         <c:varyColors val="0"/>
@@ -292,7 +312,7 @@
               <c:strCache>
                 <c:ptCount val="1"/>
                 <c:pt idx="0">
-                  <c:v>Value</c:v>
+                  <c:v>Raised $</c:v>
                 </c:pt>
               </c:strCache>
             </c:strRef>
@@ -363,43 +383,43 @@
                 <c:formatCode>$#,##0;[Red]($#,##0);"-"</c:formatCode>
                 <c:ptCount val="13"/>
                 <c:pt idx="0">
-                  <c:v>41900</c:v>
+                  <c:v>26600</c:v>
                 </c:pt>
                 <c:pt idx="1">
-                  <c:v>49500</c:v>
+                  <c:v>31800</c:v>
                 </c:pt>
                 <c:pt idx="2">
-                  <c:v>60600</c:v>
+                  <c:v>29700</c:v>
                 </c:pt>
                 <c:pt idx="3">
-                  <c:v>75100</c:v>
+                  <c:v>62700</c:v>
                 </c:pt>
                 <c:pt idx="4">
-                  <c:v>77300</c:v>
+                  <c:v>61700</c:v>
                 </c:pt>
                 <c:pt idx="5">
-                  <c:v>70200</c:v>
+                  <c:v>54500</c:v>
                 </c:pt>
                 <c:pt idx="6">
-                  <c:v>77200</c:v>
+                  <c:v>61500</c:v>
                 </c:pt>
                 <c:pt idx="7">
-                  <c:v>77500</c:v>
+                  <c:v>61700</c:v>
                 </c:pt>
                 <c:pt idx="8">
-                  <c:v>90300</c:v>
+                  <c:v>52200</c:v>
                 </c:pt>
                 <c:pt idx="9">
-                  <c:v>72563</c:v>
+                  <c:v>59063</c:v>
                 </c:pt>
                 <c:pt idx="10">
-                  <c:v>77544</c:v>
+                  <c:v>61544</c:v>
                 </c:pt>
                 <c:pt idx="11">
-                  <c:v>115037</c:v>
+                  <c:v>62137</c:v>
                 </c:pt>
                 <c:pt idx="12">
-                  <c:v>85385</c:v>
+                  <c:v>69185</c:v>
                 </c:pt>
               </c:numCache>
             </c:numRef>
@@ -441,12 +461,15 @@
         <c:auto val="1"/>
         <c:lblAlgn val="ctr"/>
         <c:lblOffset val="100"/>
+        <c:tickLblSkip val="2"/>
         <c:noMultiLvlLbl val="0"/>
       </c:catAx>
       <c:valAx>
         <c:axId val="-2100718248"/>
         <c:scaling>
           <c:orientation val="minMax"/>
+          <c:max val="80000.0"/>
+          <c:min val="0.0"/>
         </c:scaling>
         <c:delete val="0"/>
         <c:axPos val="l"/>
@@ -480,6 +503,7 @@
         <c:crossAx val="-2101159928"/>
         <c:crosses val="autoZero"/>
         <c:crossBetween val="midCat"/>
+        <c:majorUnit val="20000.0"/>
       </c:valAx>
     </c:plotArea>
     <c:plotVisOnly val="1"/>
@@ -509,9 +533,19 @@
   <c:date1904 val="0"/>
   <c:roundedCorners val="0"/>
   <c:chart>
-    <c:autoTitleDeleted val="0"/>
+    <c:autoTitleDeleted val="1"/>
     <c:plotArea>
-      <c:layout/>
+      <c:layout>
+        <c:manualLayout>
+          <c:layoutTarget val="inner"/>
+          <c:xMode val="edge"/>
+          <c:yMode val="edge"/>
+          <c:x val="0.11"/>
+          <c:y val="0.05"/>
+          <c:w val="0.86"/>
+          <c:h val="0.8"/>
+        </c:manualLayout>
+      </c:layout>
       <c:areaChart>
         <c:grouping val="standard"/>
         <c:varyColors val="0"/>
@@ -524,7 +558,7 @@
               <c:strCache>
                 <c:ptCount val="1"/>
                 <c:pt idx="0">
-                  <c:v>Value</c:v>
+                  <c:v>Raised $</c:v>
                 </c:pt>
               </c:strCache>
             </c:strRef>
@@ -595,43 +629,43 @@
                 <c:formatCode>$#,##0;[Red]($#,##0);"-"</c:formatCode>
                 <c:ptCount val="13"/>
                 <c:pt idx="0">
-                  <c:v>33200</c:v>
+                  <c:v>15300</c:v>
                 </c:pt>
                 <c:pt idx="1">
-                  <c:v>39900</c:v>
+                  <c:v>17700</c:v>
                 </c:pt>
                 <c:pt idx="2">
-                  <c:v>47100</c:v>
+                  <c:v>24700</c:v>
                 </c:pt>
                 <c:pt idx="3">
-                  <c:v>66400</c:v>
+                  <c:v>12400</c:v>
                 </c:pt>
                 <c:pt idx="4">
-                  <c:v>68600</c:v>
+                  <c:v>15600</c:v>
                 </c:pt>
                 <c:pt idx="5">
-                  <c:v>61500</c:v>
+                  <c:v>15700</c:v>
                 </c:pt>
                 <c:pt idx="6">
-                  <c:v>68500</c:v>
+                  <c:v>15700</c:v>
                 </c:pt>
                 <c:pt idx="7">
-                  <c:v>68800</c:v>
+                  <c:v>15800</c:v>
                 </c:pt>
                 <c:pt idx="8">
-                  <c:v>78300</c:v>
+                  <c:v>38100</c:v>
                 </c:pt>
                 <c:pt idx="9">
-                  <c:v>63263</c:v>
+                  <c:v>13500</c:v>
                 </c:pt>
                 <c:pt idx="10">
-                  <c:v>68244</c:v>
+                  <c:v>16000</c:v>
                 </c:pt>
                 <c:pt idx="11">
-                  <c:v>90537</c:v>
+                  <c:v>16100</c:v>
                 </c:pt>
                 <c:pt idx="12">
-                  <c:v>76085</c:v>
+                  <c:v>16200</c:v>
                 </c:pt>
               </c:numCache>
             </c:numRef>
@@ -673,12 +707,15 @@
         <c:auto val="1"/>
         <c:lblAlgn val="ctr"/>
         <c:lblOffset val="100"/>
+        <c:tickLblSkip val="2"/>
         <c:noMultiLvlLbl val="0"/>
       </c:catAx>
       <c:valAx>
         <c:axId val="-2100718248"/>
         <c:scaling>
           <c:orientation val="minMax"/>
+          <c:max val="40000.0"/>
+          <c:min val="0.0"/>
         </c:scaling>
         <c:delete val="0"/>
         <c:axPos val="l"/>
@@ -712,6 +749,7 @@
         <c:crossAx val="-2101159928"/>
         <c:crosses val="autoZero"/>
         <c:crossBetween val="midCat"/>
+        <c:majorUnit val="10000.0"/>
       </c:valAx>
     </c:plotArea>
     <c:plotVisOnly val="1"/>
@@ -734,6 +772,1022 @@
     <c:autoUpdate val="0"/>
   </c:externalData>
 </c:chartSpace>
+</file>
+
+<file path=ppt/charts/chart4.xml><?xml version="1.0" encoding="utf-8"?>
+<c:chartSpace xmlns:c="http://schemas.openxmlformats.org/drawingml/2006/chart" xmlns:a="http://schemas.openxmlformats.org/drawingml/2006/main" xmlns:r="http://schemas.openxmlformats.org/officeDocument/2006/relationships">
+  <c:date1904 val="0"/>
+  <c:roundedCorners val="0"/>
+  <c:chart>
+    <c:autoTitleDeleted val="1"/>
+    <c:plotArea>
+      <c:layout>
+        <c:manualLayout>
+          <c:layoutTarget val="inner"/>
+          <c:xMode val="edge"/>
+          <c:yMode val="edge"/>
+          <c:x val="0.11"/>
+          <c:y val="0.05"/>
+          <c:w val="0.86"/>
+          <c:h val="0.8"/>
+        </c:manualLayout>
+      </c:layout>
+      <c:areaChart>
+        <c:grouping val="standard"/>
+        <c:varyColors val="0"/>
+        <c:ser>
+          <c:idx val="0"/>
+          <c:order val="0"/>
+          <c:tx>
+            <c:strRef>
+              <c:f>Sheet1!$B$1</c:f>
+              <c:strCache>
+                <c:ptCount val="1"/>
+                <c:pt idx="0">
+                  <c:v>Raised $</c:v>
+                </c:pt>
+              </c:strCache>
+            </c:strRef>
+          </c:tx>
+          <c:spPr>
+            <a:solidFill>
+              <a:srgbClr val="0E9F6E">
+                <a:alpha val="25000"/>
+              </a:srgbClr>
+            </a:solidFill>
+            <a:ln w="31750">
+              <a:solidFill>
+                <a:srgbClr val="0E9F6E"/>
+              </a:solidFill>
+            </a:ln>
+          </c:spPr>
+          <c:cat>
+            <c:strRef>
+              <c:f>Sheet1!$A$2:$A$14</c:f>
+              <c:strCache>
+                <c:ptCount val="13"/>
+                <c:pt idx="0">
+                  <c:v>Oct 24</c:v>
+                </c:pt>
+                <c:pt idx="1">
+                  <c:v>Nov 24</c:v>
+                </c:pt>
+                <c:pt idx="2">
+                  <c:v>Dec 24</c:v>
+                </c:pt>
+                <c:pt idx="3">
+                  <c:v>Jan 25</c:v>
+                </c:pt>
+                <c:pt idx="4">
+                  <c:v>Feb 25</c:v>
+                </c:pt>
+                <c:pt idx="5">
+                  <c:v>Mar 25</c:v>
+                </c:pt>
+                <c:pt idx="6">
+                  <c:v>Apr 25</c:v>
+                </c:pt>
+                <c:pt idx="7">
+                  <c:v>May 25</c:v>
+                </c:pt>
+                <c:pt idx="8">
+                  <c:v>Jun 25</c:v>
+                </c:pt>
+                <c:pt idx="9">
+                  <c:v>Jul 25</c:v>
+                </c:pt>
+                <c:pt idx="10">
+                  <c:v>Aug 25</c:v>
+                </c:pt>
+                <c:pt idx="11">
+                  <c:v>Sep 25</c:v>
+                </c:pt>
+                <c:pt idx="12">
+                  <c:v>Oct 25</c:v>
+                </c:pt>
+              </c:strCache>
+            </c:strRef>
+          </c:cat>
+          <c:val>
+            <c:numRef>
+              <c:f>Sheet1!$B$2:$B$14</c:f>
+              <c:numCache>
+                <c:formatCode>$#,##0;[Red]($#,##0);"-"</c:formatCode>
+                <c:ptCount val="13"/>
+                <c:pt idx="0">
+                  <c:v>0</c:v>
+                </c:pt>
+                <c:pt idx="1">
+                  <c:v>0</c:v>
+                </c:pt>
+                <c:pt idx="2">
+                  <c:v>6200</c:v>
+                </c:pt>
+                <c:pt idx="3">
+                  <c:v>0</c:v>
+                </c:pt>
+                <c:pt idx="4">
+                  <c:v>0</c:v>
+                </c:pt>
+                <c:pt idx="5">
+                  <c:v>0</c:v>
+                </c:pt>
+                <c:pt idx="6">
+                  <c:v>0</c:v>
+                </c:pt>
+                <c:pt idx="7">
+                  <c:v>0</c:v>
+                </c:pt>
+                <c:pt idx="8">
+                  <c:v>0</c:v>
+                </c:pt>
+                <c:pt idx="9">
+                  <c:v>0</c:v>
+                </c:pt>
+                <c:pt idx="10">
+                  <c:v>0</c:v>
+                </c:pt>
+                <c:pt idx="11">
+                  <c:v>36800</c:v>
+                </c:pt>
+                <c:pt idx="12">
+                  <c:v>0</c:v>
+                </c:pt>
+              </c:numCache>
+            </c:numRef>
+          </c:val>
+        </c:ser>
+        <c:dLbls>
+          <c:showLegendKey val="0"/>
+          <c:showVal val="0"/>
+          <c:showCatName val="0"/>
+          <c:showSerName val="0"/>
+          <c:showPercent val="0"/>
+          <c:showBubbleSize val="0"/>
+        </c:dLbls>
+        <c:axId val="-2101159928"/>
+        <c:axId val="-2100718248"/>
+      </c:areaChart>
+      <c:catAx>
+        <c:axId val="-2101159928"/>
+        <c:scaling>
+          <c:orientation val="minMax"/>
+        </c:scaling>
+        <c:delete val="0"/>
+        <c:axPos val="b"/>
+        <c:numFmt formatCode="General" sourceLinked="1"/>
+        <c:majorTickMark val="out"/>
+        <c:minorTickMark val="none"/>
+        <c:tickLblPos val="nextTo"/>
+        <c:txPr>
+          <a:bodyPr/>
+          <a:lstStyle/>
+          <a:p>
+            <a:pPr>
+              <a:defRPr sz="1000"/>
+            </a:pPr>
+          </a:p>
+        </c:txPr>
+        <c:crossAx val="-2100718248"/>
+        <c:crosses val="autoZero"/>
+        <c:auto val="1"/>
+        <c:lblAlgn val="ctr"/>
+        <c:lblOffset val="100"/>
+        <c:tickLblSkip val="2"/>
+        <c:noMultiLvlLbl val="0"/>
+      </c:catAx>
+      <c:valAx>
+        <c:axId val="-2100718248"/>
+        <c:scaling>
+          <c:orientation val="minMax"/>
+          <c:max val="40000.0"/>
+          <c:min val="0.0"/>
+        </c:scaling>
+        <c:delete val="0"/>
+        <c:axPos val="l"/>
+        <c:majorGridlines>
+          <c:spPr>
+            <a:ln>
+              <a:solidFill>
+                <a:srgbClr val="E6EAE7"/>
+              </a:solidFill>
+            </a:ln>
+          </c:spPr>
+        </c:majorGridlines>
+        <c:numFmt formatCode="$#,##0;[Red]($#,##0);&quot;-&quot;" sourceLinked="0"/>
+        <c:majorTickMark val="out"/>
+        <c:minorTickMark val="none"/>
+        <c:tickLblPos val="nextTo"/>
+        <c:spPr>
+          <a:ln>
+            <a:noFill/>
+          </a:ln>
+        </c:spPr>
+        <c:txPr>
+          <a:bodyPr/>
+          <a:lstStyle/>
+          <a:p>
+            <a:pPr>
+              <a:defRPr sz="1000"/>
+            </a:pPr>
+          </a:p>
+        </c:txPr>
+        <c:crossAx val="-2101159928"/>
+        <c:crosses val="autoZero"/>
+        <c:crossBetween val="midCat"/>
+        <c:majorUnit val="10000.0"/>
+      </c:valAx>
+    </c:plotArea>
+    <c:plotVisOnly val="1"/>
+    <c:dispBlanksAs val="zero"/>
+    <c:showDLblsOverMax val="0"/>
+  </c:chart>
+  <c:txPr>
+    <a:bodyPr/>
+    <a:lstStyle/>
+    <a:p>
+      <a:pPr>
+        <a:defRPr sz="1800">
+          <a:latin typeface="Roboto"/>
+        </a:defRPr>
+      </a:pPr>
+      <a:endParaRPr/>
+    </a:p>
+  </c:txPr>
+  <c:externalData r:id="rId1">
+    <c:autoUpdate val="0"/>
+  </c:externalData>
+</c:chartSpace>
+</file>
+
+<file path=ppt/notesMasters/notesMaster1.xml><?xml version="1.0" encoding="utf-8"?>
+<p:notesMaster xmlns:a="http://schemas.openxmlformats.org/drawingml/2006/main" xmlns:p="http://schemas.openxmlformats.org/presentationml/2006/main" xmlns:r="http://schemas.openxmlformats.org/officeDocument/2006/relationships">
+  <p:cSld>
+    <p:bg>
+      <p:bgRef idx="1001">
+        <a:schemeClr val="bg1"/>
+      </p:bgRef>
+    </p:bg>
+    <p:spTree>
+      <p:nvGrpSpPr>
+        <p:cNvPr id="1" name=""/>
+        <p:cNvGrpSpPr/>
+        <p:nvPr/>
+      </p:nvGrpSpPr>
+      <p:grpSpPr>
+        <a:xfrm>
+          <a:off x="0" y="0"/>
+          <a:ext cx="0" cy="0"/>
+          <a:chOff x="0" y="0"/>
+          <a:chExt cx="0" cy="0"/>
+        </a:xfrm>
+      </p:grpSpPr>
+      <p:sp>
+        <p:nvSpPr>
+          <p:cNvPr id="2" name="Header Placeholder 1"/>
+          <p:cNvSpPr>
+            <a:spLocks noGrp="1"/>
+          </p:cNvSpPr>
+          <p:nvPr>
+            <p:ph type="hdr" sz="quarter"/>
+          </p:nvPr>
+        </p:nvSpPr>
+        <p:spPr>
+          <a:xfrm>
+            <a:off x="0" y="0"/>
+            <a:ext cx="2971800" cy="457200"/>
+          </a:xfrm>
+          <a:prstGeom prst="rect">
+            <a:avLst/>
+          </a:prstGeom>
+        </p:spPr>
+        <p:txBody>
+          <a:bodyPr vert="horz" lIns="91440" tIns="45720" rIns="91440" bIns="45720" rtlCol="0"/>
+          <a:lstStyle>
+            <a:lvl1pPr algn="l">
+              <a:defRPr sz="1200"/>
+            </a:lvl1pPr>
+          </a:lstStyle>
+          <a:p>
+            <a:endParaRPr lang="en-US"/>
+          </a:p>
+        </p:txBody>
+      </p:sp>
+      <p:sp>
+        <p:nvSpPr>
+          <p:cNvPr id="3" name="Date Placeholder 2"/>
+          <p:cNvSpPr>
+            <a:spLocks noGrp="1"/>
+          </p:cNvSpPr>
+          <p:nvPr>
+            <p:ph type="dt" idx="1"/>
+          </p:nvPr>
+        </p:nvSpPr>
+        <p:spPr>
+          <a:xfrm>
+            <a:off x="3884613" y="0"/>
+            <a:ext cx="2971800" cy="457200"/>
+          </a:xfrm>
+          <a:prstGeom prst="rect">
+            <a:avLst/>
+          </a:prstGeom>
+        </p:spPr>
+        <p:txBody>
+          <a:bodyPr vert="horz" lIns="91440" tIns="45720" rIns="91440" bIns="45720" rtlCol="0"/>
+          <a:lstStyle>
+            <a:lvl1pPr algn="r">
+              <a:defRPr sz="1200"/>
+            </a:lvl1pPr>
+          </a:lstStyle>
+          <a:p>
+            <a:fld id="{0F89C1C7-3DCD-1040-A9CF-14679D8B5DDD}" type="datetimeFigureOut">
+              <a:rPr lang="en-US" smtClean="0"/>
+              <a:t>10/17/16</a:t>
+            </a:fld>
+            <a:endParaRPr lang="en-US"/>
+          </a:p>
+        </p:txBody>
+      </p:sp>
+      <p:sp>
+        <p:nvSpPr>
+          <p:cNvPr id="4" name="Slide Image Placeholder 3"/>
+          <p:cNvSpPr>
+            <a:spLocks noGrp="1" noRot="1" noChangeAspect="1"/>
+          </p:cNvSpPr>
+          <p:nvPr>
+            <p:ph type="sldImg" idx="2"/>
+          </p:nvPr>
+        </p:nvSpPr>
+        <p:spPr>
+          <a:xfrm>
+            <a:off x="1143000" y="685800"/>
+            <a:ext cx="4572000" cy="3429000"/>
+          </a:xfrm>
+          <a:prstGeom prst="rect">
+            <a:avLst/>
+          </a:prstGeom>
+          <a:noFill/>
+          <a:ln w="12700">
+            <a:solidFill>
+              <a:prstClr val="black"/>
+            </a:solidFill>
+          </a:ln>
+        </p:spPr>
+        <p:txBody>
+          <a:bodyPr vert="horz" lIns="91440" tIns="45720" rIns="91440" bIns="45720" rtlCol="0" anchor="ctr"/>
+          <a:lstStyle/>
+          <a:p>
+            <a:endParaRPr lang="en-US"/>
+          </a:p>
+        </p:txBody>
+      </p:sp>
+      <p:sp>
+        <p:nvSpPr>
+          <p:cNvPr id="5" name="Notes Placeholder 4"/>
+          <p:cNvSpPr>
+            <a:spLocks noGrp="1"/>
+          </p:cNvSpPr>
+          <p:nvPr>
+            <p:ph type="body" sz="quarter" idx="3"/>
+          </p:nvPr>
+        </p:nvSpPr>
+        <p:spPr>
+          <a:xfrm>
+            <a:off x="685800" y="4343400"/>
+            <a:ext cx="5486400" cy="4114800"/>
+          </a:xfrm>
+          <a:prstGeom prst="rect">
+            <a:avLst/>
+          </a:prstGeom>
+        </p:spPr>
+        <p:txBody>
+          <a:bodyPr vert="horz" lIns="91440" tIns="45720" rIns="91440" bIns="45720" rtlCol="0"/>
+          <a:lstStyle/>
+          <a:p>
+            <a:pPr lvl="0"/>
+            <a:r>
+              <a:rPr lang="en-US" smtClean="0"/>
+              <a:t>Click to edit Master text styles</a:t>
+            </a:r>
+          </a:p>
+          <a:p>
+            <a:pPr lvl="1"/>
+            <a:r>
+              <a:rPr lang="en-US" smtClean="0"/>
+              <a:t>Second level</a:t>
+            </a:r>
+          </a:p>
+          <a:p>
+            <a:pPr lvl="2"/>
+            <a:r>
+              <a:rPr lang="en-US" smtClean="0"/>
+              <a:t>Third level</a:t>
+            </a:r>
+          </a:p>
+          <a:p>
+            <a:pPr lvl="3"/>
+            <a:r>
+              <a:rPr lang="en-US" smtClean="0"/>
+              <a:t>Fourth level</a:t>
+            </a:r>
+          </a:p>
+          <a:p>
+            <a:pPr lvl="4"/>
+            <a:r>
+              <a:rPr lang="en-US" smtClean="0"/>
+              <a:t>Fifth level</a:t>
+            </a:r>
+            <a:endParaRPr lang="en-US"/>
+          </a:p>
+        </p:txBody>
+      </p:sp>
+      <p:sp>
+        <p:nvSpPr>
+          <p:cNvPr id="6" name="Footer Placeholder 5"/>
+          <p:cNvSpPr>
+            <a:spLocks noGrp="1"/>
+          </p:cNvSpPr>
+          <p:nvPr>
+            <p:ph type="ftr" sz="quarter" idx="4"/>
+          </p:nvPr>
+        </p:nvSpPr>
+        <p:spPr>
+          <a:xfrm>
+            <a:off x="0" y="8685213"/>
+            <a:ext cx="2971800" cy="457200"/>
+          </a:xfrm>
+          <a:prstGeom prst="rect">
+            <a:avLst/>
+          </a:prstGeom>
+        </p:spPr>
+        <p:txBody>
+          <a:bodyPr vert="horz" lIns="91440" tIns="45720" rIns="91440" bIns="45720" rtlCol="0" anchor="b"/>
+          <a:lstStyle>
+            <a:lvl1pPr algn="l">
+              <a:defRPr sz="1200"/>
+            </a:lvl1pPr>
+          </a:lstStyle>
+          <a:p>
+            <a:endParaRPr lang="en-US"/>
+          </a:p>
+        </p:txBody>
+      </p:sp>
+      <p:sp>
+        <p:nvSpPr>
+          <p:cNvPr id="7" name="Slide Number Placeholder 6"/>
+          <p:cNvSpPr>
+            <a:spLocks noGrp="1"/>
+          </p:cNvSpPr>
+          <p:nvPr>
+            <p:ph type="sldNum" sz="quarter" idx="5"/>
+          </p:nvPr>
+        </p:nvSpPr>
+        <p:spPr>
+          <a:xfrm>
+            <a:off x="3884613" y="8685213"/>
+            <a:ext cx="2971800" cy="457200"/>
+          </a:xfrm>
+          <a:prstGeom prst="rect">
+            <a:avLst/>
+          </a:prstGeom>
+        </p:spPr>
+        <p:txBody>
+          <a:bodyPr vert="horz" lIns="91440" tIns="45720" rIns="91440" bIns="45720" rtlCol="0" anchor="b"/>
+          <a:lstStyle>
+            <a:lvl1pPr algn="r">
+              <a:defRPr sz="1200"/>
+            </a:lvl1pPr>
+          </a:lstStyle>
+          <a:p>
+            <a:fld id="{BB5E49A5-4136-284D-997B-48E1D791AD67}" type="slidenum">
+              <a:rPr lang="en-US" smtClean="0"/>
+              <a:t>‹#›</a:t>
+            </a:fld>
+            <a:endParaRPr lang="en-US"/>
+          </a:p>
+        </p:txBody>
+      </p:sp>
+    </p:spTree>
+    <p:extLst>
+      <p:ext uri="{BB962C8B-B14F-4D97-AF65-F5344CB8AC3E}">
+        <p14:creationId xmlns:p14="http://schemas.microsoft.com/office/powerpoint/2010/main" val="2623252185"/>
+      </p:ext>
+    </p:extLst>
+  </p:cSld>
+  <p:clrMap bg1="lt1" tx1="dk1" bg2="lt2" tx2="dk2" accent1="accent1" accent2="accent2" accent3="accent3" accent4="accent4" accent5="accent5" accent6="accent6" hlink="hlink" folHlink="folHlink"/>
+  <p:notesStyle>
+    <a:lvl1pPr marL="0" algn="l" defTabSz="457200" rtl="0" eaLnBrk="1" latinLnBrk="0" hangingPunct="1">
+      <a:defRPr sz="1200" kern="1200">
+        <a:solidFill>
+          <a:schemeClr val="tx1"/>
+        </a:solidFill>
+        <a:latin typeface="+mn-lt"/>
+        <a:ea typeface="+mn-ea"/>
+        <a:cs typeface="+mn-cs"/>
+      </a:defRPr>
+    </a:lvl1pPr>
+    <a:lvl2pPr marL="457200" algn="l" defTabSz="457200" rtl="0" eaLnBrk="1" latinLnBrk="0" hangingPunct="1">
+      <a:defRPr sz="1200" kern="1200">
+        <a:solidFill>
+          <a:schemeClr val="tx1"/>
+        </a:solidFill>
+        <a:latin typeface="+mn-lt"/>
+        <a:ea typeface="+mn-ea"/>
+        <a:cs typeface="+mn-cs"/>
+      </a:defRPr>
+    </a:lvl2pPr>
+    <a:lvl3pPr marL="914400" algn="l" defTabSz="457200" rtl="0" eaLnBrk="1" latinLnBrk="0" hangingPunct="1">
+      <a:defRPr sz="1200" kern="1200">
+        <a:solidFill>
+          <a:schemeClr val="tx1"/>
+        </a:solidFill>
+        <a:latin typeface="+mn-lt"/>
+        <a:ea typeface="+mn-ea"/>
+        <a:cs typeface="+mn-cs"/>
+      </a:defRPr>
+    </a:lvl3pPr>
+    <a:lvl4pPr marL="1371600" algn="l" defTabSz="457200" rtl="0" eaLnBrk="1" latinLnBrk="0" hangingPunct="1">
+      <a:defRPr sz="1200" kern="1200">
+        <a:solidFill>
+          <a:schemeClr val="tx1"/>
+        </a:solidFill>
+        <a:latin typeface="+mn-lt"/>
+        <a:ea typeface="+mn-ea"/>
+        <a:cs typeface="+mn-cs"/>
+      </a:defRPr>
+    </a:lvl4pPr>
+    <a:lvl5pPr marL="1828800" algn="l" defTabSz="457200" rtl="0" eaLnBrk="1" latinLnBrk="0" hangingPunct="1">
+      <a:defRPr sz="1200" kern="1200">
+        <a:solidFill>
+          <a:schemeClr val="tx1"/>
+        </a:solidFill>
+        <a:latin typeface="+mn-lt"/>
+        <a:ea typeface="+mn-ea"/>
+        <a:cs typeface="+mn-cs"/>
+      </a:defRPr>
+    </a:lvl5pPr>
+    <a:lvl6pPr marL="2286000" algn="l" defTabSz="457200" rtl="0" eaLnBrk="1" latinLnBrk="0" hangingPunct="1">
+      <a:defRPr sz="1200" kern="1200">
+        <a:solidFill>
+          <a:schemeClr val="tx1"/>
+        </a:solidFill>
+        <a:latin typeface="+mn-lt"/>
+        <a:ea typeface="+mn-ea"/>
+        <a:cs typeface="+mn-cs"/>
+      </a:defRPr>
+    </a:lvl6pPr>
+    <a:lvl7pPr marL="2743200" algn="l" defTabSz="457200" rtl="0" eaLnBrk="1" latinLnBrk="0" hangingPunct="1">
+      <a:defRPr sz="1200" kern="1200">
+        <a:solidFill>
+          <a:schemeClr val="tx1"/>
+        </a:solidFill>
+        <a:latin typeface="+mn-lt"/>
+        <a:ea typeface="+mn-ea"/>
+        <a:cs typeface="+mn-cs"/>
+      </a:defRPr>
+    </a:lvl7pPr>
+    <a:lvl8pPr marL="3200400" algn="l" defTabSz="457200" rtl="0" eaLnBrk="1" latinLnBrk="0" hangingPunct="1">
+      <a:defRPr sz="1200" kern="1200">
+        <a:solidFill>
+          <a:schemeClr val="tx1"/>
+        </a:solidFill>
+        <a:latin typeface="+mn-lt"/>
+        <a:ea typeface="+mn-ea"/>
+        <a:cs typeface="+mn-cs"/>
+      </a:defRPr>
+    </a:lvl8pPr>
+    <a:lvl9pPr marL="3657600" algn="l" defTabSz="457200" rtl="0" eaLnBrk="1" latinLnBrk="0" hangingPunct="1">
+      <a:defRPr sz="1200" kern="1200">
+        <a:solidFill>
+          <a:schemeClr val="tx1"/>
+        </a:solidFill>
+        <a:latin typeface="+mn-lt"/>
+        <a:ea typeface="+mn-ea"/>
+        <a:cs typeface="+mn-cs"/>
+      </a:defRPr>
+    </a:lvl9pPr>
+  </p:notesStyle>
+</p:notesMaster>
+</file>
+
+<file path=ppt/notesSlides/notesSlide1.xml><?xml version="1.0" encoding="utf-8"?>
+<p:notes xmlns:a="http://schemas.openxmlformats.org/drawingml/2006/main" xmlns:p="http://schemas.openxmlformats.org/presentationml/2006/main" xmlns:r="http://schemas.openxmlformats.org/officeDocument/2006/relationships">
+  <p:cSld>
+    <p:spTree>
+      <p:nvGrpSpPr>
+        <p:cNvPr id="1" name=""/>
+        <p:cNvGrpSpPr/>
+        <p:nvPr/>
+      </p:nvGrpSpPr>
+      <p:grpSpPr>
+        <a:xfrm>
+          <a:off x="0" y="0"/>
+          <a:ext cx="0" cy="0"/>
+          <a:chOff x="0" y="0"/>
+          <a:chExt cx="0" cy="0"/>
+        </a:xfrm>
+      </p:grpSpPr>
+      <p:sp>
+        <p:nvSpPr>
+          <p:cNvPr id="2" name="Slide Image Placeholder 1"/>
+          <p:cNvSpPr>
+            <a:spLocks noGrp="1"/>
+          </p:cNvSpPr>
+          <p:nvPr>
+            <p:ph type="sldImg" idx="2"/>
+          </p:nvPr>
+        </p:nvSpPr>
+        <p:spPr/>
+      </p:sp>
+      <p:sp>
+        <p:nvSpPr>
+          <p:cNvPr id="3" name="Notes Placeholder 2"/>
+          <p:cNvSpPr>
+            <a:spLocks noGrp="1"/>
+          </p:cNvSpPr>
+          <p:nvPr>
+            <p:ph type="body" idx="3" sz="quarter"/>
+          </p:nvPr>
+        </p:nvSpPr>
+        <p:spPr/>
+        <p:txBody>
+          <a:bodyPr/>
+          <a:lstStyle/>
+          <a:p>
+            <a:r>
+              <a:t>Which funding is worth chasing?. Sample Community Services Ltd. Period: October 2025. Each source of money compared on what it raises and what it costs to raise. Pick a source and every chart, table row and note follows it.</a:t>
+            </a:r>
+          </a:p>
+        </p:txBody>
+      </p:sp>
+      <p:sp>
+        <p:nvSpPr>
+          <p:cNvPr id="4" name="Slide Number Placeholder 3"/>
+          <p:cNvSpPr>
+            <a:spLocks noGrp="1"/>
+          </p:cNvSpPr>
+          <p:nvPr>
+            <p:ph type="sldNum" idx="5" sz="quarter"/>
+          </p:nvPr>
+        </p:nvSpPr>
+        <p:spPr/>
+      </p:sp>
+    </p:spTree>
+  </p:cSld>
+  <p:clrMapOvr>
+    <a:masterClrMapping/>
+  </p:clrMapOvr>
+</p:notes>
+</file>
+
+<file path=ppt/notesSlides/notesSlide2.xml><?xml version="1.0" encoding="utf-8"?>
+<p:notes xmlns:a="http://schemas.openxmlformats.org/drawingml/2006/main" xmlns:p="http://schemas.openxmlformats.org/presentationml/2006/main" xmlns:r="http://schemas.openxmlformats.org/officeDocument/2006/relationships">
+  <p:cSld>
+    <p:spTree>
+      <p:nvGrpSpPr>
+        <p:cNvPr id="1" name=""/>
+        <p:cNvGrpSpPr/>
+        <p:nvPr/>
+      </p:nvGrpSpPr>
+      <p:grpSpPr>
+        <a:xfrm>
+          <a:off x="0" y="0"/>
+          <a:ext cx="0" cy="0"/>
+          <a:chOff x="0" y="0"/>
+          <a:chExt cx="0" cy="0"/>
+        </a:xfrm>
+      </p:grpSpPr>
+      <p:sp>
+        <p:nvSpPr>
+          <p:cNvPr id="2" name="Slide Image Placeholder 1"/>
+          <p:cNvSpPr>
+            <a:spLocks noGrp="1"/>
+          </p:cNvSpPr>
+          <p:nvPr>
+            <p:ph type="sldImg" idx="2"/>
+          </p:nvPr>
+        </p:nvSpPr>
+        <p:spPr/>
+      </p:sp>
+      <p:sp>
+        <p:nvSpPr>
+          <p:cNvPr id="3" name="Notes Placeholder 2"/>
+          <p:cNvSpPr>
+            <a:spLocks noGrp="1"/>
+          </p:cNvSpPr>
+          <p:nvPr>
+            <p:ph type="body" idx="3" sz="quarter"/>
+          </p:nvPr>
+        </p:nvSpPr>
+        <p:spPr/>
+        <p:txBody>
+          <a:bodyPr/>
+          <a:lstStyle/>
+          <a:p>
+            <a:r>
+              <a:t>All sources. In October it cost: Grants 10¢, donations 14¢ to raise each dollar. Cheapest to raise in October: grants (10¢ a dollar). Dearest: donations (14¢). Events are worth counting for what else they bring too (new donors, profile).</a:t>
+            </a:r>
+          </a:p>
+        </p:txBody>
+      </p:sp>
+      <p:sp>
+        <p:nvSpPr>
+          <p:cNvPr id="4" name="Slide Number Placeholder 3"/>
+          <p:cNvSpPr>
+            <a:spLocks noGrp="1"/>
+          </p:cNvSpPr>
+          <p:nvPr>
+            <p:ph type="sldNum" idx="5" sz="quarter"/>
+          </p:nvPr>
+        </p:nvSpPr>
+        <p:spPr/>
+      </p:sp>
+    </p:spTree>
+  </p:cSld>
+  <p:clrMapOvr>
+    <a:masterClrMapping/>
+  </p:clrMapOvr>
+</p:notes>
+</file>
+
+<file path=ppt/notesSlides/notesSlide3.xml><?xml version="1.0" encoding="utf-8"?>
+<p:notes xmlns:a="http://schemas.openxmlformats.org/drawingml/2006/main" xmlns:p="http://schemas.openxmlformats.org/presentationml/2006/main" xmlns:r="http://schemas.openxmlformats.org/officeDocument/2006/relationships">
+  <p:cSld>
+    <p:spTree>
+      <p:nvGrpSpPr>
+        <p:cNvPr id="1" name=""/>
+        <p:cNvGrpSpPr/>
+        <p:nvPr/>
+      </p:nvGrpSpPr>
+      <p:grpSpPr>
+        <a:xfrm>
+          <a:off x="0" y="0"/>
+          <a:ext cx="0" cy="0"/>
+          <a:chOff x="0" y="0"/>
+          <a:chExt cx="0" cy="0"/>
+        </a:xfrm>
+      </p:grpSpPr>
+      <p:sp>
+        <p:nvSpPr>
+          <p:cNvPr id="2" name="Slide Image Placeholder 1"/>
+          <p:cNvSpPr>
+            <a:spLocks noGrp="1"/>
+          </p:cNvSpPr>
+          <p:nvPr>
+            <p:ph type="sldImg" idx="2"/>
+          </p:nvPr>
+        </p:nvSpPr>
+        <p:spPr/>
+      </p:sp>
+      <p:sp>
+        <p:nvSpPr>
+          <p:cNvPr id="3" name="Notes Placeholder 2"/>
+          <p:cNvSpPr>
+            <a:spLocks noGrp="1"/>
+          </p:cNvSpPr>
+          <p:nvPr>
+            <p:ph type="body" idx="3" sz="quarter"/>
+          </p:nvPr>
+        </p:nvSpPr>
+        <p:spPr/>
+        <p:txBody>
+          <a:bodyPr/>
+          <a:lstStyle/>
+          <a:p>
+            <a:r>
+              <a:t>Grants. Grants: $251,929 raised this financial year to date (71.9% of everything raised), $28,400 to raise it, so $223,529 left for programs: 11¢ per dollar. Most of the money, and usually the cheapest to raise, starting with grants that renew.</a:t>
+            </a:r>
+          </a:p>
+        </p:txBody>
+      </p:sp>
+      <p:sp>
+        <p:nvSpPr>
+          <p:cNvPr id="4" name="Slide Number Placeholder 3"/>
+          <p:cNvSpPr>
+            <a:spLocks noGrp="1"/>
+          </p:cNvSpPr>
+          <p:nvPr>
+            <p:ph type="sldNum" idx="5" sz="quarter"/>
+          </p:nvPr>
+        </p:nvSpPr>
+        <p:spPr/>
+      </p:sp>
+    </p:spTree>
+  </p:cSld>
+  <p:clrMapOvr>
+    <a:masterClrMapping/>
+  </p:clrMapOvr>
+</p:notes>
+</file>
+
+<file path=ppt/notesSlides/notesSlide4.xml><?xml version="1.0" encoding="utf-8"?>
+<p:notes xmlns:a="http://schemas.openxmlformats.org/drawingml/2006/main" xmlns:p="http://schemas.openxmlformats.org/presentationml/2006/main" xmlns:r="http://schemas.openxmlformats.org/officeDocument/2006/relationships">
+  <p:cSld>
+    <p:spTree>
+      <p:nvGrpSpPr>
+        <p:cNvPr id="1" name=""/>
+        <p:cNvGrpSpPr/>
+        <p:nvPr/>
+      </p:nvGrpSpPr>
+      <p:grpSpPr>
+        <a:xfrm>
+          <a:off x="0" y="0"/>
+          <a:ext cx="0" cy="0"/>
+          <a:chOff x="0" y="0"/>
+          <a:chExt cx="0" cy="0"/>
+        </a:xfrm>
+      </p:grpSpPr>
+      <p:sp>
+        <p:nvSpPr>
+          <p:cNvPr id="2" name="Slide Image Placeholder 1"/>
+          <p:cNvSpPr>
+            <a:spLocks noGrp="1"/>
+          </p:cNvSpPr>
+          <p:nvPr>
+            <p:ph type="sldImg" idx="2"/>
+          </p:nvPr>
+        </p:nvSpPr>
+        <p:spPr/>
+      </p:sp>
+      <p:sp>
+        <p:nvSpPr>
+          <p:cNvPr id="3" name="Notes Placeholder 2"/>
+          <p:cNvSpPr>
+            <a:spLocks noGrp="1"/>
+          </p:cNvSpPr>
+          <p:nvPr>
+            <p:ph type="body" idx="3" sz="quarter"/>
+          </p:nvPr>
+        </p:nvSpPr>
+        <p:spPr/>
+        <p:txBody>
+          <a:bodyPr/>
+          <a:lstStyle/>
+          <a:p>
+            <a:r>
+              <a:t>Donations. Donations: $61,800 raised this financial year to date (17.6% of everything raised), $8,800 to raise it, so $53,000 left for programs: 14¢ per dollar. Cheap and flexible (untied): the money that builds reserves.</a:t>
+            </a:r>
+          </a:p>
+        </p:txBody>
+      </p:sp>
+      <p:sp>
+        <p:nvSpPr>
+          <p:cNvPr id="4" name="Slide Number Placeholder 3"/>
+          <p:cNvSpPr>
+            <a:spLocks noGrp="1"/>
+          </p:cNvSpPr>
+          <p:nvPr>
+            <p:ph type="sldNum" idx="5" sz="quarter"/>
+          </p:nvPr>
+        </p:nvSpPr>
+        <p:spPr/>
+      </p:sp>
+    </p:spTree>
+  </p:cSld>
+  <p:clrMapOvr>
+    <a:masterClrMapping/>
+  </p:clrMapOvr>
+</p:notes>
+</file>
+
+<file path=ppt/notesSlides/notesSlide5.xml><?xml version="1.0" encoding="utf-8"?>
+<p:notes xmlns:a="http://schemas.openxmlformats.org/drawingml/2006/main" xmlns:p="http://schemas.openxmlformats.org/presentationml/2006/main" xmlns:r="http://schemas.openxmlformats.org/officeDocument/2006/relationships">
+  <p:cSld>
+    <p:spTree>
+      <p:nvGrpSpPr>
+        <p:cNvPr id="1" name=""/>
+        <p:cNvGrpSpPr/>
+        <p:nvPr/>
+      </p:nvGrpSpPr>
+      <p:grpSpPr>
+        <a:xfrm>
+          <a:off x="0" y="0"/>
+          <a:ext cx="0" cy="0"/>
+          <a:chOff x="0" y="0"/>
+          <a:chExt cx="0" cy="0"/>
+        </a:xfrm>
+      </p:grpSpPr>
+      <p:sp>
+        <p:nvSpPr>
+          <p:cNvPr id="2" name="Slide Image Placeholder 1"/>
+          <p:cNvSpPr>
+            <a:spLocks noGrp="1"/>
+          </p:cNvSpPr>
+          <p:nvPr>
+            <p:ph type="sldImg" idx="2"/>
+          </p:nvPr>
+        </p:nvSpPr>
+        <p:spPr/>
+      </p:sp>
+      <p:sp>
+        <p:nvSpPr>
+          <p:cNvPr id="3" name="Notes Placeholder 2"/>
+          <p:cNvSpPr>
+            <a:spLocks noGrp="1"/>
+          </p:cNvSpPr>
+          <p:nvPr>
+            <p:ph type="body" idx="3" sz="quarter"/>
+          </p:nvPr>
+        </p:nvSpPr>
+        <p:spPr/>
+        <p:txBody>
+          <a:bodyPr/>
+          <a:lstStyle/>
+          <a:p>
+            <a:r>
+              <a:t>Fundraising events. Fundraising events: $36,800 raised this financial year to date (10.5% of everything raised), $15,200 to raise it, so $21,600 left for programs: 41¢ per dollar. The dearest per dollar: worth measuring the new donors each event brings in too.</a:t>
+            </a:r>
+          </a:p>
+        </p:txBody>
+      </p:sp>
+      <p:sp>
+        <p:nvSpPr>
+          <p:cNvPr id="4" name="Slide Number Placeholder 3"/>
+          <p:cNvSpPr>
+            <a:spLocks noGrp="1"/>
+          </p:cNvSpPr>
+          <p:nvPr>
+            <p:ph type="sldNum" idx="5" sz="quarter"/>
+          </p:nvPr>
+        </p:nvSpPr>
+        <p:spPr/>
+      </p:sp>
+    </p:spTree>
+  </p:cSld>
+  <p:clrMapOvr>
+    <a:masterClrMapping/>
+  </p:clrMapOvr>
+</p:notes>
+</file>
+
+<file path=ppt/notesSlides/notesSlide6.xml><?xml version="1.0" encoding="utf-8"?>
+<p:notes xmlns:a="http://schemas.openxmlformats.org/drawingml/2006/main" xmlns:p="http://schemas.openxmlformats.org/presentationml/2006/main" xmlns:r="http://schemas.openxmlformats.org/officeDocument/2006/relationships">
+  <p:cSld>
+    <p:spTree>
+      <p:nvGrpSpPr>
+        <p:cNvPr id="1" name=""/>
+        <p:cNvGrpSpPr/>
+        <p:nvPr/>
+      </p:nvGrpSpPr>
+      <p:grpSpPr>
+        <a:xfrm>
+          <a:off x="0" y="0"/>
+          <a:ext cx="0" cy="0"/>
+          <a:chOff x="0" y="0"/>
+          <a:chExt cx="0" cy="0"/>
+        </a:xfrm>
+      </p:grpSpPr>
+      <p:sp>
+        <p:nvSpPr>
+          <p:cNvPr id="2" name="Slide Image Placeholder 1"/>
+          <p:cNvSpPr>
+            <a:spLocks noGrp="1"/>
+          </p:cNvSpPr>
+          <p:nvPr>
+            <p:ph type="sldImg" idx="2"/>
+          </p:nvPr>
+        </p:nvSpPr>
+        <p:spPr/>
+      </p:sp>
+      <p:sp>
+        <p:nvSpPr>
+          <p:cNvPr id="3" name="Notes Placeholder 2"/>
+          <p:cNvSpPr>
+            <a:spLocks noGrp="1"/>
+          </p:cNvSpPr>
+          <p:nvPr>
+            <p:ph type="body" idx="3" sz="quarter"/>
+          </p:nvPr>
+        </p:nvSpPr>
+        <p:spPr/>
+        <p:txBody>
+          <a:bodyPr/>
+          <a:lstStyle/>
+          <a:p>
+            <a:r>
+              <a:t>Financial year to date (Jul to Oct 2025), by source</a:t>
+            </a:r>
+          </a:p>
+        </p:txBody>
+      </p:sp>
+      <p:sp>
+        <p:nvSpPr>
+          <p:cNvPr id="4" name="Slide Number Placeholder 3"/>
+          <p:cNvSpPr>
+            <a:spLocks noGrp="1"/>
+          </p:cNvSpPr>
+          <p:nvPr>
+            <p:ph type="sldNum" idx="5" sz="quarter"/>
+          </p:nvPr>
+        </p:nvSpPr>
+        <p:spPr/>
+      </p:sp>
+    </p:spTree>
+  </p:cSld>
+  <p:clrMapOvr>
+    <a:masterClrMapping/>
+  </p:clrMapOvr>
+</p:notes>
 </file>
 
 <file path=ppt/slideLayouts/slideLayout1.xml><?xml version="1.0" encoding="utf-8"?>
@@ -3719,7 +4773,44 @@
       <p:grpSpPr/>
       <p:sp>
         <p:nvSpPr>
-          <p:cNvPr id="2" name="Rectangle 1"/>
+          <p:cNvPr id="2" name="Title 1"/>
+          <p:cNvSpPr>
+            <a:spLocks noGrp="1"/>
+          </p:cNvSpPr>
+          <p:nvPr>
+            <p:ph type="ctrTitle"/>
+          </p:nvPr>
+        </p:nvSpPr>
+        <p:spPr>
+          <a:xfrm>
+            <a:off x="457200" y="1965960"/>
+            <a:ext cx="11277295" cy="1097280"/>
+          </a:xfrm>
+        </p:spPr>
+        <p:txBody>
+          <a:bodyPr wrap="square"/>
+          <a:lstStyle/>
+          <a:p>
+            <a:pPr algn="l">
+              <a:defRPr>
+                <a:latin typeface="Roboto"/>
+              </a:defRPr>
+            </a:pPr>
+            <a:r>
+              <a:rPr sz="3400" b="1">
+                <a:solidFill>
+                  <a:srgbClr val="25342A"/>
+                </a:solidFill>
+                <a:latin typeface="Roboto"/>
+              </a:rPr>
+              <a:t>Which funding is worth chasing?</a:t>
+            </a:r>
+          </a:p>
+        </p:txBody>
+      </p:sp>
+      <p:sp>
+        <p:nvSpPr>
+          <p:cNvPr id="3" name="Rectangle 2"/>
           <p:cNvSpPr/>
           <p:nvPr/>
         </p:nvSpPr>
@@ -3775,7 +4866,7 @@
       </p:sp>
       <p:sp>
         <p:nvSpPr>
-          <p:cNvPr id="3" name="TextBox 2"/>
+          <p:cNvPr id="4" name="TextBox 3"/>
           <p:cNvSpPr txBox="1"/>
           <p:nvPr/>
         </p:nvSpPr>
@@ -3790,7 +4881,7 @@
           <a:noFill/>
         </p:spPr>
         <p:txBody>
-          <a:bodyPr wrap="square">
+          <a:bodyPr wrap="square" lIns="45720" rIns="45720">
             <a:spAutoFit/>
           </a:bodyPr>
           <a:lstStyle/>
@@ -3814,7 +4905,7 @@
       </p:sp>
       <p:sp>
         <p:nvSpPr>
-          <p:cNvPr id="4" name="TextBox 3"/>
+          <p:cNvPr id="5" name="TextBox 4"/>
           <p:cNvSpPr txBox="1"/>
           <p:nvPr/>
         </p:nvSpPr>
@@ -3829,7 +4920,7 @@
           <a:noFill/>
         </p:spPr>
         <p:txBody>
-          <a:bodyPr wrap="square">
+          <a:bodyPr wrap="square" lIns="45720" rIns="45720">
             <a:spAutoFit/>
           </a:bodyPr>
           <a:lstStyle/>
@@ -3853,14 +4944,14 @@
       </p:sp>
       <p:sp>
         <p:nvSpPr>
-          <p:cNvPr id="5" name="TextBox 4"/>
+          <p:cNvPr id="6" name="TextBox 5"/>
           <p:cNvSpPr txBox="1"/>
           <p:nvPr/>
         </p:nvSpPr>
         <p:spPr>
           <a:xfrm>
-            <a:off x="457200" y="2011680"/>
-            <a:ext cx="11247120" cy="1097280"/>
+            <a:off x="457200" y="3154680"/>
+            <a:ext cx="11277295" cy="457200"/>
           </a:xfrm>
           <a:prstGeom prst="rect">
             <a:avLst/>
@@ -3868,7 +4959,7 @@
           <a:noFill/>
         </p:spPr>
         <p:txBody>
-          <a:bodyPr wrap="square">
+          <a:bodyPr wrap="square" lIns="45720" rIns="45720">
             <a:spAutoFit/>
           </a:bodyPr>
           <a:lstStyle/>
@@ -3879,27 +4970,27 @@
               </a:defRPr>
             </a:pPr>
             <a:r>
-              <a:rPr sz="3400" b="1">
+              <a:rPr sz="1600" b="0">
                 <a:solidFill>
-                  <a:srgbClr val="25342A"/>
+                  <a:srgbClr val="5F6F63"/>
                 </a:solidFill>
                 <a:latin typeface="Roboto"/>
               </a:rPr>
-              <a:t>Which funding is worth chasing?</a:t>
-            </a:r>
-          </a:p>
-        </p:txBody>
-      </p:sp>
-      <p:sp>
-        <p:nvSpPr>
-          <p:cNvPr id="6" name="TextBox 5"/>
+              <a:t>Sample Community Services Ltd</a:t>
+            </a:r>
+          </a:p>
+        </p:txBody>
+      </p:sp>
+      <p:sp>
+        <p:nvSpPr>
+          <p:cNvPr id="7" name="TextBox 6"/>
           <p:cNvSpPr txBox="1"/>
           <p:nvPr/>
         </p:nvSpPr>
         <p:spPr>
           <a:xfrm>
-            <a:off x="457200" y="3154680"/>
-            <a:ext cx="11247120" cy="457200"/>
+            <a:off x="457200" y="3703320"/>
+            <a:ext cx="11277295" cy="535940"/>
           </a:xfrm>
           <a:prstGeom prst="rect">
             <a:avLst/>
@@ -3907,7 +4998,7 @@
           <a:noFill/>
         </p:spPr>
         <p:txBody>
-          <a:bodyPr wrap="square">
+          <a:bodyPr wrap="square" lIns="45720" rIns="45720">
             <a:spAutoFit/>
           </a:bodyPr>
           <a:lstStyle/>
@@ -3918,27 +5009,27 @@
               </a:defRPr>
             </a:pPr>
             <a:r>
-              <a:rPr sz="1600" b="0">
+              <a:rPr sz="1400" b="0">
                 <a:solidFill>
-                  <a:srgbClr val="5F6F63"/>
+                  <a:srgbClr val="25342A"/>
                 </a:solidFill>
                 <a:latin typeface="Roboto"/>
               </a:rPr>
-              <a:t>Sample Community Services Ltd</a:t>
-            </a:r>
-          </a:p>
-        </p:txBody>
-      </p:sp>
-      <p:sp>
-        <p:nvSpPr>
-          <p:cNvPr id="7" name="TextBox 6"/>
+              <a:t>Period: October 2025. Each source of money compared on what it raises and what it costs to raise. Pick a source and every chart, table row and note follows it.</a:t>
+            </a:r>
+          </a:p>
+        </p:txBody>
+      </p:sp>
+      <p:sp>
+        <p:nvSpPr>
+          <p:cNvPr id="8" name="TextBox 7"/>
           <p:cNvSpPr txBox="1"/>
           <p:nvPr/>
         </p:nvSpPr>
         <p:spPr>
           <a:xfrm>
-            <a:off x="457200" y="3703320"/>
-            <a:ext cx="11247120" cy="1097280"/>
+            <a:off x="457200" y="4330700"/>
+            <a:ext cx="11277295" cy="1097280"/>
           </a:xfrm>
           <a:prstGeom prst="rect">
             <a:avLst/>
@@ -3946,7 +5037,7 @@
           <a:noFill/>
         </p:spPr>
         <p:txBody>
-          <a:bodyPr wrap="square">
+          <a:bodyPr wrap="square" lIns="45720" rIns="45720">
             <a:spAutoFit/>
           </a:bodyPr>
           <a:lstStyle/>
@@ -3957,27 +5048,75 @@
               </a:defRPr>
             </a:pPr>
             <a:r>
-              <a:rPr sz="1400" b="0">
+              <a:rPr sz="1100" b="0">
                 <a:solidFill>
-                  <a:srgbClr val="25342A"/>
+                  <a:srgbClr val="5F6F63"/>
                 </a:solidFill>
                 <a:latin typeface="Roboto"/>
               </a:rPr>
-              <a:t>Period: October 2025. Each source of money compared on what it raises and what it costs to raise. Pick a source and every chart, table row and note follows it.</a:t>
-            </a:r>
-          </a:p>
-        </p:txBody>
-      </p:sp>
-      <p:sp>
-        <p:nvSpPr>
-          <p:cNvPr id="8" name="TextBox 7"/>
+              <a:t>How final is this data?</a:t>
+            </a:r>
+          </a:p>
+          <a:p>
+            <a:pPr>
+              <a:defRPr>
+                <a:latin typeface="Roboto"/>
+              </a:defRPr>
+            </a:pPr>
+            <a:r>
+              <a:rPr sz="1100" b="0">
+                <a:solidFill>
+                  <a:srgbClr val="5F6F63"/>
+                </a:solidFill>
+                <a:latin typeface="Roboto"/>
+              </a:rPr>
+              <a:t>September 2025: Locked. September 2025 is locked (closed 2 Oct 2025). These numbers won't change.</a:t>
+            </a:r>
+          </a:p>
+          <a:p>
+            <a:pPr>
+              <a:defRPr>
+                <a:latin typeface="Roboto"/>
+              </a:defRPr>
+            </a:pPr>
+            <a:r>
+              <a:rPr sz="1100" b="0">
+                <a:solidFill>
+                  <a:srgbClr val="5F6F63"/>
+                </a:solidFill>
+                <a:latin typeface="Roboto"/>
+              </a:rPr>
+              <a:t>October 2025: Locked. October 2025 is locked (closed 4 Nov 2025). These numbers won't change.</a:t>
+            </a:r>
+          </a:p>
+          <a:p>
+            <a:pPr>
+              <a:defRPr>
+                <a:latin typeface="Roboto"/>
+              </a:defRPr>
+            </a:pPr>
+            <a:r>
+              <a:rPr sz="1100" b="0">
+                <a:solidFill>
+                  <a:srgbClr val="5F6F63"/>
+                </a:solidFill>
+                <a:latin typeface="Roboto"/>
+              </a:rPr>
+              <a:t>October 2026: Incomplete. October 2026 is still in progress: figures to 6 Oct only.</a:t>
+            </a:r>
+          </a:p>
+        </p:txBody>
+      </p:sp>
+      <p:sp>
+        <p:nvSpPr>
+          <p:cNvPr id="9" name="TextBox 8"/>
           <p:cNvSpPr txBox="1"/>
           <p:nvPr/>
         </p:nvSpPr>
         <p:spPr>
           <a:xfrm>
-            <a:off x="457200" y="4937760"/>
-            <a:ext cx="11247120" cy="1097280"/>
+            <a:off x="457200" y="6492240"/>
+            <a:ext cx="2926080" cy="274320"/>
           </a:xfrm>
           <a:prstGeom prst="rect">
             <a:avLst/>
@@ -3985,7 +5124,7 @@
           <a:noFill/>
         </p:spPr>
         <p:txBody>
-          <a:bodyPr wrap="square">
+          <a:bodyPr wrap="square" lIns="45720" rIns="45720">
             <a:spAutoFit/>
           </a:bodyPr>
           <a:lstStyle/>
@@ -3996,75 +5135,27 @@
               </a:defRPr>
             </a:pPr>
             <a:r>
-              <a:rPr sz="1100" b="0">
+              <a:rPr sz="900" b="0">
                 <a:solidFill>
                   <a:srgbClr val="5F6F63"/>
                 </a:solidFill>
                 <a:latin typeface="Roboto"/>
               </a:rPr>
-              <a:t>How final is this data?</a:t>
-            </a:r>
-          </a:p>
-          <a:p>
-            <a:pPr>
-              <a:defRPr>
-                <a:latin typeface="Roboto"/>
-              </a:defRPr>
-            </a:pPr>
-            <a:r>
-              <a:rPr sz="1100" b="0">
-                <a:solidFill>
-                  <a:srgbClr val="5F6F63"/>
-                </a:solidFill>
-                <a:latin typeface="Roboto"/>
-              </a:rPr>
-              <a:t>September 2025: Locked. September 2025 is locked (closed 2 Oct 2025). These numbers won't change.</a:t>
-            </a:r>
-          </a:p>
-          <a:p>
-            <a:pPr>
-              <a:defRPr>
-                <a:latin typeface="Roboto"/>
-              </a:defRPr>
-            </a:pPr>
-            <a:r>
-              <a:rPr sz="1100" b="0">
-                <a:solidFill>
-                  <a:srgbClr val="5F6F63"/>
-                </a:solidFill>
-                <a:latin typeface="Roboto"/>
-              </a:rPr>
-              <a:t>October 2025: Locked. October 2025 is locked (closed 4 Nov 2025). These numbers won't change.</a:t>
-            </a:r>
-          </a:p>
-          <a:p>
-            <a:pPr>
-              <a:defRPr>
-                <a:latin typeface="Roboto"/>
-              </a:defRPr>
-            </a:pPr>
-            <a:r>
-              <a:rPr sz="1100" b="0">
-                <a:solidFill>
-                  <a:srgbClr val="5F6F63"/>
-                </a:solidFill>
-                <a:latin typeface="Roboto"/>
-              </a:rPr>
-              <a:t>October 2026: Incomplete. October 2026 is still in progress: figures to 6 Oct only.</a:t>
-            </a:r>
-          </a:p>
-        </p:txBody>
-      </p:sp>
-      <p:sp>
-        <p:nvSpPr>
-          <p:cNvPr id="9" name="TextBox 8"/>
+              <a:t>funding.pptx</a:t>
+            </a:r>
+          </a:p>
+        </p:txBody>
+      </p:sp>
+      <p:sp>
+        <p:nvSpPr>
+          <p:cNvPr id="10" name="TextBox 9"/>
           <p:cNvSpPr txBox="1"/>
           <p:nvPr/>
         </p:nvSpPr>
         <p:spPr>
           <a:xfrm>
-            <a:off x="457200" y="6492240"/>
-            <a:ext cx="3657600" cy="274320"/>
+            <a:off x="3108960" y="6492240"/>
+            <a:ext cx="5943600" cy="274320"/>
           </a:xfrm>
           <a:prstGeom prst="rect">
             <a:avLst/>
@@ -4072,12 +5163,12 @@
           <a:noFill/>
         </p:spPr>
         <p:txBody>
-          <a:bodyPr wrap="square">
+          <a:bodyPr wrap="square" lIns="45720" rIns="45720">
             <a:spAutoFit/>
           </a:bodyPr>
           <a:lstStyle/>
           <a:p>
-            <a:pPr>
+            <a:pPr algn="ctr">
               <a:defRPr>
                 <a:latin typeface="Roboto"/>
               </a:defRPr>
@@ -4089,21 +5180,21 @@
                 </a:solidFill>
                 <a:latin typeface="Roboto"/>
               </a:rPr>
-              <a:t>funding.pptx</a:t>
-            </a:r>
-          </a:p>
-        </p:txBody>
-      </p:sp>
-      <p:sp>
-        <p:nvSpPr>
-          <p:cNvPr id="10" name="TextBox 9"/>
+              <a:t>Data retrieved 2pm, Tue 6 Oct 2026 · Generated 8 Oct 2026, 9:35am · Sample data · Made with Python (python-pptx)</a:t>
+            </a:r>
+          </a:p>
+        </p:txBody>
+      </p:sp>
+      <p:sp>
+        <p:nvSpPr>
+          <p:cNvPr id="11" name="TextBox 10"/>
           <p:cNvSpPr txBox="1"/>
           <p:nvPr/>
         </p:nvSpPr>
         <p:spPr>
           <a:xfrm>
-            <a:off x="4297680" y="6492240"/>
-            <a:ext cx="3657600" cy="274320"/>
+            <a:off x="8503920" y="6492240"/>
+            <a:ext cx="3200400" cy="274320"/>
           </a:xfrm>
           <a:prstGeom prst="rect">
             <a:avLst/>
@@ -4111,12 +5202,12 @@
           <a:noFill/>
         </p:spPr>
         <p:txBody>
-          <a:bodyPr wrap="square">
+          <a:bodyPr wrap="square" lIns="45720" rIns="45720">
             <a:spAutoFit/>
           </a:bodyPr>
           <a:lstStyle/>
           <a:p>
-            <a:pPr algn="ctr">
+            <a:pPr algn="r">
               <a:defRPr>
                 <a:latin typeface="Roboto"/>
               </a:defRPr>
@@ -4128,363 +5219,7 @@
                 </a:solidFill>
                 <a:latin typeface="Roboto"/>
               </a:rPr>
-              <a:t>Data retrieved 2pm, Tue 6 Oct 2026 · Sample data</a:t>
-            </a:r>
-          </a:p>
-        </p:txBody>
-      </p:sp>
-      <p:sp>
-        <p:nvSpPr>
-          <p:cNvPr id="11" name="TextBox 10"/>
-          <p:cNvSpPr txBox="1"/>
-          <p:nvPr/>
-        </p:nvSpPr>
-        <p:spPr>
-          <a:xfrm>
-            <a:off x="8503920" y="6492240"/>
-            <a:ext cx="3200400" cy="274320"/>
-          </a:xfrm>
-          <a:prstGeom prst="rect">
-            <a:avLst/>
-          </a:prstGeom>
-          <a:noFill/>
-        </p:spPr>
-        <p:txBody>
-          <a:bodyPr wrap="square">
-            <a:spAutoFit/>
-          </a:bodyPr>
-          <a:lstStyle/>
-          <a:p>
-            <a:pPr algn="r">
-              <a:defRPr>
-                <a:latin typeface="Roboto"/>
-              </a:defRPr>
-            </a:pPr>
-            <a:r>
-              <a:rPr sz="900" b="0">
-                <a:solidFill>
-                  <a:srgbClr val="5F6F63"/>
-                </a:solidFill>
-                <a:latin typeface="Roboto"/>
-              </a:rPr>
-              <a:t>Slide 1 of 10</a:t>
-            </a:r>
-          </a:p>
-        </p:txBody>
-      </p:sp>
-    </p:spTree>
-  </p:cSld>
-  <p:clrMapOvr>
-    <a:masterClrMapping/>
-  </p:clrMapOvr>
-</p:sld>
-</file>
-
-<file path=ppt/slides/slide10.xml><?xml version="1.0" encoding="utf-8"?>
-<p:sld xmlns:a="http://schemas.openxmlformats.org/drawingml/2006/main" xmlns:p="http://schemas.openxmlformats.org/presentationml/2006/main" xmlns:r="http://schemas.openxmlformats.org/officeDocument/2006/relationships">
-  <p:cSld>
-    <p:spTree>
-      <p:nvGrpSpPr>
-        <p:cNvPr id="1" name=""/>
-        <p:cNvGrpSpPr/>
-        <p:nvPr/>
-      </p:nvGrpSpPr>
-      <p:grpSpPr/>
-      <p:sp>
-        <p:nvSpPr>
-          <p:cNvPr id="2" name="Rectangle 1"/>
-          <p:cNvSpPr/>
-          <p:nvPr/>
-        </p:nvSpPr>
-        <p:spPr>
-          <a:xfrm>
-            <a:off x="0" y="0"/>
-            <a:ext cx="12191695" cy="73152"/>
-          </a:xfrm>
-          <a:prstGeom prst="rect">
-            <a:avLst/>
-          </a:prstGeom>
-          <a:solidFill>
-            <a:srgbClr val="2F7A5D"/>
-          </a:solidFill>
-          <a:ln>
-            <a:noFill/>
-          </a:ln>
-        </p:spPr>
-        <p:style>
-          <a:lnRef idx="1">
-            <a:schemeClr val="accent1"/>
-          </a:lnRef>
-          <a:fillRef idx="3">
-            <a:schemeClr val="accent1"/>
-          </a:fillRef>
-          <a:effectRef idx="2">
-            <a:schemeClr val="accent1"/>
-          </a:effectRef>
-          <a:fontRef idx="minor">
-            <a:schemeClr val="lt1"/>
-          </a:fontRef>
-        </p:style>
-        <p:txBody>
-          <a:bodyPr rtlCol="0" anchor="ctr"/>
-          <a:lstStyle/>
-          <a:p>
-            <a:pPr algn="ctr">
-              <a:defRPr>
-                <a:latin typeface="Roboto"/>
-              </a:defRPr>
-            </a:pPr>
-          </a:p>
-        </p:txBody>
-      </p:sp>
-      <p:sp>
-        <p:nvSpPr>
-          <p:cNvPr id="3" name="TextBox 2"/>
-          <p:cNvSpPr txBox="1"/>
-          <p:nvPr/>
-        </p:nvSpPr>
-        <p:spPr>
-          <a:xfrm>
-            <a:off x="457200" y="164592"/>
-            <a:ext cx="7315200" cy="274320"/>
-          </a:xfrm>
-          <a:prstGeom prst="rect">
-            <a:avLst/>
-          </a:prstGeom>
-          <a:noFill/>
-        </p:spPr>
-        <p:txBody>
-          <a:bodyPr wrap="square">
-            <a:spAutoFit/>
-          </a:bodyPr>
-          <a:lstStyle/>
-          <a:p>
-            <a:pPr>
-              <a:defRPr>
-                <a:latin typeface="Roboto"/>
-              </a:defRPr>
-            </a:pPr>
-            <a:r>
-              <a:rPr sz="1000" b="0">
-                <a:solidFill>
-                  <a:srgbClr val="5F6F63"/>
-                </a:solidFill>
-                <a:latin typeface="Roboto"/>
-              </a:rPr>
-              <a:t>Sample Community Services Ltd · Which funding is worth chasing?</a:t>
-            </a:r>
-          </a:p>
-        </p:txBody>
-      </p:sp>
-      <p:sp>
-        <p:nvSpPr>
-          <p:cNvPr id="4" name="TextBox 3"/>
-          <p:cNvSpPr txBox="1"/>
-          <p:nvPr/>
-        </p:nvSpPr>
-        <p:spPr>
-          <a:xfrm>
-            <a:off x="457200" y="411480"/>
-            <a:ext cx="11247120" cy="548640"/>
-          </a:xfrm>
-          <a:prstGeom prst="rect">
-            <a:avLst/>
-          </a:prstGeom>
-          <a:noFill/>
-        </p:spPr>
-        <p:txBody>
-          <a:bodyPr wrap="square">
-            <a:spAutoFit/>
-          </a:bodyPr>
-          <a:lstStyle/>
-          <a:p>
-            <a:pPr>
-              <a:defRPr>
-                <a:latin typeface="Roboto"/>
-              </a:defRPr>
-            </a:pPr>
-            <a:r>
-              <a:rPr sz="2400" b="1">
-                <a:solidFill>
-                  <a:srgbClr val="25342A"/>
-                </a:solidFill>
-                <a:latin typeface="Roboto"/>
-              </a:rPr>
-              <a:t>Raised and left after costs, by month · Left after costs $ · Every source at once</a:t>
-            </a:r>
-          </a:p>
-        </p:txBody>
-      </p:sp>
-      <p:sp>
-        <p:nvSpPr>
-          <p:cNvPr id="5" name="TextBox 4"/>
-          <p:cNvSpPr txBox="1"/>
-          <p:nvPr/>
-        </p:nvSpPr>
-        <p:spPr>
-          <a:xfrm>
-            <a:off x="457200" y="960120"/>
-            <a:ext cx="11247120" cy="457200"/>
-          </a:xfrm>
-          <a:prstGeom prst="rect">
-            <a:avLst/>
-          </a:prstGeom>
-          <a:noFill/>
-        </p:spPr>
-        <p:txBody>
-          <a:bodyPr wrap="square">
-            <a:spAutoFit/>
-          </a:bodyPr>
-          <a:lstStyle/>
-          <a:p>
-            <a:pPr>
-              <a:defRPr>
-                <a:latin typeface="Roboto"/>
-              </a:defRPr>
-            </a:pPr>
-            <a:r>
-              <a:rPr sz="1200" b="0">
-                <a:solidFill>
-                  <a:srgbClr val="5F6F63"/>
-                </a:solidFill>
-                <a:latin typeface="Roboto"/>
-              </a:rPr>
-              <a:t>Tap a month for its workings.</a:t>
-            </a:r>
-          </a:p>
-        </p:txBody>
-      </p:sp>
-      <p:graphicFrame>
-        <p:nvGraphicFramePr>
-          <p:cNvPr id="6" name="Chart 5"/>
-          <p:cNvGraphicFramePr>
-            <a:graphicFrameLocks noGrp="1"/>
-          </p:cNvGraphicFramePr>
-          <p:nvPr/>
-        </p:nvGraphicFramePr>
-        <p:xfrm>
-          <a:off x="457200" y="1463040"/>
-          <a:ext cx="11247120" cy="4754880"/>
-        </p:xfrm>
-        <a:graphic>
-          <a:graphicData uri="http://schemas.openxmlformats.org/drawingml/2006/chart">
-            <c:chart xmlns:c="http://schemas.openxmlformats.org/drawingml/2006/chart" r:id="rId2"/>
-          </a:graphicData>
-        </a:graphic>
-      </p:graphicFrame>
-      <p:sp>
-        <p:nvSpPr>
-          <p:cNvPr id="7" name="TextBox 6"/>
-          <p:cNvSpPr txBox="1"/>
-          <p:nvPr/>
-        </p:nvSpPr>
-        <p:spPr>
-          <a:xfrm>
-            <a:off x="457200" y="6492240"/>
-            <a:ext cx="3657600" cy="274320"/>
-          </a:xfrm>
-          <a:prstGeom prst="rect">
-            <a:avLst/>
-          </a:prstGeom>
-          <a:noFill/>
-        </p:spPr>
-        <p:txBody>
-          <a:bodyPr wrap="square">
-            <a:spAutoFit/>
-          </a:bodyPr>
-          <a:lstStyle/>
-          <a:p>
-            <a:pPr>
-              <a:defRPr>
-                <a:latin typeface="Roboto"/>
-              </a:defRPr>
-            </a:pPr>
-            <a:r>
-              <a:rPr sz="900" b="0">
-                <a:solidFill>
-                  <a:srgbClr val="5F6F63"/>
-                </a:solidFill>
-                <a:latin typeface="Roboto"/>
-              </a:rPr>
-              <a:t>funding.pptx</a:t>
-            </a:r>
-          </a:p>
-        </p:txBody>
-      </p:sp>
-      <p:sp>
-        <p:nvSpPr>
-          <p:cNvPr id="8" name="TextBox 7"/>
-          <p:cNvSpPr txBox="1"/>
-          <p:nvPr/>
-        </p:nvSpPr>
-        <p:spPr>
-          <a:xfrm>
-            <a:off x="4297680" y="6492240"/>
-            <a:ext cx="3657600" cy="274320"/>
-          </a:xfrm>
-          <a:prstGeom prst="rect">
-            <a:avLst/>
-          </a:prstGeom>
-          <a:noFill/>
-        </p:spPr>
-        <p:txBody>
-          <a:bodyPr wrap="square">
-            <a:spAutoFit/>
-          </a:bodyPr>
-          <a:lstStyle/>
-          <a:p>
-            <a:pPr algn="ctr">
-              <a:defRPr>
-                <a:latin typeface="Roboto"/>
-              </a:defRPr>
-            </a:pPr>
-            <a:r>
-              <a:rPr sz="900" b="0">
-                <a:solidFill>
-                  <a:srgbClr val="5F6F63"/>
-                </a:solidFill>
-                <a:latin typeface="Roboto"/>
-              </a:rPr>
-              <a:t>Data retrieved 2pm, Tue 6 Oct 2026 · Sample data</a:t>
-            </a:r>
-          </a:p>
-        </p:txBody>
-      </p:sp>
-      <p:sp>
-        <p:nvSpPr>
-          <p:cNvPr id="9" name="TextBox 8"/>
-          <p:cNvSpPr txBox="1"/>
-          <p:nvPr/>
-        </p:nvSpPr>
-        <p:spPr>
-          <a:xfrm>
-            <a:off x="8503920" y="6492240"/>
-            <a:ext cx="3200400" cy="274320"/>
-          </a:xfrm>
-          <a:prstGeom prst="rect">
-            <a:avLst/>
-          </a:prstGeom>
-          <a:noFill/>
-        </p:spPr>
-        <p:txBody>
-          <a:bodyPr wrap="square">
-            <a:spAutoFit/>
-          </a:bodyPr>
-          <a:lstStyle/>
-          <a:p>
-            <a:pPr algn="r">
-              <a:defRPr>
-                <a:latin typeface="Roboto"/>
-              </a:defRPr>
-            </a:pPr>
-            <a:r>
-              <a:rPr sz="900" b="0">
-                <a:solidFill>
-                  <a:srgbClr val="5F6F63"/>
-                </a:solidFill>
-                <a:latin typeface="Roboto"/>
-              </a:rPr>
-              <a:t>Slide 10 of 10</a:t>
+              <a:t>Slide 1 of 6</a:t>
             </a:r>
           </a:p>
         </p:txBody>
@@ -4509,7 +5244,44 @@
       <p:grpSpPr/>
       <p:sp>
         <p:nvSpPr>
-          <p:cNvPr id="2" name="Rectangle 1"/>
+          <p:cNvPr id="2" name="Title 1"/>
+          <p:cNvSpPr>
+            <a:spLocks noGrp="1"/>
+          </p:cNvSpPr>
+          <p:nvPr>
+            <p:ph type="title"/>
+          </p:nvPr>
+        </p:nvSpPr>
+        <p:spPr>
+          <a:xfrm>
+            <a:off x="457200" y="384048"/>
+            <a:ext cx="11277295" cy="475488"/>
+          </a:xfrm>
+        </p:spPr>
+        <p:txBody>
+          <a:bodyPr wrap="square" lIns="45720" rIns="45720" tIns="0" bIns="0" anchor="t"/>
+          <a:lstStyle/>
+          <a:p>
+            <a:pPr algn="l">
+              <a:defRPr>
+                <a:latin typeface="Roboto"/>
+              </a:defRPr>
+            </a:pPr>
+            <a:r>
+              <a:rPr sz="2400" b="1">
+                <a:solidFill>
+                  <a:srgbClr val="25342A"/>
+                </a:solidFill>
+                <a:latin typeface="Roboto"/>
+              </a:rPr>
+              <a:t>All sources</a:t>
+            </a:r>
+          </a:p>
+        </p:txBody>
+      </p:sp>
+      <p:sp>
+        <p:nvSpPr>
+          <p:cNvPr id="3" name="Rectangle 2"/>
           <p:cNvSpPr/>
           <p:nvPr/>
         </p:nvSpPr>
@@ -4556,14 +5328,14 @@
       </p:sp>
       <p:sp>
         <p:nvSpPr>
-          <p:cNvPr id="3" name="TextBox 2"/>
+          <p:cNvPr id="4" name="TextBox 3"/>
           <p:cNvSpPr txBox="1"/>
           <p:nvPr/>
         </p:nvSpPr>
         <p:spPr>
           <a:xfrm>
-            <a:off x="457200" y="164592"/>
-            <a:ext cx="7315200" cy="274320"/>
+            <a:off x="457200" y="146304"/>
+            <a:ext cx="8229600" cy="256032"/>
           </a:xfrm>
           <a:prstGeom prst="rect">
             <a:avLst/>
@@ -4571,7 +5343,7 @@
           <a:noFill/>
         </p:spPr>
         <p:txBody>
-          <a:bodyPr wrap="square">
+          <a:bodyPr wrap="square" lIns="45720" rIns="45720">
             <a:spAutoFit/>
           </a:bodyPr>
           <a:lstStyle/>
@@ -4595,14 +5367,14 @@
       </p:sp>
       <p:sp>
         <p:nvSpPr>
-          <p:cNvPr id="4" name="TextBox 3"/>
+          <p:cNvPr id="5" name="TextBox 4"/>
           <p:cNvSpPr txBox="1"/>
           <p:nvPr/>
         </p:nvSpPr>
         <p:spPr>
           <a:xfrm>
-            <a:off x="457200" y="411480"/>
-            <a:ext cx="11247120" cy="548640"/>
+            <a:off x="457200" y="914400"/>
+            <a:ext cx="11277295" cy="263652"/>
           </a:xfrm>
           <a:prstGeom prst="rect">
             <a:avLst/>
@@ -4610,7 +5382,7 @@
           <a:noFill/>
         </p:spPr>
         <p:txBody>
-          <a:bodyPr wrap="square">
+          <a:bodyPr wrap="square" lIns="45720" rIns="45720">
             <a:spAutoFit/>
           </a:bodyPr>
           <a:lstStyle/>
@@ -4621,45 +5393,94 @@
               </a:defRPr>
             </a:pPr>
             <a:r>
-              <a:rPr sz="2400" b="1">
+              <a:rPr sz="1200" b="0">
                 <a:solidFill>
-                  <a:srgbClr val="25342A"/>
+                  <a:srgbClr val="5F6F63"/>
                 </a:solidFill>
                 <a:latin typeface="Roboto"/>
               </a:rPr>
-              <a:t>Cost to raise a dollar, by source, October 2025 (cents) · Source: All sources</a:t>
+              <a:t>Cost to raise a dollar, by source, October 2025 (cents)</a:t>
             </a:r>
           </a:p>
         </p:txBody>
       </p:sp>
       <p:graphicFrame>
         <p:nvGraphicFramePr>
-          <p:cNvPr id="5" name="Chart 4"/>
+          <p:cNvPr id="6" name="Chart 5"/>
           <p:cNvGraphicFramePr>
             <a:graphicFrameLocks noGrp="1"/>
           </p:cNvGraphicFramePr>
           <p:nvPr/>
         </p:nvGraphicFramePr>
         <p:xfrm>
-          <a:off x="457200" y="1188720"/>
-          <a:ext cx="11247120" cy="5029200"/>
+          <a:off x="457200" y="1278636"/>
+          <a:ext cx="11277295" cy="1499616"/>
         </p:xfrm>
         <a:graphic>
           <a:graphicData uri="http://schemas.openxmlformats.org/drawingml/2006/chart">
-            <c:chart xmlns:c="http://schemas.openxmlformats.org/drawingml/2006/chart" r:id="rId2"/>
+            <c:chart xmlns:c="http://schemas.openxmlformats.org/drawingml/2006/chart" r:id="rId3"/>
           </a:graphicData>
         </a:graphic>
       </p:graphicFrame>
       <p:sp>
         <p:nvSpPr>
-          <p:cNvPr id="6" name="TextBox 5"/>
+          <p:cNvPr id="7" name="Rectangle 6"/>
+          <p:cNvSpPr/>
+          <p:nvPr/>
+        </p:nvSpPr>
+        <p:spPr>
+          <a:xfrm>
+            <a:off x="457200" y="2869692"/>
+            <a:ext cx="5501487" cy="1097280"/>
+          </a:xfrm>
+          <a:prstGeom prst="rect">
+            <a:avLst/>
+          </a:prstGeom>
+          <a:solidFill>
+            <a:srgbClr val="FFFFFF"/>
+          </a:solidFill>
+          <a:ln>
+            <a:solidFill>
+              <a:srgbClr val="DCE8DC"/>
+            </a:solidFill>
+          </a:ln>
+        </p:spPr>
+        <p:style>
+          <a:lnRef idx="1">
+            <a:schemeClr val="accent1"/>
+          </a:lnRef>
+          <a:fillRef idx="3">
+            <a:schemeClr val="accent1"/>
+          </a:fillRef>
+          <a:effectRef idx="2">
+            <a:schemeClr val="accent1"/>
+          </a:effectRef>
+          <a:fontRef idx="minor">
+            <a:schemeClr val="lt1"/>
+          </a:fontRef>
+        </p:style>
+        <p:txBody>
+          <a:bodyPr rtlCol="0" anchor="ctr"/>
+          <a:lstStyle/>
+          <a:p>
+            <a:pPr algn="ctr">
+              <a:defRPr>
+                <a:latin typeface="Roboto"/>
+              </a:defRPr>
+            </a:pPr>
+          </a:p>
+        </p:txBody>
+      </p:sp>
+      <p:sp>
+        <p:nvSpPr>
+          <p:cNvPr id="8" name="TextBox 7"/>
           <p:cNvSpPr txBox="1"/>
           <p:nvPr/>
         </p:nvSpPr>
         <p:spPr>
           <a:xfrm>
-            <a:off x="457200" y="6492240"/>
-            <a:ext cx="3657600" cy="274320"/>
+            <a:off x="594360" y="2924556"/>
+            <a:ext cx="5227167" cy="274320"/>
           </a:xfrm>
           <a:prstGeom prst="rect">
             <a:avLst/>
@@ -4667,7 +5488,212 @@
           <a:noFill/>
         </p:spPr>
         <p:txBody>
-          <a:bodyPr wrap="square">
+          <a:bodyPr wrap="square" lIns="45720" rIns="45720">
+            <a:spAutoFit/>
+          </a:bodyPr>
+          <a:lstStyle/>
+          <a:p>
+            <a:pPr>
+              <a:defRPr>
+                <a:latin typeface="Roboto"/>
+              </a:defRPr>
+            </a:pPr>
+            <a:r>
+              <a:rPr sz="1000" b="1">
+                <a:solidFill>
+                  <a:srgbClr val="5F6F63"/>
+                </a:solidFill>
+                <a:latin typeface="Roboto"/>
+              </a:rPr>
+              <a:t>WHAT IT SHOWS</a:t>
+            </a:r>
+          </a:p>
+        </p:txBody>
+      </p:sp>
+      <p:sp>
+        <p:nvSpPr>
+          <p:cNvPr id="9" name="TextBox 8"/>
+          <p:cNvSpPr txBox="1"/>
+          <p:nvPr/>
+        </p:nvSpPr>
+        <p:spPr>
+          <a:xfrm>
+            <a:off x="594360" y="3198876"/>
+            <a:ext cx="5227167" cy="731520"/>
+          </a:xfrm>
+          <a:prstGeom prst="rect">
+            <a:avLst/>
+          </a:prstGeom>
+          <a:noFill/>
+        </p:spPr>
+        <p:txBody>
+          <a:bodyPr wrap="square" lIns="45720" rIns="45720">
+            <a:spAutoFit/>
+          </a:bodyPr>
+          <a:lstStyle/>
+          <a:p>
+            <a:pPr>
+              <a:defRPr>
+                <a:latin typeface="Roboto"/>
+              </a:defRPr>
+            </a:pPr>
+            <a:r>
+              <a:rPr sz="1200" b="0">
+                <a:solidFill>
+                  <a:srgbClr val="25342A"/>
+                </a:solidFill>
+                <a:latin typeface="Roboto"/>
+              </a:rPr>
+              <a:t>In October it cost: Grants 10¢, donations 14¢ to raise each dollar.</a:t>
+            </a:r>
+          </a:p>
+        </p:txBody>
+      </p:sp>
+      <p:sp>
+        <p:nvSpPr>
+          <p:cNvPr id="10" name="Rectangle 9"/>
+          <p:cNvSpPr/>
+          <p:nvPr/>
+        </p:nvSpPr>
+        <p:spPr>
+          <a:xfrm>
+            <a:off x="6233007" y="2869692"/>
+            <a:ext cx="5501487" cy="1097280"/>
+          </a:xfrm>
+          <a:prstGeom prst="rect">
+            <a:avLst/>
+          </a:prstGeom>
+          <a:solidFill>
+            <a:srgbClr val="EEF5F0"/>
+          </a:solidFill>
+          <a:ln>
+            <a:solidFill>
+              <a:srgbClr val="DCE8DC"/>
+            </a:solidFill>
+          </a:ln>
+        </p:spPr>
+        <p:style>
+          <a:lnRef idx="1">
+            <a:schemeClr val="accent1"/>
+          </a:lnRef>
+          <a:fillRef idx="3">
+            <a:schemeClr val="accent1"/>
+          </a:fillRef>
+          <a:effectRef idx="2">
+            <a:schemeClr val="accent1"/>
+          </a:effectRef>
+          <a:fontRef idx="minor">
+            <a:schemeClr val="lt1"/>
+          </a:fontRef>
+        </p:style>
+        <p:txBody>
+          <a:bodyPr rtlCol="0" anchor="ctr"/>
+          <a:lstStyle/>
+          <a:p>
+            <a:pPr algn="ctr">
+              <a:defRPr>
+                <a:latin typeface="Roboto"/>
+              </a:defRPr>
+            </a:pPr>
+          </a:p>
+        </p:txBody>
+      </p:sp>
+      <p:sp>
+        <p:nvSpPr>
+          <p:cNvPr id="11" name="TextBox 10"/>
+          <p:cNvSpPr txBox="1"/>
+          <p:nvPr/>
+        </p:nvSpPr>
+        <p:spPr>
+          <a:xfrm>
+            <a:off x="6370167" y="2924556"/>
+            <a:ext cx="5227167" cy="274320"/>
+          </a:xfrm>
+          <a:prstGeom prst="rect">
+            <a:avLst/>
+          </a:prstGeom>
+          <a:noFill/>
+        </p:spPr>
+        <p:txBody>
+          <a:bodyPr wrap="square" lIns="45720" rIns="45720">
+            <a:spAutoFit/>
+          </a:bodyPr>
+          <a:lstStyle/>
+          <a:p>
+            <a:pPr>
+              <a:defRPr>
+                <a:latin typeface="Roboto"/>
+              </a:defRPr>
+            </a:pPr>
+            <a:r>
+              <a:rPr sz="1000" b="1">
+                <a:solidFill>
+                  <a:srgbClr val="5F6F63"/>
+                </a:solidFill>
+                <a:latin typeface="Roboto"/>
+              </a:rPr>
+              <a:t>WHAT YOU'D DO ABOUT IT</a:t>
+            </a:r>
+          </a:p>
+        </p:txBody>
+      </p:sp>
+      <p:sp>
+        <p:nvSpPr>
+          <p:cNvPr id="12" name="TextBox 11"/>
+          <p:cNvSpPr txBox="1"/>
+          <p:nvPr/>
+        </p:nvSpPr>
+        <p:spPr>
+          <a:xfrm>
+            <a:off x="6370167" y="3198876"/>
+            <a:ext cx="5227167" cy="731520"/>
+          </a:xfrm>
+          <a:prstGeom prst="rect">
+            <a:avLst/>
+          </a:prstGeom>
+          <a:noFill/>
+        </p:spPr>
+        <p:txBody>
+          <a:bodyPr wrap="square" lIns="45720" rIns="45720">
+            <a:spAutoFit/>
+          </a:bodyPr>
+          <a:lstStyle/>
+          <a:p>
+            <a:pPr>
+              <a:defRPr>
+                <a:latin typeface="Roboto"/>
+              </a:defRPr>
+            </a:pPr>
+            <a:r>
+              <a:rPr sz="1200" b="0">
+                <a:solidFill>
+                  <a:srgbClr val="25342A"/>
+                </a:solidFill>
+                <a:latin typeface="Roboto"/>
+              </a:rPr>
+              <a:t>Cheapest to raise in October: grants (10¢ a dollar). Dearest: donations (14¢). Events are worth counting for what else they bring too (new donors, profile).</a:t>
+            </a:r>
+          </a:p>
+        </p:txBody>
+      </p:sp>
+      <p:sp>
+        <p:nvSpPr>
+          <p:cNvPr id="13" name="TextBox 12"/>
+          <p:cNvSpPr txBox="1"/>
+          <p:nvPr/>
+        </p:nvSpPr>
+        <p:spPr>
+          <a:xfrm>
+            <a:off x="457200" y="6492240"/>
+            <a:ext cx="2926080" cy="274320"/>
+          </a:xfrm>
+          <a:prstGeom prst="rect">
+            <a:avLst/>
+          </a:prstGeom>
+          <a:noFill/>
+        </p:spPr>
+        <p:txBody>
+          <a:bodyPr wrap="square" lIns="45720" rIns="45720">
             <a:spAutoFit/>
           </a:bodyPr>
           <a:lstStyle/>
@@ -4691,14 +5717,14 @@
       </p:sp>
       <p:sp>
         <p:nvSpPr>
-          <p:cNvPr id="7" name="TextBox 6"/>
+          <p:cNvPr id="14" name="TextBox 13"/>
           <p:cNvSpPr txBox="1"/>
           <p:nvPr/>
         </p:nvSpPr>
         <p:spPr>
           <a:xfrm>
-            <a:off x="4297680" y="6492240"/>
-            <a:ext cx="3657600" cy="274320"/>
+            <a:off x="3108960" y="6492240"/>
+            <a:ext cx="5943600" cy="274320"/>
           </a:xfrm>
           <a:prstGeom prst="rect">
             <a:avLst/>
@@ -4706,7 +5732,7 @@
           <a:noFill/>
         </p:spPr>
         <p:txBody>
-          <a:bodyPr wrap="square">
+          <a:bodyPr wrap="square" lIns="45720" rIns="45720">
             <a:spAutoFit/>
           </a:bodyPr>
           <a:lstStyle/>
@@ -4723,14 +5749,14 @@
                 </a:solidFill>
                 <a:latin typeface="Roboto"/>
               </a:rPr>
-              <a:t>Data retrieved 2pm, Tue 6 Oct 2026 · Sample data</a:t>
-            </a:r>
-          </a:p>
-        </p:txBody>
-      </p:sp>
-      <p:sp>
-        <p:nvSpPr>
-          <p:cNvPr id="8" name="TextBox 7"/>
+              <a:t>Data retrieved 2pm, Tue 6 Oct 2026 · Generated 8 Oct 2026, 9:35am · Sample data · Made with Python (python-pptx)</a:t>
+            </a:r>
+          </a:p>
+        </p:txBody>
+      </p:sp>
+      <p:sp>
+        <p:nvSpPr>
+          <p:cNvPr id="15" name="TextBox 14"/>
           <p:cNvSpPr txBox="1"/>
           <p:nvPr/>
         </p:nvSpPr>
@@ -4745,7 +5771,7 @@
           <a:noFill/>
         </p:spPr>
         <p:txBody>
-          <a:bodyPr wrap="square">
+          <a:bodyPr wrap="square" lIns="45720" rIns="45720">
             <a:spAutoFit/>
           </a:bodyPr>
           <a:lstStyle/>
@@ -4762,7 +5788,7 @@
                 </a:solidFill>
                 <a:latin typeface="Roboto"/>
               </a:rPr>
-              <a:t>Slide 2 of 10</a:t>
+              <a:t>Slide 2 of 6</a:t>
             </a:r>
           </a:p>
         </p:txBody>
@@ -4787,7 +5813,44 @@
       <p:grpSpPr/>
       <p:sp>
         <p:nvSpPr>
-          <p:cNvPr id="2" name="Rectangle 1"/>
+          <p:cNvPr id="2" name="Title 1"/>
+          <p:cNvSpPr>
+            <a:spLocks noGrp="1"/>
+          </p:cNvSpPr>
+          <p:nvPr>
+            <p:ph type="title"/>
+          </p:nvPr>
+        </p:nvSpPr>
+        <p:spPr>
+          <a:xfrm>
+            <a:off x="457200" y="384048"/>
+            <a:ext cx="11277295" cy="475488"/>
+          </a:xfrm>
+        </p:spPr>
+        <p:txBody>
+          <a:bodyPr wrap="square" lIns="45720" rIns="45720" tIns="0" bIns="0" anchor="t"/>
+          <a:lstStyle/>
+          <a:p>
+            <a:pPr algn="l">
+              <a:defRPr>
+                <a:latin typeface="Roboto"/>
+              </a:defRPr>
+            </a:pPr>
+            <a:r>
+              <a:rPr sz="2400" b="1">
+                <a:solidFill>
+                  <a:srgbClr val="25342A"/>
+                </a:solidFill>
+                <a:latin typeface="Roboto"/>
+              </a:rPr>
+              <a:t>Grants</a:t>
+            </a:r>
+          </a:p>
+        </p:txBody>
+      </p:sp>
+      <p:sp>
+        <p:nvSpPr>
+          <p:cNvPr id="3" name="Rectangle 2"/>
           <p:cNvSpPr/>
           <p:nvPr/>
         </p:nvSpPr>
@@ -4834,14 +5897,14 @@
       </p:sp>
       <p:sp>
         <p:nvSpPr>
-          <p:cNvPr id="3" name="TextBox 2"/>
+          <p:cNvPr id="4" name="TextBox 3"/>
           <p:cNvSpPr txBox="1"/>
           <p:nvPr/>
         </p:nvSpPr>
         <p:spPr>
           <a:xfrm>
-            <a:off x="457200" y="164592"/>
-            <a:ext cx="7315200" cy="274320"/>
+            <a:off x="457200" y="146304"/>
+            <a:ext cx="8229600" cy="256032"/>
           </a:xfrm>
           <a:prstGeom prst="rect">
             <a:avLst/>
@@ -4849,7 +5912,7 @@
           <a:noFill/>
         </p:spPr>
         <p:txBody>
-          <a:bodyPr wrap="square">
+          <a:bodyPr wrap="square" lIns="45720" rIns="45720">
             <a:spAutoFit/>
           </a:bodyPr>
           <a:lstStyle/>
@@ -4873,14 +5936,14 @@
       </p:sp>
       <p:sp>
         <p:nvSpPr>
-          <p:cNvPr id="4" name="TextBox 3"/>
+          <p:cNvPr id="5" name="TextBox 4"/>
           <p:cNvSpPr txBox="1"/>
           <p:nvPr/>
         </p:nvSpPr>
         <p:spPr>
           <a:xfrm>
-            <a:off x="457200" y="411480"/>
-            <a:ext cx="11247120" cy="548640"/>
+            <a:off x="457200" y="914400"/>
+            <a:ext cx="11277295" cy="263652"/>
           </a:xfrm>
           <a:prstGeom prst="rect">
             <a:avLst/>
@@ -4888,7 +5951,7 @@
           <a:noFill/>
         </p:spPr>
         <p:txBody>
-          <a:bodyPr wrap="square">
+          <a:bodyPr wrap="square" lIns="45720" rIns="45720">
             <a:spAutoFit/>
           </a:bodyPr>
           <a:lstStyle/>
@@ -4899,27 +5962,45 @@
               </a:defRPr>
             </a:pPr>
             <a:r>
-              <a:rPr sz="2400" b="1">
+              <a:rPr sz="1200" b="0">
                 <a:solidFill>
-                  <a:srgbClr val="25342A"/>
+                  <a:srgbClr val="5F6F63"/>
                 </a:solidFill>
                 <a:latin typeface="Roboto"/>
               </a:rPr>
-              <a:t>What it shows · Source: All sources</a:t>
-            </a:r>
-          </a:p>
-        </p:txBody>
-      </p:sp>
-      <p:sp>
-        <p:nvSpPr>
-          <p:cNvPr id="5" name="Rectangle 4"/>
+              <a:t>Raised and left after costs, by month · Grants</a:t>
+            </a:r>
+          </a:p>
+        </p:txBody>
+      </p:sp>
+      <p:graphicFrame>
+        <p:nvGraphicFramePr>
+          <p:cNvPr id="6" name="Chart 5"/>
+          <p:cNvGraphicFramePr>
+            <a:graphicFrameLocks noGrp="1"/>
+          </p:cNvGraphicFramePr>
+          <p:nvPr/>
+        </p:nvGraphicFramePr>
+        <p:xfrm>
+          <a:off x="457200" y="1278636"/>
+          <a:ext cx="11277295" cy="3842004"/>
+        </p:xfrm>
+        <a:graphic>
+          <a:graphicData uri="http://schemas.openxmlformats.org/drawingml/2006/chart">
+            <c:chart xmlns:c="http://schemas.openxmlformats.org/drawingml/2006/chart" r:id="rId3"/>
+          </a:graphicData>
+        </a:graphic>
+      </p:graphicFrame>
+      <p:sp>
+        <p:nvSpPr>
+          <p:cNvPr id="7" name="Rectangle 6"/>
           <p:cNvSpPr/>
           <p:nvPr/>
         </p:nvSpPr>
         <p:spPr>
           <a:xfrm>
-            <a:off x="457200" y="1554480"/>
-            <a:ext cx="5501487" cy="4389120"/>
+            <a:off x="457200" y="5212080"/>
+            <a:ext cx="5501487" cy="1097280"/>
           </a:xfrm>
           <a:prstGeom prst="rect">
             <a:avLst/>
@@ -4961,14 +6042,14 @@
       </p:sp>
       <p:sp>
         <p:nvSpPr>
-          <p:cNvPr id="6" name="TextBox 5"/>
+          <p:cNvPr id="8" name="TextBox 7"/>
           <p:cNvSpPr txBox="1"/>
           <p:nvPr/>
         </p:nvSpPr>
         <p:spPr>
           <a:xfrm>
-            <a:off x="685800" y="1691640"/>
-            <a:ext cx="5044287" cy="365760"/>
+            <a:off x="594360" y="5266944"/>
+            <a:ext cx="5227167" cy="274320"/>
           </a:xfrm>
           <a:prstGeom prst="rect">
             <a:avLst/>
@@ -4976,7 +6057,7 @@
           <a:noFill/>
         </p:spPr>
         <p:txBody>
-          <a:bodyPr wrap="square">
+          <a:bodyPr wrap="square" lIns="45720" rIns="45720">
             <a:spAutoFit/>
           </a:bodyPr>
           <a:lstStyle/>
@@ -4987,7 +6068,7 @@
               </a:defRPr>
             </a:pPr>
             <a:r>
-              <a:rPr sz="1100" b="1">
+              <a:rPr sz="1000" b="1">
                 <a:solidFill>
                   <a:srgbClr val="5F6F63"/>
                 </a:solidFill>
@@ -5000,14 +6081,14 @@
       </p:sp>
       <p:sp>
         <p:nvSpPr>
-          <p:cNvPr id="7" name="TextBox 6"/>
+          <p:cNvPr id="9" name="TextBox 8"/>
           <p:cNvSpPr txBox="1"/>
           <p:nvPr/>
         </p:nvSpPr>
         <p:spPr>
           <a:xfrm>
-            <a:off x="685800" y="2103120"/>
-            <a:ext cx="5044287" cy="3749039"/>
+            <a:off x="594360" y="5541264"/>
+            <a:ext cx="5227167" cy="731520"/>
           </a:xfrm>
           <a:prstGeom prst="rect">
             <a:avLst/>
@@ -5015,7 +6096,7 @@
           <a:noFill/>
         </p:spPr>
         <p:txBody>
-          <a:bodyPr wrap="square">
+          <a:bodyPr wrap="square" lIns="45720" rIns="45720">
             <a:spAutoFit/>
           </a:bodyPr>
           <a:lstStyle/>
@@ -5026,27 +6107,27 @@
               </a:defRPr>
             </a:pPr>
             <a:r>
-              <a:rPr sz="1600" b="0">
+              <a:rPr sz="1200" b="0">
                 <a:solidFill>
                   <a:srgbClr val="25342A"/>
                 </a:solidFill>
                 <a:latin typeface="Roboto"/>
               </a:rPr>
-              <a:t>In October it cost: Grants 10¢, donations 14¢ to raise each dollar.</a:t>
-            </a:r>
-          </a:p>
-        </p:txBody>
-      </p:sp>
-      <p:sp>
-        <p:nvSpPr>
-          <p:cNvPr id="8" name="Rectangle 7"/>
+              <a:t>Grants: $251,929 raised this financial year to date (71.9% of everything raised), $28,400 to raise it, so $223,529 left for programs: 11¢ per dollar.</a:t>
+            </a:r>
+          </a:p>
+        </p:txBody>
+      </p:sp>
+      <p:sp>
+        <p:nvSpPr>
+          <p:cNvPr id="10" name="Rectangle 9"/>
           <p:cNvSpPr/>
           <p:nvPr/>
         </p:nvSpPr>
         <p:spPr>
           <a:xfrm>
-            <a:off x="6233007" y="1554480"/>
-            <a:ext cx="5501487" cy="4389120"/>
+            <a:off x="6233007" y="5212080"/>
+            <a:ext cx="5501487" cy="1097280"/>
           </a:xfrm>
           <a:prstGeom prst="rect">
             <a:avLst/>
@@ -5088,14 +6169,14 @@
       </p:sp>
       <p:sp>
         <p:nvSpPr>
-          <p:cNvPr id="9" name="TextBox 8"/>
+          <p:cNvPr id="11" name="TextBox 10"/>
           <p:cNvSpPr txBox="1"/>
           <p:nvPr/>
         </p:nvSpPr>
         <p:spPr>
           <a:xfrm>
-            <a:off x="6461607" y="1691640"/>
-            <a:ext cx="5044287" cy="365760"/>
+            <a:off x="6370167" y="5266944"/>
+            <a:ext cx="5227167" cy="274320"/>
           </a:xfrm>
           <a:prstGeom prst="rect">
             <a:avLst/>
@@ -5103,7 +6184,7 @@
           <a:noFill/>
         </p:spPr>
         <p:txBody>
-          <a:bodyPr wrap="square">
+          <a:bodyPr wrap="square" lIns="45720" rIns="45720">
             <a:spAutoFit/>
           </a:bodyPr>
           <a:lstStyle/>
@@ -5114,7 +6195,7 @@
               </a:defRPr>
             </a:pPr>
             <a:r>
-              <a:rPr sz="1100" b="1">
+              <a:rPr sz="1000" b="1">
                 <a:solidFill>
                   <a:srgbClr val="5F6F63"/>
                 </a:solidFill>
@@ -5127,14 +6208,14 @@
       </p:sp>
       <p:sp>
         <p:nvSpPr>
-          <p:cNvPr id="10" name="TextBox 9"/>
+          <p:cNvPr id="12" name="TextBox 11"/>
           <p:cNvSpPr txBox="1"/>
           <p:nvPr/>
         </p:nvSpPr>
         <p:spPr>
           <a:xfrm>
-            <a:off x="6461607" y="2103120"/>
-            <a:ext cx="5044287" cy="3749039"/>
+            <a:off x="6370167" y="5541264"/>
+            <a:ext cx="5227167" cy="731520"/>
           </a:xfrm>
           <a:prstGeom prst="rect">
             <a:avLst/>
@@ -5142,7 +6223,7 @@
           <a:noFill/>
         </p:spPr>
         <p:txBody>
-          <a:bodyPr wrap="square">
+          <a:bodyPr wrap="square" lIns="45720" rIns="45720">
             <a:spAutoFit/>
           </a:bodyPr>
           <a:lstStyle/>
@@ -5153,27 +6234,27 @@
               </a:defRPr>
             </a:pPr>
             <a:r>
-              <a:rPr sz="1600" b="0">
+              <a:rPr sz="1200" b="0">
                 <a:solidFill>
                   <a:srgbClr val="25342A"/>
                 </a:solidFill>
                 <a:latin typeface="Roboto"/>
               </a:rPr>
-              <a:t>Cheapest to raise in October: grants (10¢ a dollar). Dearest: donations (14¢). Events are worth counting for what else they bring too (new donors, profile).</a:t>
-            </a:r>
-          </a:p>
-        </p:txBody>
-      </p:sp>
-      <p:sp>
-        <p:nvSpPr>
-          <p:cNvPr id="11" name="TextBox 10"/>
+              <a:t>Most of the money, and usually the cheapest to raise, starting with grants that renew.</a:t>
+            </a:r>
+          </a:p>
+        </p:txBody>
+      </p:sp>
+      <p:sp>
+        <p:nvSpPr>
+          <p:cNvPr id="13" name="TextBox 12"/>
           <p:cNvSpPr txBox="1"/>
           <p:nvPr/>
         </p:nvSpPr>
         <p:spPr>
           <a:xfrm>
             <a:off x="457200" y="6492240"/>
-            <a:ext cx="3657600" cy="274320"/>
+            <a:ext cx="2926080" cy="274320"/>
           </a:xfrm>
           <a:prstGeom prst="rect">
             <a:avLst/>
@@ -5181,7 +6262,7 @@
           <a:noFill/>
         </p:spPr>
         <p:txBody>
-          <a:bodyPr wrap="square">
+          <a:bodyPr wrap="square" lIns="45720" rIns="45720">
             <a:spAutoFit/>
           </a:bodyPr>
           <a:lstStyle/>
@@ -5205,14 +6286,14 @@
       </p:sp>
       <p:sp>
         <p:nvSpPr>
-          <p:cNvPr id="12" name="TextBox 11"/>
+          <p:cNvPr id="14" name="TextBox 13"/>
           <p:cNvSpPr txBox="1"/>
           <p:nvPr/>
         </p:nvSpPr>
         <p:spPr>
           <a:xfrm>
-            <a:off x="4297680" y="6492240"/>
-            <a:ext cx="3657600" cy="274320"/>
+            <a:off x="3108960" y="6492240"/>
+            <a:ext cx="5943600" cy="274320"/>
           </a:xfrm>
           <a:prstGeom prst="rect">
             <a:avLst/>
@@ -5220,7 +6301,7 @@
           <a:noFill/>
         </p:spPr>
         <p:txBody>
-          <a:bodyPr wrap="square">
+          <a:bodyPr wrap="square" lIns="45720" rIns="45720">
             <a:spAutoFit/>
           </a:bodyPr>
           <a:lstStyle/>
@@ -5237,14 +6318,14 @@
                 </a:solidFill>
                 <a:latin typeface="Roboto"/>
               </a:rPr>
-              <a:t>Data retrieved 2pm, Tue 6 Oct 2026 · Sample data</a:t>
-            </a:r>
-          </a:p>
-        </p:txBody>
-      </p:sp>
-      <p:sp>
-        <p:nvSpPr>
-          <p:cNvPr id="13" name="TextBox 12"/>
+              <a:t>Data retrieved 2pm, Tue 6 Oct 2026 · Generated 8 Oct 2026, 9:35am · Sample data · Made with Python (python-pptx)</a:t>
+            </a:r>
+          </a:p>
+        </p:txBody>
+      </p:sp>
+      <p:sp>
+        <p:nvSpPr>
+          <p:cNvPr id="15" name="TextBox 14"/>
           <p:cNvSpPr txBox="1"/>
           <p:nvPr/>
         </p:nvSpPr>
@@ -5259,7 +6340,7 @@
           <a:noFill/>
         </p:spPr>
         <p:txBody>
-          <a:bodyPr wrap="square">
+          <a:bodyPr wrap="square" lIns="45720" rIns="45720">
             <a:spAutoFit/>
           </a:bodyPr>
           <a:lstStyle/>
@@ -5276,7 +6357,7 @@
                 </a:solidFill>
                 <a:latin typeface="Roboto"/>
               </a:rPr>
-              <a:t>Slide 3 of 10</a:t>
+              <a:t>Slide 3 of 6</a:t>
             </a:r>
           </a:p>
         </p:txBody>
@@ -5301,7 +6382,44 @@
       <p:grpSpPr/>
       <p:sp>
         <p:nvSpPr>
-          <p:cNvPr id="2" name="Rectangle 1"/>
+          <p:cNvPr id="2" name="Title 1"/>
+          <p:cNvSpPr>
+            <a:spLocks noGrp="1"/>
+          </p:cNvSpPr>
+          <p:nvPr>
+            <p:ph type="title"/>
+          </p:nvPr>
+        </p:nvSpPr>
+        <p:spPr>
+          <a:xfrm>
+            <a:off x="457200" y="384048"/>
+            <a:ext cx="11277295" cy="475488"/>
+          </a:xfrm>
+        </p:spPr>
+        <p:txBody>
+          <a:bodyPr wrap="square" lIns="45720" rIns="45720" tIns="0" bIns="0" anchor="t"/>
+          <a:lstStyle/>
+          <a:p>
+            <a:pPr algn="l">
+              <a:defRPr>
+                <a:latin typeface="Roboto"/>
+              </a:defRPr>
+            </a:pPr>
+            <a:r>
+              <a:rPr sz="2400" b="1">
+                <a:solidFill>
+                  <a:srgbClr val="25342A"/>
+                </a:solidFill>
+                <a:latin typeface="Roboto"/>
+              </a:rPr>
+              <a:t>Donations</a:t>
+            </a:r>
+          </a:p>
+        </p:txBody>
+      </p:sp>
+      <p:sp>
+        <p:nvSpPr>
+          <p:cNvPr id="3" name="Rectangle 2"/>
           <p:cNvSpPr/>
           <p:nvPr/>
         </p:nvSpPr>
@@ -5348,14 +6466,14 @@
       </p:sp>
       <p:sp>
         <p:nvSpPr>
-          <p:cNvPr id="3" name="TextBox 2"/>
+          <p:cNvPr id="4" name="TextBox 3"/>
           <p:cNvSpPr txBox="1"/>
           <p:nvPr/>
         </p:nvSpPr>
         <p:spPr>
           <a:xfrm>
-            <a:off x="457200" y="164592"/>
-            <a:ext cx="7315200" cy="274320"/>
+            <a:off x="457200" y="146304"/>
+            <a:ext cx="8229600" cy="256032"/>
           </a:xfrm>
           <a:prstGeom prst="rect">
             <a:avLst/>
@@ -5363,7 +6481,7 @@
           <a:noFill/>
         </p:spPr>
         <p:txBody>
-          <a:bodyPr wrap="square">
+          <a:bodyPr wrap="square" lIns="45720" rIns="45720">
             <a:spAutoFit/>
           </a:bodyPr>
           <a:lstStyle/>
@@ -5387,14 +6505,14 @@
       </p:sp>
       <p:sp>
         <p:nvSpPr>
-          <p:cNvPr id="4" name="TextBox 3"/>
+          <p:cNvPr id="5" name="TextBox 4"/>
           <p:cNvSpPr txBox="1"/>
           <p:nvPr/>
         </p:nvSpPr>
         <p:spPr>
           <a:xfrm>
-            <a:off x="457200" y="411480"/>
-            <a:ext cx="11247120" cy="548640"/>
+            <a:off x="457200" y="914400"/>
+            <a:ext cx="11277295" cy="263652"/>
           </a:xfrm>
           <a:prstGeom prst="rect">
             <a:avLst/>
@@ -5402,7 +6520,7 @@
           <a:noFill/>
         </p:spPr>
         <p:txBody>
-          <a:bodyPr wrap="square">
+          <a:bodyPr wrap="square" lIns="45720" rIns="45720">
             <a:spAutoFit/>
           </a:bodyPr>
           <a:lstStyle/>
@@ -5413,27 +6531,45 @@
               </a:defRPr>
             </a:pPr>
             <a:r>
-              <a:rPr sz="2400" b="1">
+              <a:rPr sz="1200" b="0">
                 <a:solidFill>
-                  <a:srgbClr val="25342A"/>
+                  <a:srgbClr val="5F6F63"/>
                 </a:solidFill>
                 <a:latin typeface="Roboto"/>
               </a:rPr>
-              <a:t>What it shows · Source: Grants</a:t>
-            </a:r>
-          </a:p>
-        </p:txBody>
-      </p:sp>
-      <p:sp>
-        <p:nvSpPr>
-          <p:cNvPr id="5" name="Rectangle 4"/>
+              <a:t>Raised and left after costs, by month · Donations</a:t>
+            </a:r>
+          </a:p>
+        </p:txBody>
+      </p:sp>
+      <p:graphicFrame>
+        <p:nvGraphicFramePr>
+          <p:cNvPr id="6" name="Chart 5"/>
+          <p:cNvGraphicFramePr>
+            <a:graphicFrameLocks noGrp="1"/>
+          </p:cNvGraphicFramePr>
+          <p:nvPr/>
+        </p:nvGraphicFramePr>
+        <p:xfrm>
+          <a:off x="457200" y="1278636"/>
+          <a:ext cx="11277295" cy="3842004"/>
+        </p:xfrm>
+        <a:graphic>
+          <a:graphicData uri="http://schemas.openxmlformats.org/drawingml/2006/chart">
+            <c:chart xmlns:c="http://schemas.openxmlformats.org/drawingml/2006/chart" r:id="rId3"/>
+          </a:graphicData>
+        </a:graphic>
+      </p:graphicFrame>
+      <p:sp>
+        <p:nvSpPr>
+          <p:cNvPr id="7" name="Rectangle 6"/>
           <p:cNvSpPr/>
           <p:nvPr/>
         </p:nvSpPr>
         <p:spPr>
           <a:xfrm>
-            <a:off x="457200" y="1554480"/>
-            <a:ext cx="5501487" cy="4389120"/>
+            <a:off x="457200" y="5212080"/>
+            <a:ext cx="5501487" cy="1097280"/>
           </a:xfrm>
           <a:prstGeom prst="rect">
             <a:avLst/>
@@ -5475,14 +6611,14 @@
       </p:sp>
       <p:sp>
         <p:nvSpPr>
-          <p:cNvPr id="6" name="TextBox 5"/>
+          <p:cNvPr id="8" name="TextBox 7"/>
           <p:cNvSpPr txBox="1"/>
           <p:nvPr/>
         </p:nvSpPr>
         <p:spPr>
           <a:xfrm>
-            <a:off x="685800" y="1691640"/>
-            <a:ext cx="5044287" cy="365760"/>
+            <a:off x="594360" y="5266944"/>
+            <a:ext cx="5227167" cy="274320"/>
           </a:xfrm>
           <a:prstGeom prst="rect">
             <a:avLst/>
@@ -5490,7 +6626,7 @@
           <a:noFill/>
         </p:spPr>
         <p:txBody>
-          <a:bodyPr wrap="square">
+          <a:bodyPr wrap="square" lIns="45720" rIns="45720">
             <a:spAutoFit/>
           </a:bodyPr>
           <a:lstStyle/>
@@ -5501,7 +6637,7 @@
               </a:defRPr>
             </a:pPr>
             <a:r>
-              <a:rPr sz="1100" b="1">
+              <a:rPr sz="1000" b="1">
                 <a:solidFill>
                   <a:srgbClr val="5F6F63"/>
                 </a:solidFill>
@@ -5514,14 +6650,14 @@
       </p:sp>
       <p:sp>
         <p:nvSpPr>
-          <p:cNvPr id="7" name="TextBox 6"/>
+          <p:cNvPr id="9" name="TextBox 8"/>
           <p:cNvSpPr txBox="1"/>
           <p:nvPr/>
         </p:nvSpPr>
         <p:spPr>
           <a:xfrm>
-            <a:off x="685800" y="2103120"/>
-            <a:ext cx="5044287" cy="3749039"/>
+            <a:off x="594360" y="5541264"/>
+            <a:ext cx="5227167" cy="731520"/>
           </a:xfrm>
           <a:prstGeom prst="rect">
             <a:avLst/>
@@ -5529,7 +6665,7 @@
           <a:noFill/>
         </p:spPr>
         <p:txBody>
-          <a:bodyPr wrap="square">
+          <a:bodyPr wrap="square" lIns="45720" rIns="45720">
             <a:spAutoFit/>
           </a:bodyPr>
           <a:lstStyle/>
@@ -5540,27 +6676,27 @@
               </a:defRPr>
             </a:pPr>
             <a:r>
-              <a:rPr sz="1600" b="0">
+              <a:rPr sz="1200" b="0">
                 <a:solidFill>
                   <a:srgbClr val="25342A"/>
                 </a:solidFill>
                 <a:latin typeface="Roboto"/>
               </a:rPr>
-              <a:t>Grants: $251,929 raised this financial year to date (71.9% of everything raised), $28,400 to raise it, so $223,529 left for programs: 11¢ per dollar.</a:t>
-            </a:r>
-          </a:p>
-        </p:txBody>
-      </p:sp>
-      <p:sp>
-        <p:nvSpPr>
-          <p:cNvPr id="8" name="Rectangle 7"/>
+              <a:t>Donations: $61,800 raised this financial year to date (17.6% of everything raised), $8,800 to raise it, so $53,000 left for programs: 14¢ per dollar.</a:t>
+            </a:r>
+          </a:p>
+        </p:txBody>
+      </p:sp>
+      <p:sp>
+        <p:nvSpPr>
+          <p:cNvPr id="10" name="Rectangle 9"/>
           <p:cNvSpPr/>
           <p:nvPr/>
         </p:nvSpPr>
         <p:spPr>
           <a:xfrm>
-            <a:off x="6233007" y="1554480"/>
-            <a:ext cx="5501487" cy="4389120"/>
+            <a:off x="6233007" y="5212080"/>
+            <a:ext cx="5501487" cy="1097280"/>
           </a:xfrm>
           <a:prstGeom prst="rect">
             <a:avLst/>
@@ -5602,14 +6738,14 @@
       </p:sp>
       <p:sp>
         <p:nvSpPr>
-          <p:cNvPr id="9" name="TextBox 8"/>
+          <p:cNvPr id="11" name="TextBox 10"/>
           <p:cNvSpPr txBox="1"/>
           <p:nvPr/>
         </p:nvSpPr>
         <p:spPr>
           <a:xfrm>
-            <a:off x="6461607" y="1691640"/>
-            <a:ext cx="5044287" cy="365760"/>
+            <a:off x="6370167" y="5266944"/>
+            <a:ext cx="5227167" cy="274320"/>
           </a:xfrm>
           <a:prstGeom prst="rect">
             <a:avLst/>
@@ -5617,7 +6753,7 @@
           <a:noFill/>
         </p:spPr>
         <p:txBody>
-          <a:bodyPr wrap="square">
+          <a:bodyPr wrap="square" lIns="45720" rIns="45720">
             <a:spAutoFit/>
           </a:bodyPr>
           <a:lstStyle/>
@@ -5628,7 +6764,7 @@
               </a:defRPr>
             </a:pPr>
             <a:r>
-              <a:rPr sz="1100" b="1">
+              <a:rPr sz="1000" b="1">
                 <a:solidFill>
                   <a:srgbClr val="5F6F63"/>
                 </a:solidFill>
@@ -5641,14 +6777,14 @@
       </p:sp>
       <p:sp>
         <p:nvSpPr>
-          <p:cNvPr id="10" name="TextBox 9"/>
+          <p:cNvPr id="12" name="TextBox 11"/>
           <p:cNvSpPr txBox="1"/>
           <p:nvPr/>
         </p:nvSpPr>
         <p:spPr>
           <a:xfrm>
-            <a:off x="6461607" y="2103120"/>
-            <a:ext cx="5044287" cy="3749039"/>
+            <a:off x="6370167" y="5541264"/>
+            <a:ext cx="5227167" cy="731520"/>
           </a:xfrm>
           <a:prstGeom prst="rect">
             <a:avLst/>
@@ -5656,7 +6792,7 @@
           <a:noFill/>
         </p:spPr>
         <p:txBody>
-          <a:bodyPr wrap="square">
+          <a:bodyPr wrap="square" lIns="45720" rIns="45720">
             <a:spAutoFit/>
           </a:bodyPr>
           <a:lstStyle/>
@@ -5667,27 +6803,27 @@
               </a:defRPr>
             </a:pPr>
             <a:r>
-              <a:rPr sz="1600" b="0">
+              <a:rPr sz="1200" b="0">
                 <a:solidFill>
                   <a:srgbClr val="25342A"/>
                 </a:solidFill>
                 <a:latin typeface="Roboto"/>
               </a:rPr>
-              <a:t>Most of the money, and usually the cheapest to raise, starting with grants that renew.</a:t>
-            </a:r>
-          </a:p>
-        </p:txBody>
-      </p:sp>
-      <p:sp>
-        <p:nvSpPr>
-          <p:cNvPr id="11" name="TextBox 10"/>
+              <a:t>Cheap and flexible (untied): the money that builds reserves.</a:t>
+            </a:r>
+          </a:p>
+        </p:txBody>
+      </p:sp>
+      <p:sp>
+        <p:nvSpPr>
+          <p:cNvPr id="13" name="TextBox 12"/>
           <p:cNvSpPr txBox="1"/>
           <p:nvPr/>
         </p:nvSpPr>
         <p:spPr>
           <a:xfrm>
             <a:off x="457200" y="6492240"/>
-            <a:ext cx="3657600" cy="274320"/>
+            <a:ext cx="2926080" cy="274320"/>
           </a:xfrm>
           <a:prstGeom prst="rect">
             <a:avLst/>
@@ -5695,7 +6831,7 @@
           <a:noFill/>
         </p:spPr>
         <p:txBody>
-          <a:bodyPr wrap="square">
+          <a:bodyPr wrap="square" lIns="45720" rIns="45720">
             <a:spAutoFit/>
           </a:bodyPr>
           <a:lstStyle/>
@@ -5719,14 +6855,14 @@
       </p:sp>
       <p:sp>
         <p:nvSpPr>
-          <p:cNvPr id="12" name="TextBox 11"/>
+          <p:cNvPr id="14" name="TextBox 13"/>
           <p:cNvSpPr txBox="1"/>
           <p:nvPr/>
         </p:nvSpPr>
         <p:spPr>
           <a:xfrm>
-            <a:off x="4297680" y="6492240"/>
-            <a:ext cx="3657600" cy="274320"/>
+            <a:off x="3108960" y="6492240"/>
+            <a:ext cx="5943600" cy="274320"/>
           </a:xfrm>
           <a:prstGeom prst="rect">
             <a:avLst/>
@@ -5734,7 +6870,7 @@
           <a:noFill/>
         </p:spPr>
         <p:txBody>
-          <a:bodyPr wrap="square">
+          <a:bodyPr wrap="square" lIns="45720" rIns="45720">
             <a:spAutoFit/>
           </a:bodyPr>
           <a:lstStyle/>
@@ -5751,14 +6887,14 @@
                 </a:solidFill>
                 <a:latin typeface="Roboto"/>
               </a:rPr>
-              <a:t>Data retrieved 2pm, Tue 6 Oct 2026 · Sample data</a:t>
-            </a:r>
-          </a:p>
-        </p:txBody>
-      </p:sp>
-      <p:sp>
-        <p:nvSpPr>
-          <p:cNvPr id="13" name="TextBox 12"/>
+              <a:t>Data retrieved 2pm, Tue 6 Oct 2026 · Generated 8 Oct 2026, 9:35am · Sample data · Made with Python (python-pptx)</a:t>
+            </a:r>
+          </a:p>
+        </p:txBody>
+      </p:sp>
+      <p:sp>
+        <p:nvSpPr>
+          <p:cNvPr id="15" name="TextBox 14"/>
           <p:cNvSpPr txBox="1"/>
           <p:nvPr/>
         </p:nvSpPr>
@@ -5773,7 +6909,7 @@
           <a:noFill/>
         </p:spPr>
         <p:txBody>
-          <a:bodyPr wrap="square">
+          <a:bodyPr wrap="square" lIns="45720" rIns="45720">
             <a:spAutoFit/>
           </a:bodyPr>
           <a:lstStyle/>
@@ -5790,7 +6926,7 @@
                 </a:solidFill>
                 <a:latin typeface="Roboto"/>
               </a:rPr>
-              <a:t>Slide 4 of 10</a:t>
+              <a:t>Slide 4 of 6</a:t>
             </a:r>
           </a:p>
         </p:txBody>
@@ -5815,7 +6951,44 @@
       <p:grpSpPr/>
       <p:sp>
         <p:nvSpPr>
-          <p:cNvPr id="2" name="Rectangle 1"/>
+          <p:cNvPr id="2" name="Title 1"/>
+          <p:cNvSpPr>
+            <a:spLocks noGrp="1"/>
+          </p:cNvSpPr>
+          <p:nvPr>
+            <p:ph type="title"/>
+          </p:nvPr>
+        </p:nvSpPr>
+        <p:spPr>
+          <a:xfrm>
+            <a:off x="457200" y="384048"/>
+            <a:ext cx="11277295" cy="475488"/>
+          </a:xfrm>
+        </p:spPr>
+        <p:txBody>
+          <a:bodyPr wrap="square" lIns="45720" rIns="45720" tIns="0" bIns="0" anchor="t"/>
+          <a:lstStyle/>
+          <a:p>
+            <a:pPr algn="l">
+              <a:defRPr>
+                <a:latin typeface="Roboto"/>
+              </a:defRPr>
+            </a:pPr>
+            <a:r>
+              <a:rPr sz="2400" b="1">
+                <a:solidFill>
+                  <a:srgbClr val="25342A"/>
+                </a:solidFill>
+                <a:latin typeface="Roboto"/>
+              </a:rPr>
+              <a:t>Fundraising events</a:t>
+            </a:r>
+          </a:p>
+        </p:txBody>
+      </p:sp>
+      <p:sp>
+        <p:nvSpPr>
+          <p:cNvPr id="3" name="Rectangle 2"/>
           <p:cNvSpPr/>
           <p:nvPr/>
         </p:nvSpPr>
@@ -5862,14 +7035,14 @@
       </p:sp>
       <p:sp>
         <p:nvSpPr>
-          <p:cNvPr id="3" name="TextBox 2"/>
+          <p:cNvPr id="4" name="TextBox 3"/>
           <p:cNvSpPr txBox="1"/>
           <p:nvPr/>
         </p:nvSpPr>
         <p:spPr>
           <a:xfrm>
-            <a:off x="457200" y="164592"/>
-            <a:ext cx="7315200" cy="274320"/>
+            <a:off x="457200" y="146304"/>
+            <a:ext cx="8229600" cy="256032"/>
           </a:xfrm>
           <a:prstGeom prst="rect">
             <a:avLst/>
@@ -5877,7 +7050,7 @@
           <a:noFill/>
         </p:spPr>
         <p:txBody>
-          <a:bodyPr wrap="square">
+          <a:bodyPr wrap="square" lIns="45720" rIns="45720">
             <a:spAutoFit/>
           </a:bodyPr>
           <a:lstStyle/>
@@ -5901,14 +7074,14 @@
       </p:sp>
       <p:sp>
         <p:nvSpPr>
-          <p:cNvPr id="4" name="TextBox 3"/>
+          <p:cNvPr id="5" name="TextBox 4"/>
           <p:cNvSpPr txBox="1"/>
           <p:nvPr/>
         </p:nvSpPr>
         <p:spPr>
           <a:xfrm>
-            <a:off x="457200" y="411480"/>
-            <a:ext cx="11247120" cy="548640"/>
+            <a:off x="457200" y="914400"/>
+            <a:ext cx="11277295" cy="263652"/>
           </a:xfrm>
           <a:prstGeom prst="rect">
             <a:avLst/>
@@ -5916,7 +7089,7 @@
           <a:noFill/>
         </p:spPr>
         <p:txBody>
-          <a:bodyPr wrap="square">
+          <a:bodyPr wrap="square" lIns="45720" rIns="45720">
             <a:spAutoFit/>
           </a:bodyPr>
           <a:lstStyle/>
@@ -5927,27 +7100,45 @@
               </a:defRPr>
             </a:pPr>
             <a:r>
-              <a:rPr sz="2400" b="1">
+              <a:rPr sz="1200" b="0">
                 <a:solidFill>
-                  <a:srgbClr val="25342A"/>
+                  <a:srgbClr val="5F6F63"/>
                 </a:solidFill>
                 <a:latin typeface="Roboto"/>
               </a:rPr>
-              <a:t>What it shows · Source: Donations</a:t>
-            </a:r>
-          </a:p>
-        </p:txBody>
-      </p:sp>
-      <p:sp>
-        <p:nvSpPr>
-          <p:cNvPr id="5" name="Rectangle 4"/>
+              <a:t>Raised and left after costs, by month · Fundraising events</a:t>
+            </a:r>
+          </a:p>
+        </p:txBody>
+      </p:sp>
+      <p:graphicFrame>
+        <p:nvGraphicFramePr>
+          <p:cNvPr id="6" name="Chart 5"/>
+          <p:cNvGraphicFramePr>
+            <a:graphicFrameLocks noGrp="1"/>
+          </p:cNvGraphicFramePr>
+          <p:nvPr/>
+        </p:nvGraphicFramePr>
+        <p:xfrm>
+          <a:off x="457200" y="1278636"/>
+          <a:ext cx="11277295" cy="3842004"/>
+        </p:xfrm>
+        <a:graphic>
+          <a:graphicData uri="http://schemas.openxmlformats.org/drawingml/2006/chart">
+            <c:chart xmlns:c="http://schemas.openxmlformats.org/drawingml/2006/chart" r:id="rId3"/>
+          </a:graphicData>
+        </a:graphic>
+      </p:graphicFrame>
+      <p:sp>
+        <p:nvSpPr>
+          <p:cNvPr id="7" name="Rectangle 6"/>
           <p:cNvSpPr/>
           <p:nvPr/>
         </p:nvSpPr>
         <p:spPr>
           <a:xfrm>
-            <a:off x="457200" y="1554480"/>
-            <a:ext cx="5501487" cy="4389120"/>
+            <a:off x="457200" y="5212080"/>
+            <a:ext cx="5501487" cy="1097280"/>
           </a:xfrm>
           <a:prstGeom prst="rect">
             <a:avLst/>
@@ -5989,14 +7180,14 @@
       </p:sp>
       <p:sp>
         <p:nvSpPr>
-          <p:cNvPr id="6" name="TextBox 5"/>
+          <p:cNvPr id="8" name="TextBox 7"/>
           <p:cNvSpPr txBox="1"/>
           <p:nvPr/>
         </p:nvSpPr>
         <p:spPr>
           <a:xfrm>
-            <a:off x="685800" y="1691640"/>
-            <a:ext cx="5044287" cy="365760"/>
+            <a:off x="594360" y="5266944"/>
+            <a:ext cx="5227167" cy="274320"/>
           </a:xfrm>
           <a:prstGeom prst="rect">
             <a:avLst/>
@@ -6004,7 +7195,7 @@
           <a:noFill/>
         </p:spPr>
         <p:txBody>
-          <a:bodyPr wrap="square">
+          <a:bodyPr wrap="square" lIns="45720" rIns="45720">
             <a:spAutoFit/>
           </a:bodyPr>
           <a:lstStyle/>
@@ -6015,7 +7206,7 @@
               </a:defRPr>
             </a:pPr>
             <a:r>
-              <a:rPr sz="1100" b="1">
+              <a:rPr sz="1000" b="1">
                 <a:solidFill>
                   <a:srgbClr val="5F6F63"/>
                 </a:solidFill>
@@ -6028,14 +7219,14 @@
       </p:sp>
       <p:sp>
         <p:nvSpPr>
-          <p:cNvPr id="7" name="TextBox 6"/>
+          <p:cNvPr id="9" name="TextBox 8"/>
           <p:cNvSpPr txBox="1"/>
           <p:nvPr/>
         </p:nvSpPr>
         <p:spPr>
           <a:xfrm>
-            <a:off x="685800" y="2103120"/>
-            <a:ext cx="5044287" cy="3749039"/>
+            <a:off x="594360" y="5541264"/>
+            <a:ext cx="5227167" cy="731520"/>
           </a:xfrm>
           <a:prstGeom prst="rect">
             <a:avLst/>
@@ -6043,7 +7234,7 @@
           <a:noFill/>
         </p:spPr>
         <p:txBody>
-          <a:bodyPr wrap="square">
+          <a:bodyPr wrap="square" lIns="45720" rIns="45720">
             <a:spAutoFit/>
           </a:bodyPr>
           <a:lstStyle/>
@@ -6054,27 +7245,27 @@
               </a:defRPr>
             </a:pPr>
             <a:r>
-              <a:rPr sz="1600" b="0">
+              <a:rPr sz="1200" b="0">
                 <a:solidFill>
                   <a:srgbClr val="25342A"/>
                 </a:solidFill>
                 <a:latin typeface="Roboto"/>
               </a:rPr>
-              <a:t>Donations: $61,800 raised this financial year to date (17.6% of everything raised), $8,800 to raise it, so $53,000 left for programs: 14¢ per dollar.</a:t>
-            </a:r>
-          </a:p>
-        </p:txBody>
-      </p:sp>
-      <p:sp>
-        <p:nvSpPr>
-          <p:cNvPr id="8" name="Rectangle 7"/>
+              <a:t>Fundraising events: $36,800 raised this financial year to date (10.5% of everything raised), $15,200 to raise it, so $21,600 left for programs: 41¢ per dollar.</a:t>
+            </a:r>
+          </a:p>
+        </p:txBody>
+      </p:sp>
+      <p:sp>
+        <p:nvSpPr>
+          <p:cNvPr id="10" name="Rectangle 9"/>
           <p:cNvSpPr/>
           <p:nvPr/>
         </p:nvSpPr>
         <p:spPr>
           <a:xfrm>
-            <a:off x="6233007" y="1554480"/>
-            <a:ext cx="5501487" cy="4389120"/>
+            <a:off x="6233007" y="5212080"/>
+            <a:ext cx="5501487" cy="1097280"/>
           </a:xfrm>
           <a:prstGeom prst="rect">
             <a:avLst/>
@@ -6116,14 +7307,14 @@
       </p:sp>
       <p:sp>
         <p:nvSpPr>
-          <p:cNvPr id="9" name="TextBox 8"/>
+          <p:cNvPr id="11" name="TextBox 10"/>
           <p:cNvSpPr txBox="1"/>
           <p:nvPr/>
         </p:nvSpPr>
         <p:spPr>
           <a:xfrm>
-            <a:off x="6461607" y="1691640"/>
-            <a:ext cx="5044287" cy="365760"/>
+            <a:off x="6370167" y="5266944"/>
+            <a:ext cx="5227167" cy="274320"/>
           </a:xfrm>
           <a:prstGeom prst="rect">
             <a:avLst/>
@@ -6131,7 +7322,7 @@
           <a:noFill/>
         </p:spPr>
         <p:txBody>
-          <a:bodyPr wrap="square">
+          <a:bodyPr wrap="square" lIns="45720" rIns="45720">
             <a:spAutoFit/>
           </a:bodyPr>
           <a:lstStyle/>
@@ -6142,7 +7333,7 @@
               </a:defRPr>
             </a:pPr>
             <a:r>
-              <a:rPr sz="1100" b="1">
+              <a:rPr sz="1000" b="1">
                 <a:solidFill>
                   <a:srgbClr val="5F6F63"/>
                 </a:solidFill>
@@ -6155,14 +7346,14 @@
       </p:sp>
       <p:sp>
         <p:nvSpPr>
-          <p:cNvPr id="10" name="TextBox 9"/>
+          <p:cNvPr id="12" name="TextBox 11"/>
           <p:cNvSpPr txBox="1"/>
           <p:nvPr/>
         </p:nvSpPr>
         <p:spPr>
           <a:xfrm>
-            <a:off x="6461607" y="2103120"/>
-            <a:ext cx="5044287" cy="3749039"/>
+            <a:off x="6370167" y="5541264"/>
+            <a:ext cx="5227167" cy="731520"/>
           </a:xfrm>
           <a:prstGeom prst="rect">
             <a:avLst/>
@@ -6170,7 +7361,7 @@
           <a:noFill/>
         </p:spPr>
         <p:txBody>
-          <a:bodyPr wrap="square">
+          <a:bodyPr wrap="square" lIns="45720" rIns="45720">
             <a:spAutoFit/>
           </a:bodyPr>
           <a:lstStyle/>
@@ -6181,27 +7372,27 @@
               </a:defRPr>
             </a:pPr>
             <a:r>
-              <a:rPr sz="1600" b="0">
+              <a:rPr sz="1200" b="0">
                 <a:solidFill>
                   <a:srgbClr val="25342A"/>
                 </a:solidFill>
                 <a:latin typeface="Roboto"/>
               </a:rPr>
-              <a:t>Cheap and flexible (untied): the money that builds reserves.</a:t>
-            </a:r>
-          </a:p>
-        </p:txBody>
-      </p:sp>
-      <p:sp>
-        <p:nvSpPr>
-          <p:cNvPr id="11" name="TextBox 10"/>
+              <a:t>The dearest per dollar: worth measuring the new donors each event brings in too.</a:t>
+            </a:r>
+          </a:p>
+        </p:txBody>
+      </p:sp>
+      <p:sp>
+        <p:nvSpPr>
+          <p:cNvPr id="13" name="TextBox 12"/>
           <p:cNvSpPr txBox="1"/>
           <p:nvPr/>
         </p:nvSpPr>
         <p:spPr>
           <a:xfrm>
             <a:off x="457200" y="6492240"/>
-            <a:ext cx="3657600" cy="274320"/>
+            <a:ext cx="2926080" cy="274320"/>
           </a:xfrm>
           <a:prstGeom prst="rect">
             <a:avLst/>
@@ -6209,7 +7400,7 @@
           <a:noFill/>
         </p:spPr>
         <p:txBody>
-          <a:bodyPr wrap="square">
+          <a:bodyPr wrap="square" lIns="45720" rIns="45720">
             <a:spAutoFit/>
           </a:bodyPr>
           <a:lstStyle/>
@@ -6233,14 +7424,14 @@
       </p:sp>
       <p:sp>
         <p:nvSpPr>
-          <p:cNvPr id="12" name="TextBox 11"/>
+          <p:cNvPr id="14" name="TextBox 13"/>
           <p:cNvSpPr txBox="1"/>
           <p:nvPr/>
         </p:nvSpPr>
         <p:spPr>
           <a:xfrm>
-            <a:off x="4297680" y="6492240"/>
-            <a:ext cx="3657600" cy="274320"/>
+            <a:off x="3108960" y="6492240"/>
+            <a:ext cx="5943600" cy="274320"/>
           </a:xfrm>
           <a:prstGeom prst="rect">
             <a:avLst/>
@@ -6248,7 +7439,7 @@
           <a:noFill/>
         </p:spPr>
         <p:txBody>
-          <a:bodyPr wrap="square">
+          <a:bodyPr wrap="square" lIns="45720" rIns="45720">
             <a:spAutoFit/>
           </a:bodyPr>
           <a:lstStyle/>
@@ -6265,14 +7456,14 @@
                 </a:solidFill>
                 <a:latin typeface="Roboto"/>
               </a:rPr>
-              <a:t>Data retrieved 2pm, Tue 6 Oct 2026 · Sample data</a:t>
-            </a:r>
-          </a:p>
-        </p:txBody>
-      </p:sp>
-      <p:sp>
-        <p:nvSpPr>
-          <p:cNvPr id="13" name="TextBox 12"/>
+              <a:t>Data retrieved 2pm, Tue 6 Oct 2026 · Generated 8 Oct 2026, 9:35am · Sample data · Made with Python (python-pptx)</a:t>
+            </a:r>
+          </a:p>
+        </p:txBody>
+      </p:sp>
+      <p:sp>
+        <p:nvSpPr>
+          <p:cNvPr id="15" name="TextBox 14"/>
           <p:cNvSpPr txBox="1"/>
           <p:nvPr/>
         </p:nvSpPr>
@@ -6287,7 +7478,7 @@
           <a:noFill/>
         </p:spPr>
         <p:txBody>
-          <a:bodyPr wrap="square">
+          <a:bodyPr wrap="square" lIns="45720" rIns="45720">
             <a:spAutoFit/>
           </a:bodyPr>
           <a:lstStyle/>
@@ -6304,7 +7495,7 @@
                 </a:solidFill>
                 <a:latin typeface="Roboto"/>
               </a:rPr>
-              <a:t>Slide 5 of 10</a:t>
+              <a:t>Slide 5 of 6</a:t>
             </a:r>
           </a:p>
         </p:txBody>
@@ -6329,7 +7520,44 @@
       <p:grpSpPr/>
       <p:sp>
         <p:nvSpPr>
-          <p:cNvPr id="2" name="Rectangle 1"/>
+          <p:cNvPr id="2" name="Title 1"/>
+          <p:cNvSpPr>
+            <a:spLocks noGrp="1"/>
+          </p:cNvSpPr>
+          <p:nvPr>
+            <p:ph type="title"/>
+          </p:nvPr>
+        </p:nvSpPr>
+        <p:spPr>
+          <a:xfrm>
+            <a:off x="457200" y="384048"/>
+            <a:ext cx="11277295" cy="475488"/>
+          </a:xfrm>
+        </p:spPr>
+        <p:txBody>
+          <a:bodyPr wrap="square" lIns="45720" rIns="45720" tIns="0" bIns="0" anchor="t"/>
+          <a:lstStyle/>
+          <a:p>
+            <a:pPr algn="l">
+              <a:defRPr>
+                <a:latin typeface="Roboto"/>
+              </a:defRPr>
+            </a:pPr>
+            <a:r>
+              <a:rPr sz="2400" b="1">
+                <a:solidFill>
+                  <a:srgbClr val="25342A"/>
+                </a:solidFill>
+                <a:latin typeface="Roboto"/>
+              </a:rPr>
+              <a:t>Financial year to date (Jul to Oct 2025), by source</a:t>
+            </a:r>
+          </a:p>
+        </p:txBody>
+      </p:sp>
+      <p:sp>
+        <p:nvSpPr>
+          <p:cNvPr id="3" name="Rectangle 2"/>
           <p:cNvSpPr/>
           <p:nvPr/>
         </p:nvSpPr>
@@ -6376,14 +7604,14 @@
       </p:sp>
       <p:sp>
         <p:nvSpPr>
-          <p:cNvPr id="3" name="TextBox 2"/>
+          <p:cNvPr id="4" name="TextBox 3"/>
           <p:cNvSpPr txBox="1"/>
           <p:nvPr/>
         </p:nvSpPr>
         <p:spPr>
           <a:xfrm>
-            <a:off x="457200" y="164592"/>
-            <a:ext cx="7315200" cy="274320"/>
+            <a:off x="457200" y="146304"/>
+            <a:ext cx="8229600" cy="256032"/>
           </a:xfrm>
           <a:prstGeom prst="rect">
             <a:avLst/>
@@ -6391,7 +7619,7 @@
           <a:noFill/>
         </p:spPr>
         <p:txBody>
-          <a:bodyPr wrap="square">
+          <a:bodyPr wrap="square" lIns="45720" rIns="45720">
             <a:spAutoFit/>
           </a:bodyPr>
           <a:lstStyle/>
@@ -6409,1317 +7637,6 @@
                 <a:latin typeface="Roboto"/>
               </a:rPr>
               <a:t>Sample Community Services Ltd · Which funding is worth chasing?</a:t>
-            </a:r>
-          </a:p>
-        </p:txBody>
-      </p:sp>
-      <p:sp>
-        <p:nvSpPr>
-          <p:cNvPr id="4" name="TextBox 3"/>
-          <p:cNvSpPr txBox="1"/>
-          <p:nvPr/>
-        </p:nvSpPr>
-        <p:spPr>
-          <a:xfrm>
-            <a:off x="457200" y="411480"/>
-            <a:ext cx="11247120" cy="548640"/>
-          </a:xfrm>
-          <a:prstGeom prst="rect">
-            <a:avLst/>
-          </a:prstGeom>
-          <a:noFill/>
-        </p:spPr>
-        <p:txBody>
-          <a:bodyPr wrap="square">
-            <a:spAutoFit/>
-          </a:bodyPr>
-          <a:lstStyle/>
-          <a:p>
-            <a:pPr>
-              <a:defRPr>
-                <a:latin typeface="Roboto"/>
-              </a:defRPr>
-            </a:pPr>
-            <a:r>
-              <a:rPr sz="2400" b="1">
-                <a:solidFill>
-                  <a:srgbClr val="25342A"/>
-                </a:solidFill>
-                <a:latin typeface="Roboto"/>
-              </a:rPr>
-              <a:t>What it shows · Source: Fundraising events</a:t>
-            </a:r>
-          </a:p>
-        </p:txBody>
-      </p:sp>
-      <p:sp>
-        <p:nvSpPr>
-          <p:cNvPr id="5" name="Rectangle 4"/>
-          <p:cNvSpPr/>
-          <p:nvPr/>
-        </p:nvSpPr>
-        <p:spPr>
-          <a:xfrm>
-            <a:off x="457200" y="1554480"/>
-            <a:ext cx="5501487" cy="4389120"/>
-          </a:xfrm>
-          <a:prstGeom prst="rect">
-            <a:avLst/>
-          </a:prstGeom>
-          <a:solidFill>
-            <a:srgbClr val="FFFFFF"/>
-          </a:solidFill>
-          <a:ln>
-            <a:solidFill>
-              <a:srgbClr val="DCE8DC"/>
-            </a:solidFill>
-          </a:ln>
-        </p:spPr>
-        <p:style>
-          <a:lnRef idx="1">
-            <a:schemeClr val="accent1"/>
-          </a:lnRef>
-          <a:fillRef idx="3">
-            <a:schemeClr val="accent1"/>
-          </a:fillRef>
-          <a:effectRef idx="2">
-            <a:schemeClr val="accent1"/>
-          </a:effectRef>
-          <a:fontRef idx="minor">
-            <a:schemeClr val="lt1"/>
-          </a:fontRef>
-        </p:style>
-        <p:txBody>
-          <a:bodyPr rtlCol="0" anchor="ctr"/>
-          <a:lstStyle/>
-          <a:p>
-            <a:pPr algn="ctr">
-              <a:defRPr>
-                <a:latin typeface="Roboto"/>
-              </a:defRPr>
-            </a:pPr>
-          </a:p>
-        </p:txBody>
-      </p:sp>
-      <p:sp>
-        <p:nvSpPr>
-          <p:cNvPr id="6" name="TextBox 5"/>
-          <p:cNvSpPr txBox="1"/>
-          <p:nvPr/>
-        </p:nvSpPr>
-        <p:spPr>
-          <a:xfrm>
-            <a:off x="685800" y="1691640"/>
-            <a:ext cx="5044287" cy="365760"/>
-          </a:xfrm>
-          <a:prstGeom prst="rect">
-            <a:avLst/>
-          </a:prstGeom>
-          <a:noFill/>
-        </p:spPr>
-        <p:txBody>
-          <a:bodyPr wrap="square">
-            <a:spAutoFit/>
-          </a:bodyPr>
-          <a:lstStyle/>
-          <a:p>
-            <a:pPr>
-              <a:defRPr>
-                <a:latin typeface="Roboto"/>
-              </a:defRPr>
-            </a:pPr>
-            <a:r>
-              <a:rPr sz="1100" b="1">
-                <a:solidFill>
-                  <a:srgbClr val="5F6F63"/>
-                </a:solidFill>
-                <a:latin typeface="Roboto"/>
-              </a:rPr>
-              <a:t>WHAT IT SHOWS</a:t>
-            </a:r>
-          </a:p>
-        </p:txBody>
-      </p:sp>
-      <p:sp>
-        <p:nvSpPr>
-          <p:cNvPr id="7" name="TextBox 6"/>
-          <p:cNvSpPr txBox="1"/>
-          <p:nvPr/>
-        </p:nvSpPr>
-        <p:spPr>
-          <a:xfrm>
-            <a:off x="685800" y="2103120"/>
-            <a:ext cx="5044287" cy="3749039"/>
-          </a:xfrm>
-          <a:prstGeom prst="rect">
-            <a:avLst/>
-          </a:prstGeom>
-          <a:noFill/>
-        </p:spPr>
-        <p:txBody>
-          <a:bodyPr wrap="square">
-            <a:spAutoFit/>
-          </a:bodyPr>
-          <a:lstStyle/>
-          <a:p>
-            <a:pPr>
-              <a:defRPr>
-                <a:latin typeface="Roboto"/>
-              </a:defRPr>
-            </a:pPr>
-            <a:r>
-              <a:rPr sz="1600" b="0">
-                <a:solidFill>
-                  <a:srgbClr val="25342A"/>
-                </a:solidFill>
-                <a:latin typeface="Roboto"/>
-              </a:rPr>
-              <a:t>Fundraising events: $36,800 raised this financial year to date (10.5% of everything raised), $15,200 to raise it, so $21,600 left for programs: 41¢ per dollar.</a:t>
-            </a:r>
-          </a:p>
-        </p:txBody>
-      </p:sp>
-      <p:sp>
-        <p:nvSpPr>
-          <p:cNvPr id="8" name="Rectangle 7"/>
-          <p:cNvSpPr/>
-          <p:nvPr/>
-        </p:nvSpPr>
-        <p:spPr>
-          <a:xfrm>
-            <a:off x="6233007" y="1554480"/>
-            <a:ext cx="5501487" cy="4389120"/>
-          </a:xfrm>
-          <a:prstGeom prst="rect">
-            <a:avLst/>
-          </a:prstGeom>
-          <a:solidFill>
-            <a:srgbClr val="EEF5F0"/>
-          </a:solidFill>
-          <a:ln>
-            <a:solidFill>
-              <a:srgbClr val="DCE8DC"/>
-            </a:solidFill>
-          </a:ln>
-        </p:spPr>
-        <p:style>
-          <a:lnRef idx="1">
-            <a:schemeClr val="accent1"/>
-          </a:lnRef>
-          <a:fillRef idx="3">
-            <a:schemeClr val="accent1"/>
-          </a:fillRef>
-          <a:effectRef idx="2">
-            <a:schemeClr val="accent1"/>
-          </a:effectRef>
-          <a:fontRef idx="minor">
-            <a:schemeClr val="lt1"/>
-          </a:fontRef>
-        </p:style>
-        <p:txBody>
-          <a:bodyPr rtlCol="0" anchor="ctr"/>
-          <a:lstStyle/>
-          <a:p>
-            <a:pPr algn="ctr">
-              <a:defRPr>
-                <a:latin typeface="Roboto"/>
-              </a:defRPr>
-            </a:pPr>
-          </a:p>
-        </p:txBody>
-      </p:sp>
-      <p:sp>
-        <p:nvSpPr>
-          <p:cNvPr id="9" name="TextBox 8"/>
-          <p:cNvSpPr txBox="1"/>
-          <p:nvPr/>
-        </p:nvSpPr>
-        <p:spPr>
-          <a:xfrm>
-            <a:off x="6461607" y="1691640"/>
-            <a:ext cx="5044287" cy="365760"/>
-          </a:xfrm>
-          <a:prstGeom prst="rect">
-            <a:avLst/>
-          </a:prstGeom>
-          <a:noFill/>
-        </p:spPr>
-        <p:txBody>
-          <a:bodyPr wrap="square">
-            <a:spAutoFit/>
-          </a:bodyPr>
-          <a:lstStyle/>
-          <a:p>
-            <a:pPr>
-              <a:defRPr>
-                <a:latin typeface="Roboto"/>
-              </a:defRPr>
-            </a:pPr>
-            <a:r>
-              <a:rPr sz="1100" b="1">
-                <a:solidFill>
-                  <a:srgbClr val="5F6F63"/>
-                </a:solidFill>
-                <a:latin typeface="Roboto"/>
-              </a:rPr>
-              <a:t>WHAT YOU'D DO ABOUT IT</a:t>
-            </a:r>
-          </a:p>
-        </p:txBody>
-      </p:sp>
-      <p:sp>
-        <p:nvSpPr>
-          <p:cNvPr id="10" name="TextBox 9"/>
-          <p:cNvSpPr txBox="1"/>
-          <p:nvPr/>
-        </p:nvSpPr>
-        <p:spPr>
-          <a:xfrm>
-            <a:off x="6461607" y="2103120"/>
-            <a:ext cx="5044287" cy="3749039"/>
-          </a:xfrm>
-          <a:prstGeom prst="rect">
-            <a:avLst/>
-          </a:prstGeom>
-          <a:noFill/>
-        </p:spPr>
-        <p:txBody>
-          <a:bodyPr wrap="square">
-            <a:spAutoFit/>
-          </a:bodyPr>
-          <a:lstStyle/>
-          <a:p>
-            <a:pPr>
-              <a:defRPr>
-                <a:latin typeface="Roboto"/>
-              </a:defRPr>
-            </a:pPr>
-            <a:r>
-              <a:rPr sz="1600" b="0">
-                <a:solidFill>
-                  <a:srgbClr val="25342A"/>
-                </a:solidFill>
-                <a:latin typeface="Roboto"/>
-              </a:rPr>
-              <a:t>The dearest per dollar: worth measuring the new donors each event brings in too.</a:t>
-            </a:r>
-          </a:p>
-        </p:txBody>
-      </p:sp>
-      <p:sp>
-        <p:nvSpPr>
-          <p:cNvPr id="11" name="TextBox 10"/>
-          <p:cNvSpPr txBox="1"/>
-          <p:nvPr/>
-        </p:nvSpPr>
-        <p:spPr>
-          <a:xfrm>
-            <a:off x="457200" y="6492240"/>
-            <a:ext cx="3657600" cy="274320"/>
-          </a:xfrm>
-          <a:prstGeom prst="rect">
-            <a:avLst/>
-          </a:prstGeom>
-          <a:noFill/>
-        </p:spPr>
-        <p:txBody>
-          <a:bodyPr wrap="square">
-            <a:spAutoFit/>
-          </a:bodyPr>
-          <a:lstStyle/>
-          <a:p>
-            <a:pPr>
-              <a:defRPr>
-                <a:latin typeface="Roboto"/>
-              </a:defRPr>
-            </a:pPr>
-            <a:r>
-              <a:rPr sz="900" b="0">
-                <a:solidFill>
-                  <a:srgbClr val="5F6F63"/>
-                </a:solidFill>
-                <a:latin typeface="Roboto"/>
-              </a:rPr>
-              <a:t>funding.pptx</a:t>
-            </a:r>
-          </a:p>
-        </p:txBody>
-      </p:sp>
-      <p:sp>
-        <p:nvSpPr>
-          <p:cNvPr id="12" name="TextBox 11"/>
-          <p:cNvSpPr txBox="1"/>
-          <p:nvPr/>
-        </p:nvSpPr>
-        <p:spPr>
-          <a:xfrm>
-            <a:off x="4297680" y="6492240"/>
-            <a:ext cx="3657600" cy="274320"/>
-          </a:xfrm>
-          <a:prstGeom prst="rect">
-            <a:avLst/>
-          </a:prstGeom>
-          <a:noFill/>
-        </p:spPr>
-        <p:txBody>
-          <a:bodyPr wrap="square">
-            <a:spAutoFit/>
-          </a:bodyPr>
-          <a:lstStyle/>
-          <a:p>
-            <a:pPr algn="ctr">
-              <a:defRPr>
-                <a:latin typeface="Roboto"/>
-              </a:defRPr>
-            </a:pPr>
-            <a:r>
-              <a:rPr sz="900" b="0">
-                <a:solidFill>
-                  <a:srgbClr val="5F6F63"/>
-                </a:solidFill>
-                <a:latin typeface="Roboto"/>
-              </a:rPr>
-              <a:t>Data retrieved 2pm, Tue 6 Oct 2026 · Sample data</a:t>
-            </a:r>
-          </a:p>
-        </p:txBody>
-      </p:sp>
-      <p:sp>
-        <p:nvSpPr>
-          <p:cNvPr id="13" name="TextBox 12"/>
-          <p:cNvSpPr txBox="1"/>
-          <p:nvPr/>
-        </p:nvSpPr>
-        <p:spPr>
-          <a:xfrm>
-            <a:off x="8503920" y="6492240"/>
-            <a:ext cx="3200400" cy="274320"/>
-          </a:xfrm>
-          <a:prstGeom prst="rect">
-            <a:avLst/>
-          </a:prstGeom>
-          <a:noFill/>
-        </p:spPr>
-        <p:txBody>
-          <a:bodyPr wrap="square">
-            <a:spAutoFit/>
-          </a:bodyPr>
-          <a:lstStyle/>
-          <a:p>
-            <a:pPr algn="r">
-              <a:defRPr>
-                <a:latin typeface="Roboto"/>
-              </a:defRPr>
-            </a:pPr>
-            <a:r>
-              <a:rPr sz="900" b="0">
-                <a:solidFill>
-                  <a:srgbClr val="5F6F63"/>
-                </a:solidFill>
-                <a:latin typeface="Roboto"/>
-              </a:rPr>
-              <a:t>Slide 6 of 10</a:t>
-            </a:r>
-          </a:p>
-        </p:txBody>
-      </p:sp>
-    </p:spTree>
-  </p:cSld>
-  <p:clrMapOvr>
-    <a:masterClrMapping/>
-  </p:clrMapOvr>
-</p:sld>
-</file>
-
-<file path=ppt/slides/slide7.xml><?xml version="1.0" encoding="utf-8"?>
-<p:sld xmlns:a="http://schemas.openxmlformats.org/drawingml/2006/main" xmlns:p="http://schemas.openxmlformats.org/presentationml/2006/main" xmlns:r="http://schemas.openxmlformats.org/officeDocument/2006/relationships">
-  <p:cSld>
-    <p:spTree>
-      <p:nvGrpSpPr>
-        <p:cNvPr id="1" name=""/>
-        <p:cNvGrpSpPr/>
-        <p:nvPr/>
-      </p:nvGrpSpPr>
-      <p:grpSpPr/>
-      <p:sp>
-        <p:nvSpPr>
-          <p:cNvPr id="2" name="Rectangle 1"/>
-          <p:cNvSpPr/>
-          <p:nvPr/>
-        </p:nvSpPr>
-        <p:spPr>
-          <a:xfrm>
-            <a:off x="0" y="0"/>
-            <a:ext cx="12191695" cy="73152"/>
-          </a:xfrm>
-          <a:prstGeom prst="rect">
-            <a:avLst/>
-          </a:prstGeom>
-          <a:solidFill>
-            <a:srgbClr val="2F7A5D"/>
-          </a:solidFill>
-          <a:ln>
-            <a:noFill/>
-          </a:ln>
-        </p:spPr>
-        <p:style>
-          <a:lnRef idx="1">
-            <a:schemeClr val="accent1"/>
-          </a:lnRef>
-          <a:fillRef idx="3">
-            <a:schemeClr val="accent1"/>
-          </a:fillRef>
-          <a:effectRef idx="2">
-            <a:schemeClr val="accent1"/>
-          </a:effectRef>
-          <a:fontRef idx="minor">
-            <a:schemeClr val="lt1"/>
-          </a:fontRef>
-        </p:style>
-        <p:txBody>
-          <a:bodyPr rtlCol="0" anchor="ctr"/>
-          <a:lstStyle/>
-          <a:p>
-            <a:pPr algn="ctr">
-              <a:defRPr>
-                <a:latin typeface="Roboto"/>
-              </a:defRPr>
-            </a:pPr>
-          </a:p>
-        </p:txBody>
-      </p:sp>
-      <p:sp>
-        <p:nvSpPr>
-          <p:cNvPr id="3" name="TextBox 2"/>
-          <p:cNvSpPr txBox="1"/>
-          <p:nvPr/>
-        </p:nvSpPr>
-        <p:spPr>
-          <a:xfrm>
-            <a:off x="457200" y="164592"/>
-            <a:ext cx="7315200" cy="274320"/>
-          </a:xfrm>
-          <a:prstGeom prst="rect">
-            <a:avLst/>
-          </a:prstGeom>
-          <a:noFill/>
-        </p:spPr>
-        <p:txBody>
-          <a:bodyPr wrap="square">
-            <a:spAutoFit/>
-          </a:bodyPr>
-          <a:lstStyle/>
-          <a:p>
-            <a:pPr>
-              <a:defRPr>
-                <a:latin typeface="Roboto"/>
-              </a:defRPr>
-            </a:pPr>
-            <a:r>
-              <a:rPr sz="1000" b="0">
-                <a:solidFill>
-                  <a:srgbClr val="5F6F63"/>
-                </a:solidFill>
-                <a:latin typeface="Roboto"/>
-              </a:rPr>
-              <a:t>Sample Community Services Ltd · Which funding is worth chasing?</a:t>
-            </a:r>
-          </a:p>
-        </p:txBody>
-      </p:sp>
-      <p:sp>
-        <p:nvSpPr>
-          <p:cNvPr id="4" name="TextBox 3"/>
-          <p:cNvSpPr txBox="1"/>
-          <p:nvPr/>
-        </p:nvSpPr>
-        <p:spPr>
-          <a:xfrm>
-            <a:off x="457200" y="411480"/>
-            <a:ext cx="11247120" cy="548640"/>
-          </a:xfrm>
-          <a:prstGeom prst="rect">
-            <a:avLst/>
-          </a:prstGeom>
-          <a:noFill/>
-        </p:spPr>
-        <p:txBody>
-          <a:bodyPr wrap="square">
-            <a:spAutoFit/>
-          </a:bodyPr>
-          <a:lstStyle/>
-          <a:p>
-            <a:pPr>
-              <a:defRPr>
-                <a:latin typeface="Roboto"/>
-              </a:defRPr>
-            </a:pPr>
-            <a:r>
-              <a:rPr sz="2400" b="1">
-                <a:solidFill>
-                  <a:srgbClr val="25342A"/>
-                </a:solidFill>
-                <a:latin typeface="Roboto"/>
-              </a:rPr>
-              <a:t>Headline numbers · Every source at once</a:t>
-            </a:r>
-          </a:p>
-        </p:txBody>
-      </p:sp>
-      <p:sp>
-        <p:nvSpPr>
-          <p:cNvPr id="5" name="Rectangle 4"/>
-          <p:cNvSpPr/>
-          <p:nvPr/>
-        </p:nvSpPr>
-        <p:spPr>
-          <a:xfrm>
-            <a:off x="457200" y="1645920"/>
-            <a:ext cx="3576218" cy="2011680"/>
-          </a:xfrm>
-          <a:prstGeom prst="rect">
-            <a:avLst/>
-          </a:prstGeom>
-          <a:solidFill>
-            <a:srgbClr val="F7FAF7"/>
-          </a:solidFill>
-          <a:ln>
-            <a:solidFill>
-              <a:srgbClr val="DCE8DC"/>
-            </a:solidFill>
-          </a:ln>
-        </p:spPr>
-        <p:style>
-          <a:lnRef idx="1">
-            <a:schemeClr val="accent1"/>
-          </a:lnRef>
-          <a:fillRef idx="3">
-            <a:schemeClr val="accent1"/>
-          </a:fillRef>
-          <a:effectRef idx="2">
-            <a:schemeClr val="accent1"/>
-          </a:effectRef>
-          <a:fontRef idx="minor">
-            <a:schemeClr val="lt1"/>
-          </a:fontRef>
-        </p:style>
-        <p:txBody>
-          <a:bodyPr rtlCol="0" anchor="ctr"/>
-          <a:lstStyle/>
-          <a:p>
-            <a:pPr algn="ctr">
-              <a:defRPr>
-                <a:latin typeface="Roboto"/>
-              </a:defRPr>
-            </a:pPr>
-          </a:p>
-        </p:txBody>
-      </p:sp>
-      <p:sp>
-        <p:nvSpPr>
-          <p:cNvPr id="6" name="TextBox 5"/>
-          <p:cNvSpPr txBox="1"/>
-          <p:nvPr/>
-        </p:nvSpPr>
-        <p:spPr>
-          <a:xfrm>
-            <a:off x="640080" y="1783080"/>
-            <a:ext cx="3210458" cy="457200"/>
-          </a:xfrm>
-          <a:prstGeom prst="rect">
-            <a:avLst/>
-          </a:prstGeom>
-          <a:noFill/>
-        </p:spPr>
-        <p:txBody>
-          <a:bodyPr wrap="square">
-            <a:spAutoFit/>
-          </a:bodyPr>
-          <a:lstStyle/>
-          <a:p>
-            <a:pPr>
-              <a:defRPr>
-                <a:latin typeface="Roboto"/>
-              </a:defRPr>
-            </a:pPr>
-            <a:r>
-              <a:rPr sz="1200" b="0">
-                <a:solidFill>
-                  <a:srgbClr val="5F6F63"/>
-                </a:solidFill>
-                <a:latin typeface="Roboto"/>
-              </a:rPr>
-              <a:t>Cheapest to raise: Grants</a:t>
-            </a:r>
-          </a:p>
-        </p:txBody>
-      </p:sp>
-      <p:sp>
-        <p:nvSpPr>
-          <p:cNvPr id="7" name="TextBox 6"/>
-          <p:cNvSpPr txBox="1"/>
-          <p:nvPr/>
-        </p:nvSpPr>
-        <p:spPr>
-          <a:xfrm>
-            <a:off x="640080" y="2240280"/>
-            <a:ext cx="3210458" cy="731520"/>
-          </a:xfrm>
-          <a:prstGeom prst="rect">
-            <a:avLst/>
-          </a:prstGeom>
-          <a:noFill/>
-        </p:spPr>
-        <p:txBody>
-          <a:bodyPr wrap="square">
-            <a:spAutoFit/>
-          </a:bodyPr>
-          <a:lstStyle/>
-          <a:p>
-            <a:pPr>
-              <a:defRPr>
-                <a:latin typeface="Roboto"/>
-              </a:defRPr>
-            </a:pPr>
-            <a:r>
-              <a:rPr sz="3000" b="1">
-                <a:solidFill>
-                  <a:srgbClr val="2F7A5D"/>
-                </a:solidFill>
-                <a:latin typeface="Roboto"/>
-              </a:rPr>
-              <a:t>10¢</a:t>
-            </a:r>
-          </a:p>
-        </p:txBody>
-      </p:sp>
-      <p:sp>
-        <p:nvSpPr>
-          <p:cNvPr id="8" name="TextBox 7"/>
-          <p:cNvSpPr txBox="1"/>
-          <p:nvPr/>
-        </p:nvSpPr>
-        <p:spPr>
-          <a:xfrm>
-            <a:off x="640080" y="3017520"/>
-            <a:ext cx="3210458" cy="548640"/>
-          </a:xfrm>
-          <a:prstGeom prst="rect">
-            <a:avLst/>
-          </a:prstGeom>
-          <a:noFill/>
-        </p:spPr>
-        <p:txBody>
-          <a:bodyPr wrap="square">
-            <a:spAutoFit/>
-          </a:bodyPr>
-          <a:lstStyle/>
-          <a:p>
-            <a:pPr>
-              <a:defRPr>
-                <a:latin typeface="Roboto"/>
-              </a:defRPr>
-            </a:pPr>
-            <a:r>
-              <a:rPr sz="1100" b="0">
-                <a:solidFill>
-                  <a:srgbClr val="5F6F63"/>
-                </a:solidFill>
-                <a:latin typeface="Roboto"/>
-              </a:rPr>
-              <a:t>per $1 raised in October</a:t>
-            </a:r>
-          </a:p>
-        </p:txBody>
-      </p:sp>
-      <p:sp>
-        <p:nvSpPr>
-          <p:cNvPr id="9" name="Rectangle 8"/>
-          <p:cNvSpPr/>
-          <p:nvPr/>
-        </p:nvSpPr>
-        <p:spPr>
-          <a:xfrm>
-            <a:off x="4307738" y="1645920"/>
-            <a:ext cx="3576218" cy="2011680"/>
-          </a:xfrm>
-          <a:prstGeom prst="rect">
-            <a:avLst/>
-          </a:prstGeom>
-          <a:solidFill>
-            <a:srgbClr val="F7FAF7"/>
-          </a:solidFill>
-          <a:ln>
-            <a:solidFill>
-              <a:srgbClr val="DCE8DC"/>
-            </a:solidFill>
-          </a:ln>
-        </p:spPr>
-        <p:style>
-          <a:lnRef idx="1">
-            <a:schemeClr val="accent1"/>
-          </a:lnRef>
-          <a:fillRef idx="3">
-            <a:schemeClr val="accent1"/>
-          </a:fillRef>
-          <a:effectRef idx="2">
-            <a:schemeClr val="accent1"/>
-          </a:effectRef>
-          <a:fontRef idx="minor">
-            <a:schemeClr val="lt1"/>
-          </a:fontRef>
-        </p:style>
-        <p:txBody>
-          <a:bodyPr rtlCol="0" anchor="ctr"/>
-          <a:lstStyle/>
-          <a:p>
-            <a:pPr algn="ctr">
-              <a:defRPr>
-                <a:latin typeface="Roboto"/>
-              </a:defRPr>
-            </a:pPr>
-          </a:p>
-        </p:txBody>
-      </p:sp>
-      <p:sp>
-        <p:nvSpPr>
-          <p:cNvPr id="10" name="TextBox 9"/>
-          <p:cNvSpPr txBox="1"/>
-          <p:nvPr/>
-        </p:nvSpPr>
-        <p:spPr>
-          <a:xfrm>
-            <a:off x="4490618" y="1783080"/>
-            <a:ext cx="3210458" cy="457200"/>
-          </a:xfrm>
-          <a:prstGeom prst="rect">
-            <a:avLst/>
-          </a:prstGeom>
-          <a:noFill/>
-        </p:spPr>
-        <p:txBody>
-          <a:bodyPr wrap="square">
-            <a:spAutoFit/>
-          </a:bodyPr>
-          <a:lstStyle/>
-          <a:p>
-            <a:pPr>
-              <a:defRPr>
-                <a:latin typeface="Roboto"/>
-              </a:defRPr>
-            </a:pPr>
-            <a:r>
-              <a:rPr sz="1200" b="0">
-                <a:solidFill>
-                  <a:srgbClr val="5F6F63"/>
-                </a:solidFill>
-                <a:latin typeface="Roboto"/>
-              </a:rPr>
-              <a:t>Dearest to raise: Donations</a:t>
-            </a:r>
-          </a:p>
-        </p:txBody>
-      </p:sp>
-      <p:sp>
-        <p:nvSpPr>
-          <p:cNvPr id="11" name="TextBox 10"/>
-          <p:cNvSpPr txBox="1"/>
-          <p:nvPr/>
-        </p:nvSpPr>
-        <p:spPr>
-          <a:xfrm>
-            <a:off x="4490618" y="2240280"/>
-            <a:ext cx="3210458" cy="731520"/>
-          </a:xfrm>
-          <a:prstGeom prst="rect">
-            <a:avLst/>
-          </a:prstGeom>
-          <a:noFill/>
-        </p:spPr>
-        <p:txBody>
-          <a:bodyPr wrap="square">
-            <a:spAutoFit/>
-          </a:bodyPr>
-          <a:lstStyle/>
-          <a:p>
-            <a:pPr>
-              <a:defRPr>
-                <a:latin typeface="Roboto"/>
-              </a:defRPr>
-            </a:pPr>
-            <a:r>
-              <a:rPr sz="3000" b="1">
-                <a:solidFill>
-                  <a:srgbClr val="2F7A5D"/>
-                </a:solidFill>
-                <a:latin typeface="Roboto"/>
-              </a:rPr>
-              <a:t>14¢</a:t>
-            </a:r>
-          </a:p>
-        </p:txBody>
-      </p:sp>
-      <p:sp>
-        <p:nvSpPr>
-          <p:cNvPr id="12" name="TextBox 11"/>
-          <p:cNvSpPr txBox="1"/>
-          <p:nvPr/>
-        </p:nvSpPr>
-        <p:spPr>
-          <a:xfrm>
-            <a:off x="4490618" y="3017520"/>
-            <a:ext cx="3210458" cy="548640"/>
-          </a:xfrm>
-          <a:prstGeom prst="rect">
-            <a:avLst/>
-          </a:prstGeom>
-          <a:noFill/>
-        </p:spPr>
-        <p:txBody>
-          <a:bodyPr wrap="square">
-            <a:spAutoFit/>
-          </a:bodyPr>
-          <a:lstStyle/>
-          <a:p>
-            <a:pPr>
-              <a:defRPr>
-                <a:latin typeface="Roboto"/>
-              </a:defRPr>
-            </a:pPr>
-            <a:r>
-              <a:rPr sz="1100" b="0">
-                <a:solidFill>
-                  <a:srgbClr val="5F6F63"/>
-                </a:solidFill>
-                <a:latin typeface="Roboto"/>
-              </a:rPr>
-              <a:t>per $1 raised in October</a:t>
-            </a:r>
-          </a:p>
-        </p:txBody>
-      </p:sp>
-      <p:sp>
-        <p:nvSpPr>
-          <p:cNvPr id="13" name="Rectangle 12"/>
-          <p:cNvSpPr/>
-          <p:nvPr/>
-        </p:nvSpPr>
-        <p:spPr>
-          <a:xfrm>
-            <a:off x="8158276" y="1645920"/>
-            <a:ext cx="3576218" cy="2011680"/>
-          </a:xfrm>
-          <a:prstGeom prst="rect">
-            <a:avLst/>
-          </a:prstGeom>
-          <a:solidFill>
-            <a:srgbClr val="F7FAF7"/>
-          </a:solidFill>
-          <a:ln>
-            <a:solidFill>
-              <a:srgbClr val="DCE8DC"/>
-            </a:solidFill>
-          </a:ln>
-        </p:spPr>
-        <p:style>
-          <a:lnRef idx="1">
-            <a:schemeClr val="accent1"/>
-          </a:lnRef>
-          <a:fillRef idx="3">
-            <a:schemeClr val="accent1"/>
-          </a:fillRef>
-          <a:effectRef idx="2">
-            <a:schemeClr val="accent1"/>
-          </a:effectRef>
-          <a:fontRef idx="minor">
-            <a:schemeClr val="lt1"/>
-          </a:fontRef>
-        </p:style>
-        <p:txBody>
-          <a:bodyPr rtlCol="0" anchor="ctr"/>
-          <a:lstStyle/>
-          <a:p>
-            <a:pPr algn="ctr">
-              <a:defRPr>
-                <a:latin typeface="Roboto"/>
-              </a:defRPr>
-            </a:pPr>
-          </a:p>
-        </p:txBody>
-      </p:sp>
-      <p:sp>
-        <p:nvSpPr>
-          <p:cNvPr id="14" name="TextBox 13"/>
-          <p:cNvSpPr txBox="1"/>
-          <p:nvPr/>
-        </p:nvSpPr>
-        <p:spPr>
-          <a:xfrm>
-            <a:off x="8341156" y="1783080"/>
-            <a:ext cx="3210458" cy="457200"/>
-          </a:xfrm>
-          <a:prstGeom prst="rect">
-            <a:avLst/>
-          </a:prstGeom>
-          <a:noFill/>
-        </p:spPr>
-        <p:txBody>
-          <a:bodyPr wrap="square">
-            <a:spAutoFit/>
-          </a:bodyPr>
-          <a:lstStyle/>
-          <a:p>
-            <a:pPr>
-              <a:defRPr>
-                <a:latin typeface="Roboto"/>
-              </a:defRPr>
-            </a:pPr>
-            <a:r>
-              <a:rPr sz="1200" b="0">
-                <a:solidFill>
-                  <a:srgbClr val="5F6F63"/>
-                </a:solidFill>
-                <a:latin typeface="Roboto"/>
-              </a:rPr>
-              <a:t>Raised, year to date</a:t>
-            </a:r>
-          </a:p>
-        </p:txBody>
-      </p:sp>
-      <p:sp>
-        <p:nvSpPr>
-          <p:cNvPr id="15" name="TextBox 14"/>
-          <p:cNvSpPr txBox="1"/>
-          <p:nvPr/>
-        </p:nvSpPr>
-        <p:spPr>
-          <a:xfrm>
-            <a:off x="8341156" y="2240280"/>
-            <a:ext cx="3210458" cy="731520"/>
-          </a:xfrm>
-          <a:prstGeom prst="rect">
-            <a:avLst/>
-          </a:prstGeom>
-          <a:noFill/>
-        </p:spPr>
-        <p:txBody>
-          <a:bodyPr wrap="square">
-            <a:spAutoFit/>
-          </a:bodyPr>
-          <a:lstStyle/>
-          <a:p>
-            <a:pPr>
-              <a:defRPr>
-                <a:latin typeface="Roboto"/>
-              </a:defRPr>
-            </a:pPr>
-            <a:r>
-              <a:rPr sz="3000" b="1">
-                <a:solidFill>
-                  <a:srgbClr val="2F7A5D"/>
-                </a:solidFill>
-                <a:latin typeface="Roboto"/>
-              </a:rPr>
-              <a:t>$350,529</a:t>
-            </a:r>
-          </a:p>
-        </p:txBody>
-      </p:sp>
-      <p:sp>
-        <p:nvSpPr>
-          <p:cNvPr id="16" name="TextBox 15"/>
-          <p:cNvSpPr txBox="1"/>
-          <p:nvPr/>
-        </p:nvSpPr>
-        <p:spPr>
-          <a:xfrm>
-            <a:off x="8341156" y="3017520"/>
-            <a:ext cx="3210458" cy="548640"/>
-          </a:xfrm>
-          <a:prstGeom prst="rect">
-            <a:avLst/>
-          </a:prstGeom>
-          <a:noFill/>
-        </p:spPr>
-        <p:txBody>
-          <a:bodyPr wrap="square">
-            <a:spAutoFit/>
-          </a:bodyPr>
-          <a:lstStyle/>
-          <a:p>
-            <a:pPr>
-              <a:defRPr>
-                <a:latin typeface="Roboto"/>
-              </a:defRPr>
-            </a:pPr>
-            <a:r>
-              <a:rPr sz="1100" b="0">
-                <a:solidFill>
-                  <a:srgbClr val="5F6F63"/>
-                </a:solidFill>
-                <a:latin typeface="Roboto"/>
-              </a:rPr>
-              <a:t>Jul to Oct 2025</a:t>
-            </a:r>
-          </a:p>
-        </p:txBody>
-      </p:sp>
-      <p:sp>
-        <p:nvSpPr>
-          <p:cNvPr id="17" name="TextBox 16"/>
-          <p:cNvSpPr txBox="1"/>
-          <p:nvPr/>
-        </p:nvSpPr>
-        <p:spPr>
-          <a:xfrm>
-            <a:off x="457200" y="6492240"/>
-            <a:ext cx="3657600" cy="274320"/>
-          </a:xfrm>
-          <a:prstGeom prst="rect">
-            <a:avLst/>
-          </a:prstGeom>
-          <a:noFill/>
-        </p:spPr>
-        <p:txBody>
-          <a:bodyPr wrap="square">
-            <a:spAutoFit/>
-          </a:bodyPr>
-          <a:lstStyle/>
-          <a:p>
-            <a:pPr>
-              <a:defRPr>
-                <a:latin typeface="Roboto"/>
-              </a:defRPr>
-            </a:pPr>
-            <a:r>
-              <a:rPr sz="900" b="0">
-                <a:solidFill>
-                  <a:srgbClr val="5F6F63"/>
-                </a:solidFill>
-                <a:latin typeface="Roboto"/>
-              </a:rPr>
-              <a:t>funding.pptx</a:t>
-            </a:r>
-          </a:p>
-        </p:txBody>
-      </p:sp>
-      <p:sp>
-        <p:nvSpPr>
-          <p:cNvPr id="18" name="TextBox 17"/>
-          <p:cNvSpPr txBox="1"/>
-          <p:nvPr/>
-        </p:nvSpPr>
-        <p:spPr>
-          <a:xfrm>
-            <a:off x="4297680" y="6492240"/>
-            <a:ext cx="3657600" cy="274320"/>
-          </a:xfrm>
-          <a:prstGeom prst="rect">
-            <a:avLst/>
-          </a:prstGeom>
-          <a:noFill/>
-        </p:spPr>
-        <p:txBody>
-          <a:bodyPr wrap="square">
-            <a:spAutoFit/>
-          </a:bodyPr>
-          <a:lstStyle/>
-          <a:p>
-            <a:pPr algn="ctr">
-              <a:defRPr>
-                <a:latin typeface="Roboto"/>
-              </a:defRPr>
-            </a:pPr>
-            <a:r>
-              <a:rPr sz="900" b="0">
-                <a:solidFill>
-                  <a:srgbClr val="5F6F63"/>
-                </a:solidFill>
-                <a:latin typeface="Roboto"/>
-              </a:rPr>
-              <a:t>Data retrieved 2pm, Tue 6 Oct 2026 · Sample data</a:t>
-            </a:r>
-          </a:p>
-        </p:txBody>
-      </p:sp>
-      <p:sp>
-        <p:nvSpPr>
-          <p:cNvPr id="19" name="TextBox 18"/>
-          <p:cNvSpPr txBox="1"/>
-          <p:nvPr/>
-        </p:nvSpPr>
-        <p:spPr>
-          <a:xfrm>
-            <a:off x="8503920" y="6492240"/>
-            <a:ext cx="3200400" cy="274320"/>
-          </a:xfrm>
-          <a:prstGeom prst="rect">
-            <a:avLst/>
-          </a:prstGeom>
-          <a:noFill/>
-        </p:spPr>
-        <p:txBody>
-          <a:bodyPr wrap="square">
-            <a:spAutoFit/>
-          </a:bodyPr>
-          <a:lstStyle/>
-          <a:p>
-            <a:pPr algn="r">
-              <a:defRPr>
-                <a:latin typeface="Roboto"/>
-              </a:defRPr>
-            </a:pPr>
-            <a:r>
-              <a:rPr sz="900" b="0">
-                <a:solidFill>
-                  <a:srgbClr val="5F6F63"/>
-                </a:solidFill>
-                <a:latin typeface="Roboto"/>
-              </a:rPr>
-              <a:t>Slide 7 of 10</a:t>
-            </a:r>
-          </a:p>
-        </p:txBody>
-      </p:sp>
-    </p:spTree>
-  </p:cSld>
-  <p:clrMapOvr>
-    <a:masterClrMapping/>
-  </p:clrMapOvr>
-</p:sld>
-</file>
-
-<file path=ppt/slides/slide8.xml><?xml version="1.0" encoding="utf-8"?>
-<p:sld xmlns:a="http://schemas.openxmlformats.org/drawingml/2006/main" xmlns:p="http://schemas.openxmlformats.org/presentationml/2006/main" xmlns:r="http://schemas.openxmlformats.org/officeDocument/2006/relationships">
-  <p:cSld>
-    <p:spTree>
-      <p:nvGrpSpPr>
-        <p:cNvPr id="1" name=""/>
-        <p:cNvGrpSpPr/>
-        <p:nvPr/>
-      </p:nvGrpSpPr>
-      <p:grpSpPr/>
-      <p:sp>
-        <p:nvSpPr>
-          <p:cNvPr id="2" name="Rectangle 1"/>
-          <p:cNvSpPr/>
-          <p:nvPr/>
-        </p:nvSpPr>
-        <p:spPr>
-          <a:xfrm>
-            <a:off x="0" y="0"/>
-            <a:ext cx="12191695" cy="73152"/>
-          </a:xfrm>
-          <a:prstGeom prst="rect">
-            <a:avLst/>
-          </a:prstGeom>
-          <a:solidFill>
-            <a:srgbClr val="2F7A5D"/>
-          </a:solidFill>
-          <a:ln>
-            <a:noFill/>
-          </a:ln>
-        </p:spPr>
-        <p:style>
-          <a:lnRef idx="1">
-            <a:schemeClr val="accent1"/>
-          </a:lnRef>
-          <a:fillRef idx="3">
-            <a:schemeClr val="accent1"/>
-          </a:fillRef>
-          <a:effectRef idx="2">
-            <a:schemeClr val="accent1"/>
-          </a:effectRef>
-          <a:fontRef idx="minor">
-            <a:schemeClr val="lt1"/>
-          </a:fontRef>
-        </p:style>
-        <p:txBody>
-          <a:bodyPr rtlCol="0" anchor="ctr"/>
-          <a:lstStyle/>
-          <a:p>
-            <a:pPr algn="ctr">
-              <a:defRPr>
-                <a:latin typeface="Roboto"/>
-              </a:defRPr>
-            </a:pPr>
-          </a:p>
-        </p:txBody>
-      </p:sp>
-      <p:sp>
-        <p:nvSpPr>
-          <p:cNvPr id="3" name="TextBox 2"/>
-          <p:cNvSpPr txBox="1"/>
-          <p:nvPr/>
-        </p:nvSpPr>
-        <p:spPr>
-          <a:xfrm>
-            <a:off x="457200" y="164592"/>
-            <a:ext cx="7315200" cy="274320"/>
-          </a:xfrm>
-          <a:prstGeom prst="rect">
-            <a:avLst/>
-          </a:prstGeom>
-          <a:noFill/>
-        </p:spPr>
-        <p:txBody>
-          <a:bodyPr wrap="square">
-            <a:spAutoFit/>
-          </a:bodyPr>
-          <a:lstStyle/>
-          <a:p>
-            <a:pPr>
-              <a:defRPr>
-                <a:latin typeface="Roboto"/>
-              </a:defRPr>
-            </a:pPr>
-            <a:r>
-              <a:rPr sz="1000" b="0">
-                <a:solidFill>
-                  <a:srgbClr val="5F6F63"/>
-                </a:solidFill>
-                <a:latin typeface="Roboto"/>
-              </a:rPr>
-              <a:t>Sample Community Services Ltd · Which funding is worth chasing?</a:t>
-            </a:r>
-          </a:p>
-        </p:txBody>
-      </p:sp>
-      <p:sp>
-        <p:nvSpPr>
-          <p:cNvPr id="4" name="TextBox 3"/>
-          <p:cNvSpPr txBox="1"/>
-          <p:nvPr/>
-        </p:nvSpPr>
-        <p:spPr>
-          <a:xfrm>
-            <a:off x="457200" y="411480"/>
-            <a:ext cx="11247120" cy="548640"/>
-          </a:xfrm>
-          <a:prstGeom prst="rect">
-            <a:avLst/>
-          </a:prstGeom>
-          <a:noFill/>
-        </p:spPr>
-        <p:txBody>
-          <a:bodyPr wrap="square">
-            <a:spAutoFit/>
-          </a:bodyPr>
-          <a:lstStyle/>
-          <a:p>
-            <a:pPr>
-              <a:defRPr>
-                <a:latin typeface="Roboto"/>
-              </a:defRPr>
-            </a:pPr>
-            <a:r>
-              <a:rPr sz="2400" b="1">
-                <a:solidFill>
-                  <a:srgbClr val="25342A"/>
-                </a:solidFill>
-                <a:latin typeface="Roboto"/>
-              </a:rPr>
-              <a:t>Financial year to date (Jul to Oct 2025), by source · Every source at once</a:t>
             </a:r>
           </a:p>
         </p:txBody>
@@ -7733,8 +7650,8 @@
           <p:nvPr/>
         </p:nvGraphicFramePr>
         <p:xfrm>
-          <a:off x="457200" y="1188720"/>
-          <a:ext cx="11247120" cy="1316736"/>
+          <a:off x="457200" y="960120"/>
+          <a:ext cx="11277295" cy="1243584"/>
         </p:xfrm>
         <a:graphic>
           <a:graphicData uri="http://schemas.openxmlformats.org/drawingml/2006/table">
@@ -7743,19 +7660,19 @@
                 <a:tableStyleId>{5C22544A-7EE6-4342-B048-85BDC9FD1C3A}</a:tableStyleId>
               </a:tblPr>
               <a:tblGrid>
-                <a:gridCol w="2249424"/>
-                <a:gridCol w="2249424"/>
-                <a:gridCol w="2249424"/>
-                <a:gridCol w="2249424"/>
-                <a:gridCol w="2249424"/>
+                <a:gridCol w="2255459"/>
+                <a:gridCol w="2255459"/>
+                <a:gridCol w="2255459"/>
+                <a:gridCol w="2255459"/>
+                <a:gridCol w="2255459"/>
               </a:tblGrid>
-              <a:tr h="329184">
+              <a:tr h="310896">
                 <a:tc>
                   <a:txBody>
                     <a:bodyPr/>
                     <a:lstStyle/>
                     <a:p>
-                      <a:pPr>
+                      <a:pPr algn="l">
                         <a:defRPr>
                           <a:latin typeface="Roboto"/>
                         </a:defRPr>
@@ -7877,13 +7794,13 @@
                   </a:tcPr>
                 </a:tc>
               </a:tr>
-              <a:tr h="329184">
+              <a:tr h="310896">
                 <a:tc>
                   <a:txBody>
                     <a:bodyPr/>
                     <a:lstStyle/>
                     <a:p>
-                      <a:pPr>
+                      <a:pPr algn="l">
                         <a:defRPr>
                           <a:latin typeface="Roboto"/>
                         </a:defRPr>
@@ -8014,13 +7931,13 @@
                   </a:tcPr>
                 </a:tc>
               </a:tr>
-              <a:tr h="329184">
+              <a:tr h="310896">
                 <a:tc>
                   <a:txBody>
                     <a:bodyPr/>
                     <a:lstStyle/>
                     <a:p>
-                      <a:pPr>
+                      <a:pPr algn="l">
                         <a:defRPr>
                           <a:latin typeface="Roboto"/>
                         </a:defRPr>
@@ -8151,13 +8068,13 @@
                   </a:tcPr>
                 </a:tc>
               </a:tr>
-              <a:tr h="329184">
+              <a:tr h="310896">
                 <a:tc>
                   <a:txBody>
                     <a:bodyPr/>
                     <a:lstStyle/>
                     <a:p>
-                      <a:pPr>
+                      <a:pPr algn="l">
                         <a:defRPr>
                           <a:latin typeface="Roboto"/>
                         </a:defRPr>
@@ -8301,7 +8218,7 @@
         <p:spPr>
           <a:xfrm>
             <a:off x="457200" y="6492240"/>
-            <a:ext cx="3657600" cy="274320"/>
+            <a:ext cx="2926080" cy="274320"/>
           </a:xfrm>
           <a:prstGeom prst="rect">
             <a:avLst/>
@@ -8309,7 +8226,7 @@
           <a:noFill/>
         </p:spPr>
         <p:txBody>
-          <a:bodyPr wrap="square">
+          <a:bodyPr wrap="square" lIns="45720" rIns="45720">
             <a:spAutoFit/>
           </a:bodyPr>
           <a:lstStyle/>
@@ -8339,8 +8256,8 @@
         </p:nvSpPr>
         <p:spPr>
           <a:xfrm>
-            <a:off x="4297680" y="6492240"/>
-            <a:ext cx="3657600" cy="274320"/>
+            <a:off x="3108960" y="6492240"/>
+            <a:ext cx="5943600" cy="274320"/>
           </a:xfrm>
           <a:prstGeom prst="rect">
             <a:avLst/>
@@ -8348,7 +8265,7 @@
           <a:noFill/>
         </p:spPr>
         <p:txBody>
-          <a:bodyPr wrap="square">
+          <a:bodyPr wrap="square" lIns="45720" rIns="45720">
             <a:spAutoFit/>
           </a:bodyPr>
           <a:lstStyle/>
@@ -8365,7 +8282,7 @@
                 </a:solidFill>
                 <a:latin typeface="Roboto"/>
               </a:rPr>
-              <a:t>Data retrieved 2pm, Tue 6 Oct 2026 · Sample data</a:t>
+              <a:t>Data retrieved 2pm, Tue 6 Oct 2026 · Generated 8 Oct 2026, 9:35am · Sample data · Made with Python (python-pptx)</a:t>
             </a:r>
           </a:p>
         </p:txBody>
@@ -8387,7 +8304,7 @@
           <a:noFill/>
         </p:spPr>
         <p:txBody>
-          <a:bodyPr wrap="square">
+          <a:bodyPr wrap="square" lIns="45720" rIns="45720">
             <a:spAutoFit/>
           </a:bodyPr>
           <a:lstStyle/>
@@ -8404,324 +8321,7 @@
                 </a:solidFill>
                 <a:latin typeface="Roboto"/>
               </a:rPr>
-              <a:t>Slide 8 of 10</a:t>
-            </a:r>
-          </a:p>
-        </p:txBody>
-      </p:sp>
-    </p:spTree>
-  </p:cSld>
-  <p:clrMapOvr>
-    <a:masterClrMapping/>
-  </p:clrMapOvr>
-</p:sld>
-</file>
-
-<file path=ppt/slides/slide9.xml><?xml version="1.0" encoding="utf-8"?>
-<p:sld xmlns:a="http://schemas.openxmlformats.org/drawingml/2006/main" xmlns:p="http://schemas.openxmlformats.org/presentationml/2006/main" xmlns:r="http://schemas.openxmlformats.org/officeDocument/2006/relationships">
-  <p:cSld>
-    <p:spTree>
-      <p:nvGrpSpPr>
-        <p:cNvPr id="1" name=""/>
-        <p:cNvGrpSpPr/>
-        <p:nvPr/>
-      </p:nvGrpSpPr>
-      <p:grpSpPr/>
-      <p:sp>
-        <p:nvSpPr>
-          <p:cNvPr id="2" name="Rectangle 1"/>
-          <p:cNvSpPr/>
-          <p:nvPr/>
-        </p:nvSpPr>
-        <p:spPr>
-          <a:xfrm>
-            <a:off x="0" y="0"/>
-            <a:ext cx="12191695" cy="73152"/>
-          </a:xfrm>
-          <a:prstGeom prst="rect">
-            <a:avLst/>
-          </a:prstGeom>
-          <a:solidFill>
-            <a:srgbClr val="2F7A5D"/>
-          </a:solidFill>
-          <a:ln>
-            <a:noFill/>
-          </a:ln>
-        </p:spPr>
-        <p:style>
-          <a:lnRef idx="1">
-            <a:schemeClr val="accent1"/>
-          </a:lnRef>
-          <a:fillRef idx="3">
-            <a:schemeClr val="accent1"/>
-          </a:fillRef>
-          <a:effectRef idx="2">
-            <a:schemeClr val="accent1"/>
-          </a:effectRef>
-          <a:fontRef idx="minor">
-            <a:schemeClr val="lt1"/>
-          </a:fontRef>
-        </p:style>
-        <p:txBody>
-          <a:bodyPr rtlCol="0" anchor="ctr"/>
-          <a:lstStyle/>
-          <a:p>
-            <a:pPr algn="ctr">
-              <a:defRPr>
-                <a:latin typeface="Roboto"/>
-              </a:defRPr>
-            </a:pPr>
-          </a:p>
-        </p:txBody>
-      </p:sp>
-      <p:sp>
-        <p:nvSpPr>
-          <p:cNvPr id="3" name="TextBox 2"/>
-          <p:cNvSpPr txBox="1"/>
-          <p:nvPr/>
-        </p:nvSpPr>
-        <p:spPr>
-          <a:xfrm>
-            <a:off x="457200" y="164592"/>
-            <a:ext cx="7315200" cy="274320"/>
-          </a:xfrm>
-          <a:prstGeom prst="rect">
-            <a:avLst/>
-          </a:prstGeom>
-          <a:noFill/>
-        </p:spPr>
-        <p:txBody>
-          <a:bodyPr wrap="square">
-            <a:spAutoFit/>
-          </a:bodyPr>
-          <a:lstStyle/>
-          <a:p>
-            <a:pPr>
-              <a:defRPr>
-                <a:latin typeface="Roboto"/>
-              </a:defRPr>
-            </a:pPr>
-            <a:r>
-              <a:rPr sz="1000" b="0">
-                <a:solidFill>
-                  <a:srgbClr val="5F6F63"/>
-                </a:solidFill>
-                <a:latin typeface="Roboto"/>
-              </a:rPr>
-              <a:t>Sample Community Services Ltd · Which funding is worth chasing?</a:t>
-            </a:r>
-          </a:p>
-        </p:txBody>
-      </p:sp>
-      <p:sp>
-        <p:nvSpPr>
-          <p:cNvPr id="4" name="TextBox 3"/>
-          <p:cNvSpPr txBox="1"/>
-          <p:nvPr/>
-        </p:nvSpPr>
-        <p:spPr>
-          <a:xfrm>
-            <a:off x="457200" y="411480"/>
-            <a:ext cx="11247120" cy="548640"/>
-          </a:xfrm>
-          <a:prstGeom prst="rect">
-            <a:avLst/>
-          </a:prstGeom>
-          <a:noFill/>
-        </p:spPr>
-        <p:txBody>
-          <a:bodyPr wrap="square">
-            <a:spAutoFit/>
-          </a:bodyPr>
-          <a:lstStyle/>
-          <a:p>
-            <a:pPr>
-              <a:defRPr>
-                <a:latin typeface="Roboto"/>
-              </a:defRPr>
-            </a:pPr>
-            <a:r>
-              <a:rPr sz="2400" b="1">
-                <a:solidFill>
-                  <a:srgbClr val="25342A"/>
-                </a:solidFill>
-                <a:latin typeface="Roboto"/>
-              </a:rPr>
-              <a:t>Raised and left after costs, by month · Raised $ · Every source at once</a:t>
-            </a:r>
-          </a:p>
-        </p:txBody>
-      </p:sp>
-      <p:sp>
-        <p:nvSpPr>
-          <p:cNvPr id="5" name="TextBox 4"/>
-          <p:cNvSpPr txBox="1"/>
-          <p:nvPr/>
-        </p:nvSpPr>
-        <p:spPr>
-          <a:xfrm>
-            <a:off x="457200" y="960120"/>
-            <a:ext cx="11247120" cy="457200"/>
-          </a:xfrm>
-          <a:prstGeom prst="rect">
-            <a:avLst/>
-          </a:prstGeom>
-          <a:noFill/>
-        </p:spPr>
-        <p:txBody>
-          <a:bodyPr wrap="square">
-            <a:spAutoFit/>
-          </a:bodyPr>
-          <a:lstStyle/>
-          <a:p>
-            <a:pPr>
-              <a:defRPr>
-                <a:latin typeface="Roboto"/>
-              </a:defRPr>
-            </a:pPr>
-            <a:r>
-              <a:rPr sz="1200" b="0">
-                <a:solidFill>
-                  <a:srgbClr val="5F6F63"/>
-                </a:solidFill>
-                <a:latin typeface="Roboto"/>
-              </a:rPr>
-              <a:t>Tap a month for its workings.</a:t>
-            </a:r>
-          </a:p>
-        </p:txBody>
-      </p:sp>
-      <p:graphicFrame>
-        <p:nvGraphicFramePr>
-          <p:cNvPr id="6" name="Chart 5"/>
-          <p:cNvGraphicFramePr>
-            <a:graphicFrameLocks noGrp="1"/>
-          </p:cNvGraphicFramePr>
-          <p:nvPr/>
-        </p:nvGraphicFramePr>
-        <p:xfrm>
-          <a:off x="457200" y="1463040"/>
-          <a:ext cx="11247120" cy="4754880"/>
-        </p:xfrm>
-        <a:graphic>
-          <a:graphicData uri="http://schemas.openxmlformats.org/drawingml/2006/chart">
-            <c:chart xmlns:c="http://schemas.openxmlformats.org/drawingml/2006/chart" r:id="rId2"/>
-          </a:graphicData>
-        </a:graphic>
-      </p:graphicFrame>
-      <p:sp>
-        <p:nvSpPr>
-          <p:cNvPr id="7" name="TextBox 6"/>
-          <p:cNvSpPr txBox="1"/>
-          <p:nvPr/>
-        </p:nvSpPr>
-        <p:spPr>
-          <a:xfrm>
-            <a:off x="457200" y="6492240"/>
-            <a:ext cx="3657600" cy="274320"/>
-          </a:xfrm>
-          <a:prstGeom prst="rect">
-            <a:avLst/>
-          </a:prstGeom>
-          <a:noFill/>
-        </p:spPr>
-        <p:txBody>
-          <a:bodyPr wrap="square">
-            <a:spAutoFit/>
-          </a:bodyPr>
-          <a:lstStyle/>
-          <a:p>
-            <a:pPr>
-              <a:defRPr>
-                <a:latin typeface="Roboto"/>
-              </a:defRPr>
-            </a:pPr>
-            <a:r>
-              <a:rPr sz="900" b="0">
-                <a:solidFill>
-                  <a:srgbClr val="5F6F63"/>
-                </a:solidFill>
-                <a:latin typeface="Roboto"/>
-              </a:rPr>
-              <a:t>funding.pptx</a:t>
-            </a:r>
-          </a:p>
-        </p:txBody>
-      </p:sp>
-      <p:sp>
-        <p:nvSpPr>
-          <p:cNvPr id="8" name="TextBox 7"/>
-          <p:cNvSpPr txBox="1"/>
-          <p:nvPr/>
-        </p:nvSpPr>
-        <p:spPr>
-          <a:xfrm>
-            <a:off x="4297680" y="6492240"/>
-            <a:ext cx="3657600" cy="274320"/>
-          </a:xfrm>
-          <a:prstGeom prst="rect">
-            <a:avLst/>
-          </a:prstGeom>
-          <a:noFill/>
-        </p:spPr>
-        <p:txBody>
-          <a:bodyPr wrap="square">
-            <a:spAutoFit/>
-          </a:bodyPr>
-          <a:lstStyle/>
-          <a:p>
-            <a:pPr algn="ctr">
-              <a:defRPr>
-                <a:latin typeface="Roboto"/>
-              </a:defRPr>
-            </a:pPr>
-            <a:r>
-              <a:rPr sz="900" b="0">
-                <a:solidFill>
-                  <a:srgbClr val="5F6F63"/>
-                </a:solidFill>
-                <a:latin typeface="Roboto"/>
-              </a:rPr>
-              <a:t>Data retrieved 2pm, Tue 6 Oct 2026 · Sample data</a:t>
-            </a:r>
-          </a:p>
-        </p:txBody>
-      </p:sp>
-      <p:sp>
-        <p:nvSpPr>
-          <p:cNvPr id="9" name="TextBox 8"/>
-          <p:cNvSpPr txBox="1"/>
-          <p:nvPr/>
-        </p:nvSpPr>
-        <p:spPr>
-          <a:xfrm>
-            <a:off x="8503920" y="6492240"/>
-            <a:ext cx="3200400" cy="274320"/>
-          </a:xfrm>
-          <a:prstGeom prst="rect">
-            <a:avLst/>
-          </a:prstGeom>
-          <a:noFill/>
-        </p:spPr>
-        <p:txBody>
-          <a:bodyPr wrap="square">
-            <a:spAutoFit/>
-          </a:bodyPr>
-          <a:lstStyle/>
-          <a:p>
-            <a:pPr algn="r">
-              <a:defRPr>
-                <a:latin typeface="Roboto"/>
-              </a:defRPr>
-            </a:pPr>
-            <a:r>
-              <a:rPr sz="900" b="0">
-                <a:solidFill>
-                  <a:srgbClr val="5F6F63"/>
-                </a:solidFill>
-                <a:latin typeface="Roboto"/>
-              </a:rPr>
-              <a:t>Slide 9 of 10</a:t>
+              <a:t>Slide 6 of 6</a:t>
             </a:r>
           </a:p>
         </p:txBody>
@@ -8735,6 +8335,326 @@
 </file>
 
 <file path=ppt/theme/theme1.xml><?xml version="1.0" encoding="utf-8"?>
+<a:theme xmlns:a="http://schemas.openxmlformats.org/drawingml/2006/main" name="Office Theme">
+  <a:themeElements>
+    <a:clrScheme name="Office">
+      <a:dk1>
+        <a:sysClr val="windowText" lastClr="000000"/>
+      </a:dk1>
+      <a:lt1>
+        <a:sysClr val="window" lastClr="FFFFFF"/>
+      </a:lt1>
+      <a:dk2>
+        <a:srgbClr val="25342A"/>
+      </a:dk2>
+      <a:lt2>
+        <a:srgbClr val="F4F7F2"/>
+      </a:lt2>
+      <a:accent1>
+        <a:srgbClr val="2F7A5D"/>
+      </a:accent1>
+      <a:accent2>
+        <a:srgbClr val="0E9F6E"/>
+      </a:accent2>
+      <a:accent3>
+        <a:srgbClr val="7D8790"/>
+      </a:accent3>
+      <a:accent4>
+        <a:srgbClr val="8A6D3B"/>
+      </a:accent4>
+      <a:accent5>
+        <a:srgbClr val="B42318"/>
+      </a:accent5>
+      <a:accent6>
+        <a:srgbClr val="8E9CAB"/>
+      </a:accent6>
+      <a:hlink>
+        <a:srgbClr val="0000FF"/>
+      </a:hlink>
+      <a:folHlink>
+        <a:srgbClr val="800080"/>
+      </a:folHlink>
+    </a:clrScheme>
+    <a:fontScheme name="Office">
+      <a:majorFont>
+        <a:latin typeface="Roboto"/>
+        <a:ea typeface=""/>
+        <a:cs typeface=""/>
+        <a:font script="Jpan" typeface="ＭＳ Ｐゴシック"/>
+        <a:font script="Hang" typeface="맑은 고딕"/>
+        <a:font script="Hans" typeface="宋体"/>
+        <a:font script="Hant" typeface="新細明體"/>
+        <a:font script="Arab" typeface="Times New Roman"/>
+        <a:font script="Hebr" typeface="Times New Roman"/>
+        <a:font script="Thai" typeface="Angsana New"/>
+        <a:font script="Ethi" typeface="Nyala"/>
+        <a:font script="Beng" typeface="Vrinda"/>
+        <a:font script="Gujr" typeface="Shruti"/>
+        <a:font script="Khmr" typeface="MoolBoran"/>
+        <a:font script="Knda" typeface="Tunga"/>
+        <a:font script="Guru" typeface="Raavi"/>
+        <a:font script="Cans" typeface="Euphemia"/>
+        <a:font script="Cher" typeface="Plantagenet Cherokee"/>
+        <a:font script="Yiii" typeface="Microsoft Yi Baiti"/>
+        <a:font script="Tibt" typeface="Microsoft Himalaya"/>
+        <a:font script="Thaa" typeface="MV Boli"/>
+        <a:font script="Deva" typeface="Mangal"/>
+        <a:font script="Telu" typeface="Gautami"/>
+        <a:font script="Taml" typeface="Latha"/>
+        <a:font script="Syrc" typeface="Estrangelo Edessa"/>
+        <a:font script="Orya" typeface="Kalinga"/>
+        <a:font script="Mlym" typeface="Kartika"/>
+        <a:font script="Laoo" typeface="DokChampa"/>
+        <a:font script="Sinh" typeface="Iskoola Pota"/>
+        <a:font script="Mong" typeface="Mongolian Baiti"/>
+        <a:font script="Viet" typeface="Times New Roman"/>
+        <a:font script="Uigh" typeface="Microsoft Uighur"/>
+        <a:font script="Geor" typeface="Sylfaen"/>
+      </a:majorFont>
+      <a:minorFont>
+        <a:latin typeface="Roboto"/>
+        <a:ea typeface=""/>
+        <a:cs typeface=""/>
+        <a:font script="Jpan" typeface="ＭＳ Ｐゴシック"/>
+        <a:font script="Hang" typeface="맑은 고딕"/>
+        <a:font script="Hans" typeface="宋体"/>
+        <a:font script="Hant" typeface="新細明體"/>
+        <a:font script="Arab" typeface="Arial"/>
+        <a:font script="Hebr" typeface="Arial"/>
+        <a:font script="Thai" typeface="Cordia New"/>
+        <a:font script="Ethi" typeface="Nyala"/>
+        <a:font script="Beng" typeface="Vrinda"/>
+        <a:font script="Gujr" typeface="Shruti"/>
+        <a:font script="Khmr" typeface="DaunPenh"/>
+        <a:font script="Knda" typeface="Tunga"/>
+        <a:font script="Guru" typeface="Raavi"/>
+        <a:font script="Cans" typeface="Euphemia"/>
+        <a:font script="Cher" typeface="Plantagenet Cherokee"/>
+        <a:font script="Yiii" typeface="Microsoft Yi Baiti"/>
+        <a:font script="Tibt" typeface="Microsoft Himalaya"/>
+        <a:font script="Thaa" typeface="MV Boli"/>
+        <a:font script="Deva" typeface="Mangal"/>
+        <a:font script="Telu" typeface="Gautami"/>
+        <a:font script="Taml" typeface="Latha"/>
+        <a:font script="Syrc" typeface="Estrangelo Edessa"/>
+        <a:font script="Orya" typeface="Kalinga"/>
+        <a:font script="Mlym" typeface="Kartika"/>
+        <a:font script="Laoo" typeface="DokChampa"/>
+        <a:font script="Sinh" typeface="Iskoola Pota"/>
+        <a:font script="Mong" typeface="Mongolian Baiti"/>
+        <a:font script="Viet" typeface="Arial"/>
+        <a:font script="Uigh" typeface="Microsoft Uighur"/>
+        <a:font script="Geor" typeface="Sylfaen"/>
+      </a:minorFont>
+    </a:fontScheme>
+    <a:fmtScheme name="Office">
+      <a:fillStyleLst>
+        <a:solidFill>
+          <a:schemeClr val="phClr"/>
+        </a:solidFill>
+        <a:gradFill rotWithShape="1">
+          <a:gsLst>
+            <a:gs pos="0">
+              <a:schemeClr val="phClr">
+                <a:tint val="50000"/>
+                <a:satMod val="300000"/>
+              </a:schemeClr>
+            </a:gs>
+            <a:gs pos="35000">
+              <a:schemeClr val="phClr">
+                <a:tint val="37000"/>
+                <a:satMod val="300000"/>
+              </a:schemeClr>
+            </a:gs>
+            <a:gs pos="100000">
+              <a:schemeClr val="phClr">
+                <a:tint val="15000"/>
+                <a:satMod val="350000"/>
+              </a:schemeClr>
+            </a:gs>
+          </a:gsLst>
+          <a:lin ang="16200000" scaled="1"/>
+        </a:gradFill>
+        <a:gradFill rotWithShape="1">
+          <a:gsLst>
+            <a:gs pos="0">
+              <a:schemeClr val="phClr">
+                <a:tint val="100000"/>
+                <a:shade val="100000"/>
+                <a:satMod val="130000"/>
+              </a:schemeClr>
+            </a:gs>
+            <a:gs pos="100000">
+              <a:schemeClr val="phClr">
+                <a:tint val="50000"/>
+                <a:shade val="100000"/>
+                <a:satMod val="350000"/>
+              </a:schemeClr>
+            </a:gs>
+          </a:gsLst>
+          <a:lin ang="16200000" scaled="0"/>
+        </a:gradFill>
+      </a:fillStyleLst>
+      <a:lnStyleLst>
+        <a:ln w="9525" cap="flat" cmpd="sng" algn="ctr">
+          <a:solidFill>
+            <a:schemeClr val="phClr">
+              <a:shade val="95000"/>
+              <a:satMod val="105000"/>
+            </a:schemeClr>
+          </a:solidFill>
+          <a:prstDash val="solid"/>
+        </a:ln>
+        <a:ln w="25400" cap="flat" cmpd="sng" algn="ctr">
+          <a:solidFill>
+            <a:schemeClr val="phClr"/>
+          </a:solidFill>
+          <a:prstDash val="solid"/>
+        </a:ln>
+        <a:ln w="38100" cap="flat" cmpd="sng" algn="ctr">
+          <a:solidFill>
+            <a:schemeClr val="phClr"/>
+          </a:solidFill>
+          <a:prstDash val="solid"/>
+        </a:ln>
+      </a:lnStyleLst>
+      <a:effectStyleLst>
+        <a:effectStyle>
+          <a:effectLst>
+            <a:outerShdw blurRad="40000" dist="20000" dir="5400000" rotWithShape="0">
+              <a:srgbClr val="000000">
+                <a:alpha val="38000"/>
+              </a:srgbClr>
+            </a:outerShdw>
+          </a:effectLst>
+        </a:effectStyle>
+        <a:effectStyle>
+          <a:effectLst>
+            <a:outerShdw blurRad="40000" dist="23000" dir="5400000" rotWithShape="0">
+              <a:srgbClr val="000000">
+                <a:alpha val="35000"/>
+              </a:srgbClr>
+            </a:outerShdw>
+          </a:effectLst>
+        </a:effectStyle>
+        <a:effectStyle>
+          <a:effectLst>
+            <a:outerShdw blurRad="40000" dist="23000" dir="5400000" rotWithShape="0">
+              <a:srgbClr val="000000">
+                <a:alpha val="35000"/>
+              </a:srgbClr>
+            </a:outerShdw>
+          </a:effectLst>
+          <a:scene3d>
+            <a:camera prst="orthographicFront">
+              <a:rot lat="0" lon="0" rev="0"/>
+            </a:camera>
+            <a:lightRig rig="threePt" dir="t">
+              <a:rot lat="0" lon="0" rev="1200000"/>
+            </a:lightRig>
+          </a:scene3d>
+          <a:sp3d>
+            <a:bevelT w="63500" h="25400"/>
+          </a:sp3d>
+        </a:effectStyle>
+      </a:effectStyleLst>
+      <a:bgFillStyleLst>
+        <a:solidFill>
+          <a:schemeClr val="phClr"/>
+        </a:solidFill>
+        <a:gradFill rotWithShape="1">
+          <a:gsLst>
+            <a:gs pos="0">
+              <a:schemeClr val="phClr">
+                <a:tint val="40000"/>
+                <a:satMod val="350000"/>
+              </a:schemeClr>
+            </a:gs>
+            <a:gs pos="40000">
+              <a:schemeClr val="phClr">
+                <a:tint val="45000"/>
+                <a:shade val="99000"/>
+                <a:satMod val="350000"/>
+              </a:schemeClr>
+            </a:gs>
+            <a:gs pos="100000">
+              <a:schemeClr val="phClr">
+                <a:shade val="20000"/>
+                <a:satMod val="255000"/>
+              </a:schemeClr>
+            </a:gs>
+          </a:gsLst>
+          <a:path path="circle">
+            <a:fillToRect l="50000" t="-80000" r="50000" b="180000"/>
+          </a:path>
+        </a:gradFill>
+        <a:gradFill rotWithShape="1">
+          <a:gsLst>
+            <a:gs pos="0">
+              <a:schemeClr val="phClr">
+                <a:tint val="80000"/>
+                <a:satMod val="300000"/>
+              </a:schemeClr>
+            </a:gs>
+            <a:gs pos="100000">
+              <a:schemeClr val="phClr">
+                <a:shade val="30000"/>
+                <a:satMod val="200000"/>
+              </a:schemeClr>
+            </a:gs>
+          </a:gsLst>
+          <a:path path="circle">
+            <a:fillToRect l="50000" t="50000" r="50000" b="50000"/>
+          </a:path>
+        </a:gradFill>
+      </a:bgFillStyleLst>
+    </a:fmtScheme>
+  </a:themeElements>
+  <a:objectDefaults>
+    <a:spDef>
+      <a:spPr/>
+      <a:bodyPr/>
+      <a:lstStyle/>
+      <a:style>
+        <a:lnRef idx="1">
+          <a:schemeClr val="accent1"/>
+        </a:lnRef>
+        <a:fillRef idx="3">
+          <a:schemeClr val="accent1"/>
+        </a:fillRef>
+        <a:effectRef idx="2">
+          <a:schemeClr val="accent1"/>
+        </a:effectRef>
+        <a:fontRef idx="minor">
+          <a:schemeClr val="lt1"/>
+        </a:fontRef>
+      </a:style>
+    </a:spDef>
+    <a:lnDef>
+      <a:spPr/>
+      <a:bodyPr/>
+      <a:lstStyle/>
+      <a:style>
+        <a:lnRef idx="2">
+          <a:schemeClr val="accent1"/>
+        </a:lnRef>
+        <a:fillRef idx="0">
+          <a:schemeClr val="accent1"/>
+        </a:fillRef>
+        <a:effectRef idx="1">
+          <a:schemeClr val="accent1"/>
+        </a:effectRef>
+        <a:fontRef idx="minor">
+          <a:schemeClr val="tx1"/>
+        </a:fontRef>
+      </a:style>
+    </a:lnDef>
+  </a:objectDefaults>
+  <a:extraClrSchemeLst/>
+</a:theme>
+</file>
+
+<file path=ppt/theme/theme2.xml><?xml version="1.0" encoding="utf-8"?>
 <a:theme xmlns:a="http://schemas.openxmlformats.org/drawingml/2006/main" name="Office Theme">
   <a:themeElements>
     <a:clrScheme name="Office">

--- a/media/exports/reports/2025-10/funding.pptx
+++ b/media/exports/reports/2025-10/funding.pptx
@@ -11,6 +11,7 @@
     <p:sldId id="259" r:id="rId11"/>
     <p:sldId id="260" r:id="rId12"/>
     <p:sldId id="261" r:id="rId13"/>
+    <p:sldId id="262" r:id="rId14"/>
   </p:sldIdLst>
   <p:sldSz cx="12191695" cy="6858000" type="screen4x3"/>
   <p:notesSz cx="6858000" cy="9144000"/>
@@ -1415,7 +1416,7 @@
           <a:lstStyle/>
           <a:p>
             <a:r>
-              <a:t>Which funding is worth chasing?. Sample Community Services Ltd. Period: October 2025. Each source of money compared on what it raises and what it costs to raise. Pick a source and every chart, table row and note follows it.</a:t>
+              <a:t>Which funding is worth chasing?. Sample Community Services Ltd. Period: October 2025. In short: Grants cost 10¢ to raise each dollar in October; donations 14¢. Each source of money compared on what it raises and what it costs to raise. Pick a source and every chart, table row and note follows it.</a:t>
             </a:r>
           </a:p>
         </p:txBody>
@@ -1721,6 +1722,76 @@
 </file>
 
 <file path=ppt/notesSlides/notesSlide6.xml><?xml version="1.0" encoding="utf-8"?>
+<p:notes xmlns:a="http://schemas.openxmlformats.org/drawingml/2006/main" xmlns:p="http://schemas.openxmlformats.org/presentationml/2006/main" xmlns:r="http://schemas.openxmlformats.org/officeDocument/2006/relationships">
+  <p:cSld>
+    <p:spTree>
+      <p:nvGrpSpPr>
+        <p:cNvPr id="1" name=""/>
+        <p:cNvGrpSpPr/>
+        <p:nvPr/>
+      </p:nvGrpSpPr>
+      <p:grpSpPr>
+        <a:xfrm>
+          <a:off x="0" y="0"/>
+          <a:ext cx="0" cy="0"/>
+          <a:chOff x="0" y="0"/>
+          <a:chExt cx="0" cy="0"/>
+        </a:xfrm>
+      </p:grpSpPr>
+      <p:sp>
+        <p:nvSpPr>
+          <p:cNvPr id="2" name="Slide Image Placeholder 1"/>
+          <p:cNvSpPr>
+            <a:spLocks noGrp="1"/>
+          </p:cNvSpPr>
+          <p:nvPr>
+            <p:ph type="sldImg" idx="2"/>
+          </p:nvPr>
+        </p:nvSpPr>
+        <p:spPr/>
+      </p:sp>
+      <p:sp>
+        <p:nvSpPr>
+          <p:cNvPr id="3" name="Notes Placeholder 2"/>
+          <p:cNvSpPr>
+            <a:spLocks noGrp="1"/>
+          </p:cNvSpPr>
+          <p:nvPr>
+            <p:ph type="body" idx="3" sz="quarter"/>
+          </p:nvPr>
+        </p:nvSpPr>
+        <p:spPr/>
+        <p:txBody>
+          <a:bodyPr/>
+          <a:lstStyle/>
+          <a:p>
+            <a:r>
+              <a:t>Which funding is worth chasing?: Cheapest to raise: Grants 10¢; Dearest to raise: Donations 14¢; Raised, year to date $350,529.</a:t>
+            </a:r>
+          </a:p>
+        </p:txBody>
+      </p:sp>
+      <p:sp>
+        <p:nvSpPr>
+          <p:cNvPr id="4" name="Slide Number Placeholder 3"/>
+          <p:cNvSpPr>
+            <a:spLocks noGrp="1"/>
+          </p:cNvSpPr>
+          <p:nvPr>
+            <p:ph type="sldNum" idx="5" sz="quarter"/>
+          </p:nvPr>
+        </p:nvSpPr>
+        <p:spPr/>
+      </p:sp>
+    </p:spTree>
+  </p:cSld>
+  <p:clrMapOvr>
+    <a:masterClrMapping/>
+  </p:clrMapOvr>
+</p:notes>
+</file>
+
+<file path=ppt/notesSlides/notesSlide7.xml><?xml version="1.0" encoding="utf-8"?>
 <p:notes xmlns:a="http://schemas.openxmlformats.org/drawingml/2006/main" xmlns:p="http://schemas.openxmlformats.org/presentationml/2006/main" xmlns:r="http://schemas.openxmlformats.org/officeDocument/2006/relationships">
   <p:cSld>
     <p:spTree>
@@ -5015,7 +5086,7 @@
                 </a:solidFill>
                 <a:latin typeface="Roboto"/>
               </a:rPr>
-              <a:t>Period: October 2025. Each source of money compared on what it raises and what it costs to raise. Pick a source and every chart, table row and note follows it.</a:t>
+              <a:t>Period: October 2025. In short: Grants cost 10¢ to raise each dollar in October; donations 14¢. Each source of money compared on what it raises and what it costs to raise. Pick a source and every chart, table row and note follows it.</a:t>
             </a:r>
           </a:p>
         </p:txBody>
@@ -5180,7 +5251,7 @@
                 </a:solidFill>
                 <a:latin typeface="Roboto"/>
               </a:rPr>
-              <a:t>Data retrieved 2pm, Tue 6 Oct 2026 · Generated 8 Oct 2026, 9:35am · Sample data · Made with Python (python-pptx)</a:t>
+              <a:t>Data retrieved 2pm, Tue 6 Oct 2026 · Generated 10 Oct 2026, 9:55pm · Sample data · Made with Python (python-pptx)</a:t>
             </a:r>
           </a:p>
         </p:txBody>
@@ -5219,7 +5290,7 @@
                 </a:solidFill>
                 <a:latin typeface="Roboto"/>
               </a:rPr>
-              <a:t>Slide 1 of 6</a:t>
+              <a:t>Slide 1 of 7</a:t>
             </a:r>
           </a:p>
         </p:txBody>
@@ -5749,7 +5820,7 @@
                 </a:solidFill>
                 <a:latin typeface="Roboto"/>
               </a:rPr>
-              <a:t>Data retrieved 2pm, Tue 6 Oct 2026 · Generated 8 Oct 2026, 9:35am · Sample data · Made with Python (python-pptx)</a:t>
+              <a:t>Data retrieved 2pm, Tue 6 Oct 2026 · Generated 10 Oct 2026, 9:55pm · Sample data · Made with Python (python-pptx)</a:t>
             </a:r>
           </a:p>
         </p:txBody>
@@ -5788,7 +5859,7 @@
                 </a:solidFill>
                 <a:latin typeface="Roboto"/>
               </a:rPr>
-              <a:t>Slide 2 of 6</a:t>
+              <a:t>Slide 2 of 7</a:t>
             </a:r>
           </a:p>
         </p:txBody>
@@ -6318,7 +6389,7 @@
                 </a:solidFill>
                 <a:latin typeface="Roboto"/>
               </a:rPr>
-              <a:t>Data retrieved 2pm, Tue 6 Oct 2026 · Generated 8 Oct 2026, 9:35am · Sample data · Made with Python (python-pptx)</a:t>
+              <a:t>Data retrieved 2pm, Tue 6 Oct 2026 · Generated 10 Oct 2026, 9:55pm · Sample data · Made with Python (python-pptx)</a:t>
             </a:r>
           </a:p>
         </p:txBody>
@@ -6357,7 +6428,7 @@
                 </a:solidFill>
                 <a:latin typeface="Roboto"/>
               </a:rPr>
-              <a:t>Slide 3 of 6</a:t>
+              <a:t>Slide 3 of 7</a:t>
             </a:r>
           </a:p>
         </p:txBody>
@@ -6887,7 +6958,7 @@
                 </a:solidFill>
                 <a:latin typeface="Roboto"/>
               </a:rPr>
-              <a:t>Data retrieved 2pm, Tue 6 Oct 2026 · Generated 8 Oct 2026, 9:35am · Sample data · Made with Python (python-pptx)</a:t>
+              <a:t>Data retrieved 2pm, Tue 6 Oct 2026 · Generated 10 Oct 2026, 9:55pm · Sample data · Made with Python (python-pptx)</a:t>
             </a:r>
           </a:p>
         </p:txBody>
@@ -6926,7 +6997,7 @@
                 </a:solidFill>
                 <a:latin typeface="Roboto"/>
               </a:rPr>
-              <a:t>Slide 4 of 6</a:t>
+              <a:t>Slide 4 of 7</a:t>
             </a:r>
           </a:p>
         </p:txBody>
@@ -7456,7 +7527,7 @@
                 </a:solidFill>
                 <a:latin typeface="Roboto"/>
               </a:rPr>
-              <a:t>Data retrieved 2pm, Tue 6 Oct 2026 · Generated 8 Oct 2026, 9:35am · Sample data · Made with Python (python-pptx)</a:t>
+              <a:t>Data retrieved 2pm, Tue 6 Oct 2026 · Generated 10 Oct 2026, 9:55pm · Sample data · Made with Python (python-pptx)</a:t>
             </a:r>
           </a:p>
         </p:txBody>
@@ -7495,7 +7566,7 @@
                 </a:solidFill>
                 <a:latin typeface="Roboto"/>
               </a:rPr>
-              <a:t>Slide 5 of 6</a:t>
+              <a:t>Slide 5 of 7</a:t>
             </a:r>
           </a:p>
         </p:txBody>
@@ -7509,6 +7580,762 @@
 </file>
 
 <file path=ppt/slides/slide6.xml><?xml version="1.0" encoding="utf-8"?>
+<p:sld xmlns:a="http://schemas.openxmlformats.org/drawingml/2006/main" xmlns:p="http://schemas.openxmlformats.org/presentationml/2006/main" xmlns:r="http://schemas.openxmlformats.org/officeDocument/2006/relationships">
+  <p:cSld>
+    <p:spTree>
+      <p:nvGrpSpPr>
+        <p:cNvPr id="1" name=""/>
+        <p:cNvGrpSpPr/>
+        <p:nvPr/>
+      </p:nvGrpSpPr>
+      <p:grpSpPr/>
+      <p:sp>
+        <p:nvSpPr>
+          <p:cNvPr id="2" name="Title 1"/>
+          <p:cNvSpPr>
+            <a:spLocks noGrp="1"/>
+          </p:cNvSpPr>
+          <p:nvPr>
+            <p:ph type="title"/>
+          </p:nvPr>
+        </p:nvSpPr>
+        <p:spPr>
+          <a:xfrm>
+            <a:off x="457200" y="384048"/>
+            <a:ext cx="11277295" cy="475488"/>
+          </a:xfrm>
+        </p:spPr>
+        <p:txBody>
+          <a:bodyPr wrap="square" lIns="45720" rIns="45720" tIns="0" bIns="0" anchor="t"/>
+          <a:lstStyle/>
+          <a:p>
+            <a:pPr algn="l">
+              <a:defRPr>
+                <a:latin typeface="Roboto"/>
+              </a:defRPr>
+            </a:pPr>
+            <a:r>
+              <a:rPr sz="2400" b="1">
+                <a:solidFill>
+                  <a:srgbClr val="25342A"/>
+                </a:solidFill>
+                <a:latin typeface="Roboto"/>
+              </a:rPr>
+              <a:t>Which funding is worth chasing?</a:t>
+            </a:r>
+          </a:p>
+        </p:txBody>
+      </p:sp>
+      <p:sp>
+        <p:nvSpPr>
+          <p:cNvPr id="3" name="Rectangle 2"/>
+          <p:cNvSpPr/>
+          <p:nvPr/>
+        </p:nvSpPr>
+        <p:spPr>
+          <a:xfrm>
+            <a:off x="0" y="0"/>
+            <a:ext cx="12191695" cy="73152"/>
+          </a:xfrm>
+          <a:prstGeom prst="rect">
+            <a:avLst/>
+          </a:prstGeom>
+          <a:solidFill>
+            <a:srgbClr val="2F7A5D"/>
+          </a:solidFill>
+          <a:ln>
+            <a:noFill/>
+          </a:ln>
+        </p:spPr>
+        <p:style>
+          <a:lnRef idx="1">
+            <a:schemeClr val="accent1"/>
+          </a:lnRef>
+          <a:fillRef idx="3">
+            <a:schemeClr val="accent1"/>
+          </a:fillRef>
+          <a:effectRef idx="2">
+            <a:schemeClr val="accent1"/>
+          </a:effectRef>
+          <a:fontRef idx="minor">
+            <a:schemeClr val="lt1"/>
+          </a:fontRef>
+        </p:style>
+        <p:txBody>
+          <a:bodyPr rtlCol="0" anchor="ctr"/>
+          <a:lstStyle/>
+          <a:p>
+            <a:pPr algn="ctr">
+              <a:defRPr>
+                <a:latin typeface="Roboto"/>
+              </a:defRPr>
+            </a:pPr>
+          </a:p>
+        </p:txBody>
+      </p:sp>
+      <p:sp>
+        <p:nvSpPr>
+          <p:cNvPr id="4" name="TextBox 3"/>
+          <p:cNvSpPr txBox="1"/>
+          <p:nvPr/>
+        </p:nvSpPr>
+        <p:spPr>
+          <a:xfrm>
+            <a:off x="457200" y="146304"/>
+            <a:ext cx="8229600" cy="256032"/>
+          </a:xfrm>
+          <a:prstGeom prst="rect">
+            <a:avLst/>
+          </a:prstGeom>
+          <a:noFill/>
+        </p:spPr>
+        <p:txBody>
+          <a:bodyPr wrap="square" lIns="45720" rIns="45720">
+            <a:spAutoFit/>
+          </a:bodyPr>
+          <a:lstStyle/>
+          <a:p>
+            <a:pPr>
+              <a:defRPr>
+                <a:latin typeface="Roboto"/>
+              </a:defRPr>
+            </a:pPr>
+            <a:r>
+              <a:rPr sz="1000" b="0">
+                <a:solidFill>
+                  <a:srgbClr val="5F6F63"/>
+                </a:solidFill>
+                <a:latin typeface="Roboto"/>
+              </a:rPr>
+              <a:t>Sample Community Services Ltd · Which funding is worth chasing?</a:t>
+            </a:r>
+          </a:p>
+        </p:txBody>
+      </p:sp>
+      <p:sp>
+        <p:nvSpPr>
+          <p:cNvPr id="5" name="Rectangle 4"/>
+          <p:cNvSpPr/>
+          <p:nvPr/>
+        </p:nvSpPr>
+        <p:spPr>
+          <a:xfrm>
+            <a:off x="457200" y="1188720"/>
+            <a:ext cx="3606698" cy="1737360"/>
+          </a:xfrm>
+          <a:prstGeom prst="rect">
+            <a:avLst/>
+          </a:prstGeom>
+          <a:solidFill>
+            <a:srgbClr val="F7FAF7"/>
+          </a:solidFill>
+          <a:ln>
+            <a:solidFill>
+              <a:srgbClr val="DCE8DC"/>
+            </a:solidFill>
+          </a:ln>
+        </p:spPr>
+        <p:style>
+          <a:lnRef idx="1">
+            <a:schemeClr val="accent1"/>
+          </a:lnRef>
+          <a:fillRef idx="3">
+            <a:schemeClr val="accent1"/>
+          </a:fillRef>
+          <a:effectRef idx="2">
+            <a:schemeClr val="accent1"/>
+          </a:effectRef>
+          <a:fontRef idx="minor">
+            <a:schemeClr val="lt1"/>
+          </a:fontRef>
+        </p:style>
+        <p:txBody>
+          <a:bodyPr rtlCol="0" anchor="ctr"/>
+          <a:lstStyle/>
+          <a:p>
+            <a:pPr algn="ctr">
+              <a:defRPr>
+                <a:latin typeface="Roboto"/>
+              </a:defRPr>
+            </a:pPr>
+          </a:p>
+        </p:txBody>
+      </p:sp>
+      <p:sp>
+        <p:nvSpPr>
+          <p:cNvPr id="6" name="TextBox 5"/>
+          <p:cNvSpPr txBox="1"/>
+          <p:nvPr/>
+        </p:nvSpPr>
+        <p:spPr>
+          <a:xfrm>
+            <a:off x="594360" y="1261872"/>
+            <a:ext cx="3332378" cy="384048"/>
+          </a:xfrm>
+          <a:prstGeom prst="rect">
+            <a:avLst/>
+          </a:prstGeom>
+          <a:noFill/>
+        </p:spPr>
+        <p:txBody>
+          <a:bodyPr wrap="square" lIns="45720" rIns="45720">
+            <a:spAutoFit/>
+          </a:bodyPr>
+          <a:lstStyle/>
+          <a:p>
+            <a:pPr>
+              <a:defRPr>
+                <a:latin typeface="Roboto"/>
+              </a:defRPr>
+            </a:pPr>
+            <a:r>
+              <a:rPr sz="1100" b="0">
+                <a:solidFill>
+                  <a:srgbClr val="5F6F63"/>
+                </a:solidFill>
+                <a:latin typeface="Roboto"/>
+              </a:rPr>
+              <a:t>Cheapest to raise: Grants</a:t>
+            </a:r>
+          </a:p>
+        </p:txBody>
+      </p:sp>
+      <p:sp>
+        <p:nvSpPr>
+          <p:cNvPr id="7" name="TextBox 6"/>
+          <p:cNvSpPr txBox="1"/>
+          <p:nvPr/>
+        </p:nvSpPr>
+        <p:spPr>
+          <a:xfrm>
+            <a:off x="594360" y="1627632"/>
+            <a:ext cx="3332378" cy="502920"/>
+          </a:xfrm>
+          <a:prstGeom prst="rect">
+            <a:avLst/>
+          </a:prstGeom>
+          <a:noFill/>
+        </p:spPr>
+        <p:txBody>
+          <a:bodyPr wrap="square" lIns="45720" rIns="45720">
+            <a:spAutoFit/>
+          </a:bodyPr>
+          <a:lstStyle/>
+          <a:p>
+            <a:pPr>
+              <a:defRPr>
+                <a:latin typeface="Roboto"/>
+              </a:defRPr>
+            </a:pPr>
+            <a:r>
+              <a:rPr sz="2600" b="1">
+                <a:solidFill>
+                  <a:srgbClr val="2F7A5D"/>
+                </a:solidFill>
+                <a:latin typeface="Roboto"/>
+              </a:rPr>
+              <a:t>10¢</a:t>
+            </a:r>
+          </a:p>
+        </p:txBody>
+      </p:sp>
+      <p:sp>
+        <p:nvSpPr>
+          <p:cNvPr id="8" name="TextBox 7"/>
+          <p:cNvSpPr txBox="1"/>
+          <p:nvPr/>
+        </p:nvSpPr>
+        <p:spPr>
+          <a:xfrm>
+            <a:off x="594360" y="2542032"/>
+            <a:ext cx="3332378" cy="329184"/>
+          </a:xfrm>
+          <a:prstGeom prst="rect">
+            <a:avLst/>
+          </a:prstGeom>
+          <a:noFill/>
+        </p:spPr>
+        <p:txBody>
+          <a:bodyPr wrap="square" lIns="45720" rIns="45720">
+            <a:spAutoFit/>
+          </a:bodyPr>
+          <a:lstStyle/>
+          <a:p>
+            <a:pPr>
+              <a:defRPr>
+                <a:latin typeface="Roboto"/>
+              </a:defRPr>
+            </a:pPr>
+            <a:r>
+              <a:rPr sz="1000" b="0">
+                <a:solidFill>
+                  <a:srgbClr val="5F6F63"/>
+                </a:solidFill>
+                <a:latin typeface="Roboto"/>
+              </a:rPr>
+              <a:t>per $1 raised in October</a:t>
+            </a:r>
+          </a:p>
+        </p:txBody>
+      </p:sp>
+      <p:sp>
+        <p:nvSpPr>
+          <p:cNvPr id="9" name="Rectangle 8"/>
+          <p:cNvSpPr/>
+          <p:nvPr/>
+        </p:nvSpPr>
+        <p:spPr>
+          <a:xfrm>
+            <a:off x="4292498" y="1188720"/>
+            <a:ext cx="3606698" cy="1737360"/>
+          </a:xfrm>
+          <a:prstGeom prst="rect">
+            <a:avLst/>
+          </a:prstGeom>
+          <a:solidFill>
+            <a:srgbClr val="F7FAF7"/>
+          </a:solidFill>
+          <a:ln>
+            <a:solidFill>
+              <a:srgbClr val="DCE8DC"/>
+            </a:solidFill>
+          </a:ln>
+        </p:spPr>
+        <p:style>
+          <a:lnRef idx="1">
+            <a:schemeClr val="accent1"/>
+          </a:lnRef>
+          <a:fillRef idx="3">
+            <a:schemeClr val="accent1"/>
+          </a:fillRef>
+          <a:effectRef idx="2">
+            <a:schemeClr val="accent1"/>
+          </a:effectRef>
+          <a:fontRef idx="minor">
+            <a:schemeClr val="lt1"/>
+          </a:fontRef>
+        </p:style>
+        <p:txBody>
+          <a:bodyPr rtlCol="0" anchor="ctr"/>
+          <a:lstStyle/>
+          <a:p>
+            <a:pPr algn="ctr">
+              <a:defRPr>
+                <a:latin typeface="Roboto"/>
+              </a:defRPr>
+            </a:pPr>
+          </a:p>
+        </p:txBody>
+      </p:sp>
+      <p:sp>
+        <p:nvSpPr>
+          <p:cNvPr id="10" name="TextBox 9"/>
+          <p:cNvSpPr txBox="1"/>
+          <p:nvPr/>
+        </p:nvSpPr>
+        <p:spPr>
+          <a:xfrm>
+            <a:off x="4429658" y="1261872"/>
+            <a:ext cx="3332378" cy="384048"/>
+          </a:xfrm>
+          <a:prstGeom prst="rect">
+            <a:avLst/>
+          </a:prstGeom>
+          <a:noFill/>
+        </p:spPr>
+        <p:txBody>
+          <a:bodyPr wrap="square" lIns="45720" rIns="45720">
+            <a:spAutoFit/>
+          </a:bodyPr>
+          <a:lstStyle/>
+          <a:p>
+            <a:pPr>
+              <a:defRPr>
+                <a:latin typeface="Roboto"/>
+              </a:defRPr>
+            </a:pPr>
+            <a:r>
+              <a:rPr sz="1100" b="0">
+                <a:solidFill>
+                  <a:srgbClr val="5F6F63"/>
+                </a:solidFill>
+                <a:latin typeface="Roboto"/>
+              </a:rPr>
+              <a:t>Dearest to raise: Donations</a:t>
+            </a:r>
+          </a:p>
+        </p:txBody>
+      </p:sp>
+      <p:sp>
+        <p:nvSpPr>
+          <p:cNvPr id="11" name="TextBox 10"/>
+          <p:cNvSpPr txBox="1"/>
+          <p:nvPr/>
+        </p:nvSpPr>
+        <p:spPr>
+          <a:xfrm>
+            <a:off x="4429658" y="1627632"/>
+            <a:ext cx="3332378" cy="502920"/>
+          </a:xfrm>
+          <a:prstGeom prst="rect">
+            <a:avLst/>
+          </a:prstGeom>
+          <a:noFill/>
+        </p:spPr>
+        <p:txBody>
+          <a:bodyPr wrap="square" lIns="45720" rIns="45720">
+            <a:spAutoFit/>
+          </a:bodyPr>
+          <a:lstStyle/>
+          <a:p>
+            <a:pPr>
+              <a:defRPr>
+                <a:latin typeface="Roboto"/>
+              </a:defRPr>
+            </a:pPr>
+            <a:r>
+              <a:rPr sz="2600" b="1">
+                <a:solidFill>
+                  <a:srgbClr val="2F7A5D"/>
+                </a:solidFill>
+                <a:latin typeface="Roboto"/>
+              </a:rPr>
+              <a:t>14¢</a:t>
+            </a:r>
+          </a:p>
+        </p:txBody>
+      </p:sp>
+      <p:sp>
+        <p:nvSpPr>
+          <p:cNvPr id="12" name="TextBox 11"/>
+          <p:cNvSpPr txBox="1"/>
+          <p:nvPr/>
+        </p:nvSpPr>
+        <p:spPr>
+          <a:xfrm>
+            <a:off x="4429658" y="2542032"/>
+            <a:ext cx="3332378" cy="329184"/>
+          </a:xfrm>
+          <a:prstGeom prst="rect">
+            <a:avLst/>
+          </a:prstGeom>
+          <a:noFill/>
+        </p:spPr>
+        <p:txBody>
+          <a:bodyPr wrap="square" lIns="45720" rIns="45720">
+            <a:spAutoFit/>
+          </a:bodyPr>
+          <a:lstStyle/>
+          <a:p>
+            <a:pPr>
+              <a:defRPr>
+                <a:latin typeface="Roboto"/>
+              </a:defRPr>
+            </a:pPr>
+            <a:r>
+              <a:rPr sz="1000" b="0">
+                <a:solidFill>
+                  <a:srgbClr val="5F6F63"/>
+                </a:solidFill>
+                <a:latin typeface="Roboto"/>
+              </a:rPr>
+              <a:t>per $1 raised in October</a:t>
+            </a:r>
+          </a:p>
+        </p:txBody>
+      </p:sp>
+      <p:sp>
+        <p:nvSpPr>
+          <p:cNvPr id="13" name="Rectangle 12"/>
+          <p:cNvSpPr/>
+          <p:nvPr/>
+        </p:nvSpPr>
+        <p:spPr>
+          <a:xfrm>
+            <a:off x="8127796" y="1188720"/>
+            <a:ext cx="3606698" cy="1737360"/>
+          </a:xfrm>
+          <a:prstGeom prst="rect">
+            <a:avLst/>
+          </a:prstGeom>
+          <a:solidFill>
+            <a:srgbClr val="F7FAF7"/>
+          </a:solidFill>
+          <a:ln>
+            <a:solidFill>
+              <a:srgbClr val="DCE8DC"/>
+            </a:solidFill>
+          </a:ln>
+        </p:spPr>
+        <p:style>
+          <a:lnRef idx="1">
+            <a:schemeClr val="accent1"/>
+          </a:lnRef>
+          <a:fillRef idx="3">
+            <a:schemeClr val="accent1"/>
+          </a:fillRef>
+          <a:effectRef idx="2">
+            <a:schemeClr val="accent1"/>
+          </a:effectRef>
+          <a:fontRef idx="minor">
+            <a:schemeClr val="lt1"/>
+          </a:fontRef>
+        </p:style>
+        <p:txBody>
+          <a:bodyPr rtlCol="0" anchor="ctr"/>
+          <a:lstStyle/>
+          <a:p>
+            <a:pPr algn="ctr">
+              <a:defRPr>
+                <a:latin typeface="Roboto"/>
+              </a:defRPr>
+            </a:pPr>
+          </a:p>
+        </p:txBody>
+      </p:sp>
+      <p:sp>
+        <p:nvSpPr>
+          <p:cNvPr id="14" name="TextBox 13"/>
+          <p:cNvSpPr txBox="1"/>
+          <p:nvPr/>
+        </p:nvSpPr>
+        <p:spPr>
+          <a:xfrm>
+            <a:off x="8264956" y="1261872"/>
+            <a:ext cx="3332378" cy="384048"/>
+          </a:xfrm>
+          <a:prstGeom prst="rect">
+            <a:avLst/>
+          </a:prstGeom>
+          <a:noFill/>
+        </p:spPr>
+        <p:txBody>
+          <a:bodyPr wrap="square" lIns="45720" rIns="45720">
+            <a:spAutoFit/>
+          </a:bodyPr>
+          <a:lstStyle/>
+          <a:p>
+            <a:pPr>
+              <a:defRPr>
+                <a:latin typeface="Roboto"/>
+              </a:defRPr>
+            </a:pPr>
+            <a:r>
+              <a:rPr sz="1100" b="0">
+                <a:solidFill>
+                  <a:srgbClr val="5F6F63"/>
+                </a:solidFill>
+                <a:latin typeface="Roboto"/>
+              </a:rPr>
+              <a:t>Raised, year to date</a:t>
+            </a:r>
+          </a:p>
+        </p:txBody>
+      </p:sp>
+      <p:sp>
+        <p:nvSpPr>
+          <p:cNvPr id="15" name="TextBox 14"/>
+          <p:cNvSpPr txBox="1"/>
+          <p:nvPr/>
+        </p:nvSpPr>
+        <p:spPr>
+          <a:xfrm>
+            <a:off x="8264956" y="1627632"/>
+            <a:ext cx="3332378" cy="502920"/>
+          </a:xfrm>
+          <a:prstGeom prst="rect">
+            <a:avLst/>
+          </a:prstGeom>
+          <a:noFill/>
+        </p:spPr>
+        <p:txBody>
+          <a:bodyPr wrap="square" lIns="45720" rIns="45720">
+            <a:spAutoFit/>
+          </a:bodyPr>
+          <a:lstStyle/>
+          <a:p>
+            <a:pPr>
+              <a:defRPr>
+                <a:latin typeface="Roboto"/>
+              </a:defRPr>
+            </a:pPr>
+            <a:r>
+              <a:rPr sz="2600" b="1">
+                <a:solidFill>
+                  <a:srgbClr val="2F7A5D"/>
+                </a:solidFill>
+                <a:latin typeface="Roboto"/>
+              </a:rPr>
+              <a:t>$350,529</a:t>
+            </a:r>
+          </a:p>
+        </p:txBody>
+      </p:sp>
+      <p:sp>
+        <p:nvSpPr>
+          <p:cNvPr id="16" name="TextBox 15"/>
+          <p:cNvSpPr txBox="1"/>
+          <p:nvPr/>
+        </p:nvSpPr>
+        <p:spPr>
+          <a:xfrm>
+            <a:off x="8264956" y="2542032"/>
+            <a:ext cx="3332378" cy="329184"/>
+          </a:xfrm>
+          <a:prstGeom prst="rect">
+            <a:avLst/>
+          </a:prstGeom>
+          <a:noFill/>
+        </p:spPr>
+        <p:txBody>
+          <a:bodyPr wrap="square" lIns="45720" rIns="45720">
+            <a:spAutoFit/>
+          </a:bodyPr>
+          <a:lstStyle/>
+          <a:p>
+            <a:pPr>
+              <a:defRPr>
+                <a:latin typeface="Roboto"/>
+              </a:defRPr>
+            </a:pPr>
+            <a:r>
+              <a:rPr sz="1000" b="0">
+                <a:solidFill>
+                  <a:srgbClr val="5F6F63"/>
+                </a:solidFill>
+                <a:latin typeface="Roboto"/>
+              </a:rPr>
+              <a:t>Jul to Oct 2025</a:t>
+            </a:r>
+          </a:p>
+        </p:txBody>
+      </p:sp>
+      <p:sp>
+        <p:nvSpPr>
+          <p:cNvPr id="17" name="TextBox 16"/>
+          <p:cNvSpPr txBox="1"/>
+          <p:nvPr/>
+        </p:nvSpPr>
+        <p:spPr>
+          <a:xfrm>
+            <a:off x="457200" y="6492240"/>
+            <a:ext cx="2926080" cy="274320"/>
+          </a:xfrm>
+          <a:prstGeom prst="rect">
+            <a:avLst/>
+          </a:prstGeom>
+          <a:noFill/>
+        </p:spPr>
+        <p:txBody>
+          <a:bodyPr wrap="square" lIns="45720" rIns="45720">
+            <a:spAutoFit/>
+          </a:bodyPr>
+          <a:lstStyle/>
+          <a:p>
+            <a:pPr>
+              <a:defRPr>
+                <a:latin typeface="Roboto"/>
+              </a:defRPr>
+            </a:pPr>
+            <a:r>
+              <a:rPr sz="900" b="0">
+                <a:solidFill>
+                  <a:srgbClr val="5F6F63"/>
+                </a:solidFill>
+                <a:latin typeface="Roboto"/>
+              </a:rPr>
+              <a:t>funding.pptx</a:t>
+            </a:r>
+          </a:p>
+        </p:txBody>
+      </p:sp>
+      <p:sp>
+        <p:nvSpPr>
+          <p:cNvPr id="18" name="TextBox 17"/>
+          <p:cNvSpPr txBox="1"/>
+          <p:nvPr/>
+        </p:nvSpPr>
+        <p:spPr>
+          <a:xfrm>
+            <a:off x="3108960" y="6492240"/>
+            <a:ext cx="5943600" cy="274320"/>
+          </a:xfrm>
+          <a:prstGeom prst="rect">
+            <a:avLst/>
+          </a:prstGeom>
+          <a:noFill/>
+        </p:spPr>
+        <p:txBody>
+          <a:bodyPr wrap="square" lIns="45720" rIns="45720">
+            <a:spAutoFit/>
+          </a:bodyPr>
+          <a:lstStyle/>
+          <a:p>
+            <a:pPr algn="ctr">
+              <a:defRPr>
+                <a:latin typeface="Roboto"/>
+              </a:defRPr>
+            </a:pPr>
+            <a:r>
+              <a:rPr sz="900" b="0">
+                <a:solidFill>
+                  <a:srgbClr val="5F6F63"/>
+                </a:solidFill>
+                <a:latin typeface="Roboto"/>
+              </a:rPr>
+              <a:t>Data retrieved 2pm, Tue 6 Oct 2026 · Generated 10 Oct 2026, 9:55pm · Sample data · Made with Python (python-pptx)</a:t>
+            </a:r>
+          </a:p>
+        </p:txBody>
+      </p:sp>
+      <p:sp>
+        <p:nvSpPr>
+          <p:cNvPr id="19" name="TextBox 18"/>
+          <p:cNvSpPr txBox="1"/>
+          <p:nvPr/>
+        </p:nvSpPr>
+        <p:spPr>
+          <a:xfrm>
+            <a:off x="8503920" y="6492240"/>
+            <a:ext cx="3200400" cy="274320"/>
+          </a:xfrm>
+          <a:prstGeom prst="rect">
+            <a:avLst/>
+          </a:prstGeom>
+          <a:noFill/>
+        </p:spPr>
+        <p:txBody>
+          <a:bodyPr wrap="square" lIns="45720" rIns="45720">
+            <a:spAutoFit/>
+          </a:bodyPr>
+          <a:lstStyle/>
+          <a:p>
+            <a:pPr algn="r">
+              <a:defRPr>
+                <a:latin typeface="Roboto"/>
+              </a:defRPr>
+            </a:pPr>
+            <a:r>
+              <a:rPr sz="900" b="0">
+                <a:solidFill>
+                  <a:srgbClr val="5F6F63"/>
+                </a:solidFill>
+                <a:latin typeface="Roboto"/>
+              </a:rPr>
+              <a:t>Slide 6 of 7</a:t>
+            </a:r>
+          </a:p>
+        </p:txBody>
+      </p:sp>
+    </p:spTree>
+  </p:cSld>
+  <p:clrMapOvr>
+    <a:masterClrMapping/>
+  </p:clrMapOvr>
+</p:sld>
+</file>
+
+<file path=ppt/slides/slide7.xml><?xml version="1.0" encoding="utf-8"?>
 <p:sld xmlns:a="http://schemas.openxmlformats.org/drawingml/2006/main" xmlns:p="http://schemas.openxmlformats.org/presentationml/2006/main" xmlns:r="http://schemas.openxmlformats.org/officeDocument/2006/relationships">
   <p:cSld>
     <p:spTree>
@@ -8282,7 +9109,7 @@
                 </a:solidFill>
                 <a:latin typeface="Roboto"/>
               </a:rPr>
-              <a:t>Data retrieved 2pm, Tue 6 Oct 2026 · Generated 8 Oct 2026, 9:35am · Sample data · Made with Python (python-pptx)</a:t>
+              <a:t>Data retrieved 2pm, Tue 6 Oct 2026 · Generated 10 Oct 2026, 9:55pm · Sample data · Made with Python (python-pptx)</a:t>
             </a:r>
           </a:p>
         </p:txBody>
@@ -8321,7 +9148,7 @@
                 </a:solidFill>
                 <a:latin typeface="Roboto"/>
               </a:rPr>
-              <a:t>Slide 6 of 6</a:t>
+              <a:t>Slide 7 of 7</a:t>
             </a:r>
           </a:p>
         </p:txBody>
